--- a/docs/slides/Vértice-Slides-Auxiliares.pptx
+++ b/docs/slides/Vértice-Slides-Auxiliares.pptx
@@ -7,8 +7,6 @@
   <p:sldIdLst>
     <p:sldId id="256" r:id="rId7"/>
     <p:sldId id="257" r:id="rId8"/>
-    <p:sldId id="258" r:id="rId9"/>
-    <p:sldId id="259" r:id="rId10"/>
   </p:sldIdLst>
   <p:sldSz cx="12191695" cy="6858000" type="screen4x3"/>
   <p:notesSz cx="6858000" cy="9144000"/>
@@ -3178,7 +3176,7 @@
               </a:defRPr>
             </a:pPr>
             <a:r>
-              <a:t>A1 / CONTRATO DOS DADOS</a:t>
+              <a:t>14 / DELIBERAÇÕES E PRÓXIMOS PASSOS</a:t>
             </a:r>
           </a:p>
         </p:txBody>
@@ -3230,47 +3228,8 @@
         </p:nvSpPr>
         <p:spPr>
           <a:xfrm>
-            <a:off x="548640" y="749808"/>
-            <a:ext cx="10972800" cy="713232"/>
-          </a:xfrm>
-          <a:prstGeom prst="rect">
-            <a:avLst/>
-          </a:prstGeom>
-          <a:noFill/>
-        </p:spPr>
-        <p:txBody>
-          <a:bodyPr wrap="square" lIns="0" rIns="0" tIns="0" bIns="0" anchor="t">
-            <a:spAutoFit/>
-          </a:bodyPr>
-          <a:lstStyle/>
-          <a:p>
-            <a:pPr algn="l">
-              <a:lnSpc>
-                <a:spcPct val="95000"/>
-              </a:lnSpc>
-              <a:defRPr sz="2700" b="1">
-                <a:solidFill>
-                  <a:srgbClr val="37183E"/>
-                </a:solidFill>
-                <a:latin typeface="Lato"/>
-              </a:defRPr>
-            </a:pPr>
-            <a:r>
-              <a:t>O número muda quando muda a fonte.</a:t>
-            </a:r>
-          </a:p>
-        </p:txBody>
-      </p:sp>
-      <p:sp>
-        <p:nvSpPr>
-          <p:cNvPr id="6" name="TextBox 5"/>
-          <p:cNvSpPr txBox="1"/>
-          <p:nvPr/>
-        </p:nvSpPr>
-        <p:spPr>
-          <a:xfrm>
-            <a:off x="548640" y="1417320"/>
-            <a:ext cx="10789920" cy="329184"/>
+            <a:off x="548640" y="694944"/>
+            <a:ext cx="10972800" cy="594360"/>
           </a:xfrm>
           <a:prstGeom prst="rect">
             <a:avLst/>
@@ -3287,7 +3246,46 @@
               <a:lnSpc>
                 <a:spcPct val="100000"/>
               </a:lnSpc>
-              <a:defRPr sz="1500" b="0">
+              <a:defRPr sz="2600" b="1">
+                <a:solidFill>
+                  <a:srgbClr val="37183E"/>
+                </a:solidFill>
+                <a:latin typeface="Lato"/>
+              </a:defRPr>
+            </a:pPr>
+            <a:r>
+              <a:t>Decisões necessárias para início da execução</a:t>
+            </a:r>
+          </a:p>
+        </p:txBody>
+      </p:sp>
+      <p:sp>
+        <p:nvSpPr>
+          <p:cNvPr id="6" name="TextBox 5"/>
+          <p:cNvSpPr txBox="1"/>
+          <p:nvPr/>
+        </p:nvSpPr>
+        <p:spPr>
+          <a:xfrm>
+            <a:off x="548640" y="1298448"/>
+            <a:ext cx="10972800" cy="320040"/>
+          </a:xfrm>
+          <a:prstGeom prst="rect">
+            <a:avLst/>
+          </a:prstGeom>
+          <a:noFill/>
+        </p:spPr>
+        <p:txBody>
+          <a:bodyPr wrap="square" lIns="0" rIns="0" tIns="0" bIns="0" anchor="t">
+            <a:spAutoFit/>
+          </a:bodyPr>
+          <a:lstStyle/>
+          <a:p>
+            <a:pPr algn="l">
+              <a:lnSpc>
+                <a:spcPct val="100000"/>
+              </a:lnSpc>
+              <a:defRPr sz="1400" b="0">
                 <a:solidFill>
                   <a:srgbClr val="5D5860"/>
                 </a:solidFill>
@@ -3295,7 +3293,7 @@
               </a:defRPr>
             </a:pPr>
             <a:r>
-              <a:t>Antes de cruzar bases, fixe período, grão e definição financeira.</a:t>
+              <a:t>Aprovação orçamentária e alocação de equipe para o plano de 90 dias.</a:t>
             </a:r>
           </a:p>
         </p:txBody>
@@ -3309,7 +3307,7 @@
         <p:spPr>
           <a:xfrm>
             <a:off x="548640" y="1874519"/>
-            <a:ext cx="2670048" cy="3154680"/>
+            <a:ext cx="3493008" cy="3108960"/>
           </a:xfrm>
           <a:prstGeom prst="rect">
             <a:avLst/>
@@ -3354,7 +3352,7 @@
         <p:spPr>
           <a:xfrm>
             <a:off x="548640" y="1874519"/>
-            <a:ext cx="54864" cy="3154680"/>
+            <a:ext cx="3493008" cy="73152"/>
           </a:xfrm>
           <a:prstGeom prst="rect">
             <a:avLst/>
@@ -3398,811 +3396,8 @@
         </p:nvSpPr>
         <p:spPr>
           <a:xfrm>
-            <a:off x="758952" y="2057400"/>
-            <a:ext cx="2286000" cy="228600"/>
-          </a:xfrm>
-          <a:prstGeom prst="rect">
-            <a:avLst/>
-          </a:prstGeom>
-          <a:noFill/>
-        </p:spPr>
-        <p:txBody>
-          <a:bodyPr wrap="square" lIns="0" rIns="0" tIns="0" bIns="0" anchor="t">
-            <a:spAutoFit/>
-          </a:bodyPr>
-          <a:lstStyle/>
-          <a:p>
-            <a:pPr algn="l">
-              <a:lnSpc>
-                <a:spcPct val="100000"/>
-              </a:lnSpc>
-              <a:defRPr sz="950" b="1">
-                <a:solidFill>
-                  <a:srgbClr val="E000D2"/>
-                </a:solidFill>
-                <a:latin typeface="Lato"/>
-              </a:defRPr>
-            </a:pPr>
-            <a:r>
-              <a:t>VENDAS · 391 DIAS</a:t>
-            </a:r>
-          </a:p>
-        </p:txBody>
-      </p:sp>
-      <p:sp>
-        <p:nvSpPr>
-          <p:cNvPr id="10" name="TextBox 9"/>
-          <p:cNvSpPr txBox="1"/>
-          <p:nvPr/>
-        </p:nvSpPr>
-        <p:spPr>
-          <a:xfrm>
-            <a:off x="758952" y="2350008"/>
-            <a:ext cx="2286000" cy="475488"/>
-          </a:xfrm>
-          <a:prstGeom prst="rect">
-            <a:avLst/>
-          </a:prstGeom>
-          <a:noFill/>
-        </p:spPr>
-        <p:txBody>
-          <a:bodyPr wrap="square" lIns="0" rIns="0" tIns="0" bIns="0" anchor="t">
-            <a:spAutoFit/>
-          </a:bodyPr>
-          <a:lstStyle/>
-          <a:p>
-            <a:pPr algn="l">
-              <a:lnSpc>
-                <a:spcPct val="100000"/>
-              </a:lnSpc>
-              <a:defRPr sz="2200" b="1">
-                <a:solidFill>
-                  <a:srgbClr val="37183E"/>
-                </a:solidFill>
-                <a:latin typeface="Lato"/>
-              </a:defRPr>
-            </a:pPr>
-            <a:r>
-              <a:t>R$ 14,17M</a:t>
-            </a:r>
-          </a:p>
-        </p:txBody>
-      </p:sp>
-      <p:sp>
-        <p:nvSpPr>
-          <p:cNvPr id="11" name="TextBox 10"/>
-          <p:cNvSpPr txBox="1"/>
-          <p:nvPr/>
-        </p:nvSpPr>
-        <p:spPr>
-          <a:xfrm>
-            <a:off x="758952" y="2907791"/>
-            <a:ext cx="2286000" cy="1984248"/>
-          </a:xfrm>
-          <a:prstGeom prst="rect">
-            <a:avLst/>
-          </a:prstGeom>
-          <a:noFill/>
-        </p:spPr>
-        <p:txBody>
-          <a:bodyPr wrap="square" lIns="0" rIns="0" tIns="0" bIns="0" anchor="t">
-            <a:spAutoFit/>
-          </a:bodyPr>
-          <a:lstStyle/>
-          <a:p>
-            <a:pPr algn="l">
-              <a:lnSpc>
-                <a:spcPct val="105000"/>
-              </a:lnSpc>
-              <a:defRPr sz="1150" b="0">
-                <a:solidFill>
-                  <a:srgbClr val="5D5860"/>
-                </a:solidFill>
-                <a:latin typeface="Lato"/>
-              </a:defRPr>
-            </a:pPr>
-            <a:r>
-              <a:t>Receita efetivamente retida.</a:t>
-            </a:r>
-            <a:br/>
-            <a:br/>
-            <a:r>
-              <a:t>R$ 16,67M é receita nominal de pedidos aprovados, antes do estorno das devoluções.</a:t>
-            </a:r>
-          </a:p>
-        </p:txBody>
-      </p:sp>
-      <p:sp>
-        <p:nvSpPr>
-          <p:cNvPr id="12" name="Rectangle 11"/>
-          <p:cNvSpPr/>
-          <p:nvPr/>
-        </p:nvSpPr>
-        <p:spPr>
-          <a:xfrm>
-            <a:off x="3346704" y="1874519"/>
-            <a:ext cx="2670048" cy="3154680"/>
-          </a:xfrm>
-          <a:prstGeom prst="rect">
-            <a:avLst/>
-          </a:prstGeom>
-          <a:solidFill>
-            <a:srgbClr val="F7EFFA"/>
-          </a:solidFill>
-          <a:ln>
-            <a:solidFill>
-              <a:srgbClr val="F7EFFA"/>
-            </a:solidFill>
-          </a:ln>
-        </p:spPr>
-        <p:style>
-          <a:lnRef idx="1">
-            <a:schemeClr val="accent1"/>
-          </a:lnRef>
-          <a:fillRef idx="3">
-            <a:schemeClr val="accent1"/>
-          </a:fillRef>
-          <a:effectRef idx="2">
-            <a:schemeClr val="accent1"/>
-          </a:effectRef>
-          <a:fontRef idx="minor">
-            <a:schemeClr val="lt1"/>
-          </a:fontRef>
-        </p:style>
-        <p:txBody>
-          <a:bodyPr rtlCol="0" anchor="ctr"/>
-          <a:lstStyle/>
-          <a:p>
-            <a:pPr algn="ctr"/>
-          </a:p>
-        </p:txBody>
-      </p:sp>
-      <p:sp>
-        <p:nvSpPr>
-          <p:cNvPr id="13" name="Rectangle 12"/>
-          <p:cNvSpPr/>
-          <p:nvPr/>
-        </p:nvSpPr>
-        <p:spPr>
-          <a:xfrm>
-            <a:off x="3346704" y="1874519"/>
-            <a:ext cx="54864" cy="3154680"/>
-          </a:xfrm>
-          <a:prstGeom prst="rect">
-            <a:avLst/>
-          </a:prstGeom>
-          <a:solidFill>
-            <a:srgbClr val="561265"/>
-          </a:solidFill>
-          <a:ln>
-            <a:solidFill>
-              <a:srgbClr val="561265"/>
-            </a:solidFill>
-          </a:ln>
-        </p:spPr>
-        <p:style>
-          <a:lnRef idx="1">
-            <a:schemeClr val="accent1"/>
-          </a:lnRef>
-          <a:fillRef idx="3">
-            <a:schemeClr val="accent1"/>
-          </a:fillRef>
-          <a:effectRef idx="2">
-            <a:schemeClr val="accent1"/>
-          </a:effectRef>
-          <a:fontRef idx="minor">
-            <a:schemeClr val="lt1"/>
-          </a:fontRef>
-        </p:style>
-        <p:txBody>
-          <a:bodyPr rtlCol="0" anchor="ctr"/>
-          <a:lstStyle/>
-          <a:p>
-            <a:pPr algn="ctr"/>
-          </a:p>
-        </p:txBody>
-      </p:sp>
-      <p:sp>
-        <p:nvSpPr>
-          <p:cNvPr id="14" name="TextBox 13"/>
-          <p:cNvSpPr txBox="1"/>
-          <p:nvPr/>
-        </p:nvSpPr>
-        <p:spPr>
-          <a:xfrm>
-            <a:off x="3557016" y="2057400"/>
-            <a:ext cx="2286000" cy="228600"/>
-          </a:xfrm>
-          <a:prstGeom prst="rect">
-            <a:avLst/>
-          </a:prstGeom>
-          <a:noFill/>
-        </p:spPr>
-        <p:txBody>
-          <a:bodyPr wrap="square" lIns="0" rIns="0" tIns="0" bIns="0" anchor="t">
-            <a:spAutoFit/>
-          </a:bodyPr>
-          <a:lstStyle/>
-          <a:p>
-            <a:pPr algn="l">
-              <a:lnSpc>
-                <a:spcPct val="100000"/>
-              </a:lnSpc>
-              <a:defRPr sz="950" b="1">
-                <a:solidFill>
-                  <a:srgbClr val="E000D2"/>
-                </a:solidFill>
-                <a:latin typeface="Lato"/>
-              </a:defRPr>
-            </a:pPr>
-            <a:r>
-              <a:t>ESTOQUE · SNAPSHOT AUSENTE</a:t>
-            </a:r>
-          </a:p>
-        </p:txBody>
-      </p:sp>
-      <p:sp>
-        <p:nvSpPr>
-          <p:cNvPr id="15" name="TextBox 14"/>
-          <p:cNvSpPr txBox="1"/>
-          <p:nvPr/>
-        </p:nvSpPr>
-        <p:spPr>
-          <a:xfrm>
-            <a:off x="3557016" y="2350008"/>
-            <a:ext cx="2286000" cy="475488"/>
-          </a:xfrm>
-          <a:prstGeom prst="rect">
-            <a:avLst/>
-          </a:prstGeom>
-          <a:noFill/>
-        </p:spPr>
-        <p:txBody>
-          <a:bodyPr wrap="square" lIns="0" rIns="0" tIns="0" bIns="0" anchor="t">
-            <a:spAutoFit/>
-          </a:bodyPr>
-          <a:lstStyle/>
-          <a:p>
-            <a:pPr algn="l">
-              <a:lnSpc>
-                <a:spcPct val="100000"/>
-              </a:lnSpc>
-              <a:defRPr sz="2200" b="1">
-                <a:solidFill>
-                  <a:srgbClr val="37183E"/>
-                </a:solidFill>
-                <a:latin typeface="Lato"/>
-              </a:defRPr>
-            </a:pPr>
-            <a:r>
-              <a:t>99 + 701</a:t>
-            </a:r>
-          </a:p>
-        </p:txBody>
-      </p:sp>
-      <p:sp>
-        <p:nvSpPr>
-          <p:cNvPr id="16" name="TextBox 15"/>
-          <p:cNvSpPr txBox="1"/>
-          <p:nvPr/>
-        </p:nvSpPr>
-        <p:spPr>
-          <a:xfrm>
-            <a:off x="3557016" y="2907791"/>
-            <a:ext cx="2286000" cy="1984248"/>
-          </a:xfrm>
-          <a:prstGeom prst="rect">
-            <a:avLst/>
-          </a:prstGeom>
-          <a:noFill/>
-        </p:spPr>
-        <p:txBody>
-          <a:bodyPr wrap="square" lIns="0" rIns="0" tIns="0" bIns="0" anchor="t">
-            <a:spAutoFit/>
-          </a:bodyPr>
-          <a:lstStyle/>
-          <a:p>
-            <a:pPr algn="l">
-              <a:lnSpc>
-                <a:spcPct val="105000"/>
-              </a:lnSpc>
-              <a:defRPr sz="1150" b="0">
-                <a:solidFill>
-                  <a:srgbClr val="5D5860"/>
-                </a:solidFill>
-                <a:latin typeface="Lato"/>
-              </a:defRPr>
-            </a:pPr>
-            <a:r>
-              <a:t>99 SKUs zerados e 701 no/abaixo do ponto de pedido.</a:t>
-            </a:r>
-            <a:br/>
-            <a:br/>
-            <a:r>
-              <a:t>Saldo operacional é válido; a data da posição não foi fornecida.</a:t>
-            </a:r>
-          </a:p>
-        </p:txBody>
-      </p:sp>
-      <p:sp>
-        <p:nvSpPr>
-          <p:cNvPr id="17" name="Rectangle 16"/>
-          <p:cNvSpPr/>
-          <p:nvPr/>
-        </p:nvSpPr>
-        <p:spPr>
-          <a:xfrm>
-            <a:off x="6144768" y="1874519"/>
-            <a:ext cx="2670048" cy="3154680"/>
-          </a:xfrm>
-          <a:prstGeom prst="rect">
-            <a:avLst/>
-          </a:prstGeom>
-          <a:solidFill>
-            <a:srgbClr val="F7EFFA"/>
-          </a:solidFill>
-          <a:ln>
-            <a:solidFill>
-              <a:srgbClr val="F7EFFA"/>
-            </a:solidFill>
-          </a:ln>
-        </p:spPr>
-        <p:style>
-          <a:lnRef idx="1">
-            <a:schemeClr val="accent1"/>
-          </a:lnRef>
-          <a:fillRef idx="3">
-            <a:schemeClr val="accent1"/>
-          </a:fillRef>
-          <a:effectRef idx="2">
-            <a:schemeClr val="accent1"/>
-          </a:effectRef>
-          <a:fontRef idx="minor">
-            <a:schemeClr val="lt1"/>
-          </a:fontRef>
-        </p:style>
-        <p:txBody>
-          <a:bodyPr rtlCol="0" anchor="ctr"/>
-          <a:lstStyle/>
-          <a:p>
-            <a:pPr algn="ctr"/>
-          </a:p>
-        </p:txBody>
-      </p:sp>
-      <p:sp>
-        <p:nvSpPr>
-          <p:cNvPr id="18" name="Rectangle 17"/>
-          <p:cNvSpPr/>
-          <p:nvPr/>
-        </p:nvSpPr>
-        <p:spPr>
-          <a:xfrm>
-            <a:off x="6144768" y="1874519"/>
-            <a:ext cx="54864" cy="3154680"/>
-          </a:xfrm>
-          <a:prstGeom prst="rect">
-            <a:avLst/>
-          </a:prstGeom>
-          <a:solidFill>
-            <a:srgbClr val="561265"/>
-          </a:solidFill>
-          <a:ln>
-            <a:solidFill>
-              <a:srgbClr val="561265"/>
-            </a:solidFill>
-          </a:ln>
-        </p:spPr>
-        <p:style>
-          <a:lnRef idx="1">
-            <a:schemeClr val="accent1"/>
-          </a:lnRef>
-          <a:fillRef idx="3">
-            <a:schemeClr val="accent1"/>
-          </a:fillRef>
-          <a:effectRef idx="2">
-            <a:schemeClr val="accent1"/>
-          </a:effectRef>
-          <a:fontRef idx="minor">
-            <a:schemeClr val="lt1"/>
-          </a:fontRef>
-        </p:style>
-        <p:txBody>
-          <a:bodyPr rtlCol="0" anchor="ctr"/>
-          <a:lstStyle/>
-          <a:p>
-            <a:pPr algn="ctr"/>
-          </a:p>
-        </p:txBody>
-      </p:sp>
-      <p:sp>
-        <p:nvSpPr>
-          <p:cNvPr id="19" name="TextBox 18"/>
-          <p:cNvSpPr txBox="1"/>
-          <p:nvPr/>
-        </p:nvSpPr>
-        <p:spPr>
-          <a:xfrm>
-            <a:off x="6355080" y="2057400"/>
-            <a:ext cx="2286000" cy="228600"/>
-          </a:xfrm>
-          <a:prstGeom prst="rect">
-            <a:avLst/>
-          </a:prstGeom>
-          <a:noFill/>
-        </p:spPr>
-        <p:txBody>
-          <a:bodyPr wrap="square" lIns="0" rIns="0" tIns="0" bIns="0" anchor="t">
-            <a:spAutoFit/>
-          </a:bodyPr>
-          <a:lstStyle/>
-          <a:p>
-            <a:pPr algn="l">
-              <a:lnSpc>
-                <a:spcPct val="100000"/>
-              </a:lnSpc>
-              <a:defRPr sz="950" b="1">
-                <a:solidFill>
-                  <a:srgbClr val="E000D2"/>
-                </a:solidFill>
-                <a:latin typeface="Lato"/>
-              </a:defRPr>
-            </a:pPr>
-            <a:r>
-              <a:t>MARKETING · 2023–2025</a:t>
-            </a:r>
-          </a:p>
-        </p:txBody>
-      </p:sp>
-      <p:sp>
-        <p:nvSpPr>
-          <p:cNvPr id="20" name="TextBox 19"/>
-          <p:cNvSpPr txBox="1"/>
-          <p:nvPr/>
-        </p:nvSpPr>
-        <p:spPr>
-          <a:xfrm>
-            <a:off x="6355080" y="2350008"/>
-            <a:ext cx="2286000" cy="475488"/>
-          </a:xfrm>
-          <a:prstGeom prst="rect">
-            <a:avLst/>
-          </a:prstGeom>
-          <a:noFill/>
-        </p:spPr>
-        <p:txBody>
-          <a:bodyPr wrap="square" lIns="0" rIns="0" tIns="0" bIns="0" anchor="t">
-            <a:spAutoFit/>
-          </a:bodyPr>
-          <a:lstStyle/>
-          <a:p>
-            <a:pPr algn="l">
-              <a:lnSpc>
-                <a:spcPct val="100000"/>
-              </a:lnSpc>
-              <a:defRPr sz="2200" b="1">
-                <a:solidFill>
-                  <a:srgbClr val="37183E"/>
-                </a:solidFill>
-                <a:latin typeface="Lato"/>
-              </a:defRPr>
-            </a:pPr>
-            <a:r>
-              <a:t>Sem ROAS real</a:t>
-            </a:r>
-          </a:p>
-        </p:txBody>
-      </p:sp>
-      <p:sp>
-        <p:nvSpPr>
-          <p:cNvPr id="21" name="TextBox 20"/>
-          <p:cNvSpPr txBox="1"/>
-          <p:nvPr/>
-        </p:nvSpPr>
-        <p:spPr>
-          <a:xfrm>
-            <a:off x="6355080" y="2907791"/>
-            <a:ext cx="2286000" cy="1984248"/>
-          </a:xfrm>
-          <a:prstGeom prst="rect">
-            <a:avLst/>
-          </a:prstGeom>
-          <a:noFill/>
-        </p:spPr>
-        <p:txBody>
-          <a:bodyPr wrap="square" lIns="0" rIns="0" tIns="0" bIns="0" anchor="t">
-            <a:spAutoFit/>
-          </a:bodyPr>
-          <a:lstStyle/>
-          <a:p>
-            <a:pPr algn="l">
-              <a:lnSpc>
-                <a:spcPct val="105000"/>
-              </a:lnSpc>
-              <a:defRPr sz="1150" b="0">
-                <a:solidFill>
-                  <a:srgbClr val="5D5860"/>
-                </a:solidFill>
-                <a:latin typeface="Lato"/>
-              </a:defRPr>
-            </a:pPr>
-            <a:r>
-              <a:t>Não há campaign_id ou janela de atribuição nos pedidos.</a:t>
-            </a:r>
-            <a:br/>
-            <a:br/>
-            <a:r>
-              <a:t>Comparações por canal são exploratórias, não causais.</a:t>
-            </a:r>
-          </a:p>
-        </p:txBody>
-      </p:sp>
-      <p:sp>
-        <p:nvSpPr>
-          <p:cNvPr id="22" name="Rectangle 21"/>
-          <p:cNvSpPr/>
-          <p:nvPr/>
-        </p:nvSpPr>
-        <p:spPr>
-          <a:xfrm>
-            <a:off x="8942832" y="1874519"/>
-            <a:ext cx="2697480" cy="3154680"/>
-          </a:xfrm>
-          <a:prstGeom prst="rect">
-            <a:avLst/>
-          </a:prstGeom>
-          <a:solidFill>
-            <a:srgbClr val="F7EFFA"/>
-          </a:solidFill>
-          <a:ln>
-            <a:solidFill>
-              <a:srgbClr val="F7EFFA"/>
-            </a:solidFill>
-          </a:ln>
-        </p:spPr>
-        <p:style>
-          <a:lnRef idx="1">
-            <a:schemeClr val="accent1"/>
-          </a:lnRef>
-          <a:fillRef idx="3">
-            <a:schemeClr val="accent1"/>
-          </a:fillRef>
-          <a:effectRef idx="2">
-            <a:schemeClr val="accent1"/>
-          </a:effectRef>
-          <a:fontRef idx="minor">
-            <a:schemeClr val="lt1"/>
-          </a:fontRef>
-        </p:style>
-        <p:txBody>
-          <a:bodyPr rtlCol="0" anchor="ctr"/>
-          <a:lstStyle/>
-          <a:p>
-            <a:pPr algn="ctr"/>
-          </a:p>
-        </p:txBody>
-      </p:sp>
-      <p:sp>
-        <p:nvSpPr>
-          <p:cNvPr id="23" name="Rectangle 22"/>
-          <p:cNvSpPr/>
-          <p:nvPr/>
-        </p:nvSpPr>
-        <p:spPr>
-          <a:xfrm>
-            <a:off x="8942832" y="1874519"/>
-            <a:ext cx="54864" cy="3154680"/>
-          </a:xfrm>
-          <a:prstGeom prst="rect">
-            <a:avLst/>
-          </a:prstGeom>
-          <a:solidFill>
-            <a:srgbClr val="561265"/>
-          </a:solidFill>
-          <a:ln>
-            <a:solidFill>
-              <a:srgbClr val="561265"/>
-            </a:solidFill>
-          </a:ln>
-        </p:spPr>
-        <p:style>
-          <a:lnRef idx="1">
-            <a:schemeClr val="accent1"/>
-          </a:lnRef>
-          <a:fillRef idx="3">
-            <a:schemeClr val="accent1"/>
-          </a:fillRef>
-          <a:effectRef idx="2">
-            <a:schemeClr val="accent1"/>
-          </a:effectRef>
-          <a:fontRef idx="minor">
-            <a:schemeClr val="lt1"/>
-          </a:fontRef>
-        </p:style>
-        <p:txBody>
-          <a:bodyPr rtlCol="0" anchor="ctr"/>
-          <a:lstStyle/>
-          <a:p>
-            <a:pPr algn="ctr"/>
-          </a:p>
-        </p:txBody>
-      </p:sp>
-      <p:sp>
-        <p:nvSpPr>
-          <p:cNvPr id="24" name="TextBox 23"/>
-          <p:cNvSpPr txBox="1"/>
-          <p:nvPr/>
-        </p:nvSpPr>
-        <p:spPr>
-          <a:xfrm>
-            <a:off x="9153144" y="2057400"/>
-            <a:ext cx="2313432" cy="228600"/>
-          </a:xfrm>
-          <a:prstGeom prst="rect">
-            <a:avLst/>
-          </a:prstGeom>
-          <a:noFill/>
-        </p:spPr>
-        <p:txBody>
-          <a:bodyPr wrap="square" lIns="0" rIns="0" tIns="0" bIns="0" anchor="t">
-            <a:spAutoFit/>
-          </a:bodyPr>
-          <a:lstStyle/>
-          <a:p>
-            <a:pPr algn="l">
-              <a:lnSpc>
-                <a:spcPct val="100000"/>
-              </a:lnSpc>
-              <a:defRPr sz="950" b="1">
-                <a:solidFill>
-                  <a:srgbClr val="E000D2"/>
-                </a:solidFill>
-                <a:latin typeface="Lato"/>
-              </a:defRPr>
-            </a:pPr>
-            <a:r>
-              <a:t>CRM + CX · BAIXA COBERTURA</a:t>
-            </a:r>
-          </a:p>
-        </p:txBody>
-      </p:sp>
-      <p:sp>
-        <p:nvSpPr>
-          <p:cNvPr id="25" name="TextBox 24"/>
-          <p:cNvSpPr txBox="1"/>
-          <p:nvPr/>
-        </p:nvSpPr>
-        <p:spPr>
-          <a:xfrm>
-            <a:off x="9153144" y="2350008"/>
-            <a:ext cx="2313432" cy="475488"/>
-          </a:xfrm>
-          <a:prstGeom prst="rect">
-            <a:avLst/>
-          </a:prstGeom>
-          <a:noFill/>
-        </p:spPr>
-        <p:txBody>
-          <a:bodyPr wrap="square" lIns="0" rIns="0" tIns="0" bIns="0" anchor="t">
-            <a:spAutoFit/>
-          </a:bodyPr>
-          <a:lstStyle/>
-          <a:p>
-            <a:pPr algn="l">
-              <a:lnSpc>
-                <a:spcPct val="100000"/>
-              </a:lnSpc>
-              <a:defRPr sz="2200" b="1">
-                <a:solidFill>
-                  <a:srgbClr val="37183E"/>
-                </a:solidFill>
-                <a:latin typeface="Lato"/>
-              </a:defRPr>
-            </a:pPr>
-            <a:r>
-              <a:t>2,3%</a:t>
-            </a:r>
-          </a:p>
-        </p:txBody>
-      </p:sp>
-      <p:sp>
-        <p:nvSpPr>
-          <p:cNvPr id="26" name="TextBox 25"/>
-          <p:cNvSpPr txBox="1"/>
-          <p:nvPr/>
-        </p:nvSpPr>
-        <p:spPr>
-          <a:xfrm>
-            <a:off x="9153144" y="2907791"/>
-            <a:ext cx="2313432" cy="1984248"/>
-          </a:xfrm>
-          <a:prstGeom prst="rect">
-            <a:avLst/>
-          </a:prstGeom>
-          <a:noFill/>
-        </p:spPr>
-        <p:txBody>
-          <a:bodyPr wrap="square" lIns="0" rIns="0" tIns="0" bIns="0" anchor="t">
-            <a:spAutoFit/>
-          </a:bodyPr>
-          <a:lstStyle/>
-          <a:p>
-            <a:pPr algn="l">
-              <a:lnSpc>
-                <a:spcPct val="105000"/>
-              </a:lnSpc>
-              <a:defRPr sz="1150" b="0">
-                <a:solidFill>
-                  <a:srgbClr val="5D5860"/>
-                </a:solidFill>
-                <a:latin typeface="Lato"/>
-              </a:defRPr>
-            </a:pPr>
-            <a:r>
-              <a:t>Só 346 de 15 mil clientes aparecem em Vendas.</a:t>
-            </a:r>
-            <a:br/>
-            <a:br/>
-            <a:r>
-              <a:t>65,4% dos tickets citam pedidos fora do extrato disponível.</a:t>
-            </a:r>
-          </a:p>
-        </p:txBody>
-      </p:sp>
-      <p:sp>
-        <p:nvSpPr>
-          <p:cNvPr id="27" name="Rectangle 26"/>
-          <p:cNvSpPr/>
-          <p:nvPr/>
-        </p:nvSpPr>
-        <p:spPr>
-          <a:xfrm>
-            <a:off x="548640" y="5330952"/>
-            <a:ext cx="11091672" cy="658368"/>
-          </a:xfrm>
-          <a:prstGeom prst="rect">
-            <a:avLst/>
-          </a:prstGeom>
-          <a:solidFill>
-            <a:srgbClr val="561265"/>
-          </a:solidFill>
-          <a:ln>
-            <a:solidFill>
-              <a:srgbClr val="561265"/>
-            </a:solidFill>
-          </a:ln>
-        </p:spPr>
-        <p:style>
-          <a:lnRef idx="1">
-            <a:schemeClr val="accent1"/>
-          </a:lnRef>
-          <a:fillRef idx="3">
-            <a:schemeClr val="accent1"/>
-          </a:fillRef>
-          <a:effectRef idx="2">
-            <a:schemeClr val="accent1"/>
-          </a:effectRef>
-          <a:fontRef idx="minor">
-            <a:schemeClr val="lt1"/>
-          </a:fontRef>
-        </p:style>
-        <p:txBody>
-          <a:bodyPr rtlCol="0" anchor="ctr"/>
-          <a:lstStyle/>
-          <a:p>
-            <a:pPr algn="ctr"/>
-          </a:p>
-        </p:txBody>
-      </p:sp>
-      <p:sp>
-        <p:nvSpPr>
-          <p:cNvPr id="28" name="TextBox 27"/>
-          <p:cNvSpPr txBox="1"/>
-          <p:nvPr/>
-        </p:nvSpPr>
-        <p:spPr>
-          <a:xfrm>
-            <a:off x="777240" y="5504688"/>
-            <a:ext cx="1389888" cy="201168"/>
+            <a:off x="804672" y="2148840"/>
+            <a:ext cx="2980944" cy="256032"/>
           </a:xfrm>
           <a:prstGeom prst="rect">
             <a:avLst/>
@@ -4227,21 +3422,21 @@
               </a:defRPr>
             </a:pPr>
             <a:r>
-              <a:t>REGRA DE LEITURA</a:t>
-            </a:r>
-          </a:p>
-        </p:txBody>
-      </p:sp>
-      <p:sp>
-        <p:nvSpPr>
-          <p:cNvPr id="29" name="TextBox 28"/>
+              <a:t>01 / ORÇAMENTO</a:t>
+            </a:r>
+          </a:p>
+        </p:txBody>
+      </p:sp>
+      <p:sp>
+        <p:nvSpPr>
+          <p:cNvPr id="10" name="TextBox 9"/>
           <p:cNvSpPr txBox="1"/>
           <p:nvPr/>
         </p:nvSpPr>
         <p:spPr>
           <a:xfrm>
-            <a:off x="2240280" y="5449824"/>
-            <a:ext cx="9070848" cy="292608"/>
+            <a:off x="804672" y="2496312"/>
+            <a:ext cx="2980944" cy="594360"/>
           </a:xfrm>
           <a:prstGeom prst="rect">
             <a:avLst/>
@@ -4258,29 +3453,29 @@
               <a:lnSpc>
                 <a:spcPct val="100000"/>
               </a:lnSpc>
-              <a:defRPr sz="1400" b="1">
-                <a:solidFill>
-                  <a:srgbClr val="FFFFFF"/>
+              <a:defRPr sz="2000" b="1">
+                <a:solidFill>
+                  <a:srgbClr val="37183E"/>
                 </a:solidFill>
                 <a:latin typeface="Lato"/>
               </a:defRPr>
             </a:pPr>
             <a:r>
-              <a:t>KPIs dentro de cada base são auditáveis; métricas cruzadas exigem cobertura explícita.</a:t>
+              <a:t>R$ 350 mil (Ano 1)</a:t>
             </a:r>
           </a:p>
         </p:txBody>
       </p:sp>
       <p:cxnSp>
         <p:nvCxnSpPr>
-          <p:cNvPr id="30" name="Connector 29"/>
+          <p:cNvPr id="11" name="Connector 10"/>
           <p:cNvCxnSpPr/>
           <p:nvPr/>
         </p:nvCxnSpPr>
         <p:spPr>
           <a:xfrm>
-            <a:off x="548640" y="6327648"/>
-            <a:ext cx="11091672" cy="0"/>
+            <a:off x="804672" y="3172968"/>
+            <a:ext cx="2980943" cy="0"/>
           </a:xfrm>
           <a:prstGeom prst="line">
             <a:avLst/>
@@ -4308,7 +3503,727 @@
       </p:cxnSp>
       <p:sp>
         <p:nvSpPr>
-          <p:cNvPr id="31" name="TextBox 30"/>
+          <p:cNvPr id="12" name="TextBox 11"/>
+          <p:cNvSpPr txBox="1"/>
+          <p:nvPr/>
+        </p:nvSpPr>
+        <p:spPr>
+          <a:xfrm>
+            <a:off x="804672" y="3383280"/>
+            <a:ext cx="2980944" cy="1325880"/>
+          </a:xfrm>
+          <a:prstGeom prst="rect">
+            <a:avLst/>
+          </a:prstGeom>
+          <a:noFill/>
+        </p:spPr>
+        <p:txBody>
+          <a:bodyPr wrap="square" lIns="0" rIns="0" tIns="0" bIns="0" anchor="t">
+            <a:spAutoFit/>
+          </a:bodyPr>
+          <a:lstStyle/>
+          <a:p>
+            <a:pPr algn="l">
+              <a:lnSpc>
+                <a:spcPct val="125000"/>
+              </a:lnSpc>
+              <a:defRPr sz="1250" b="0">
+                <a:solidFill>
+                  <a:srgbClr val="5D5860"/>
+                </a:solidFill>
+                <a:latin typeface="Lato"/>
+              </a:defRPr>
+            </a:pPr>
+            <a:r>
+              <a:t>Cobre squad de 90 dias, infraestrutura de dados e mensageria. Retorno recorrente estimado em R$ 1,86M/ano.</a:t>
+            </a:r>
+          </a:p>
+        </p:txBody>
+      </p:sp>
+      <p:sp>
+        <p:nvSpPr>
+          <p:cNvPr id="13" name="Rectangle 12"/>
+          <p:cNvSpPr/>
+          <p:nvPr/>
+        </p:nvSpPr>
+        <p:spPr>
+          <a:xfrm>
+            <a:off x="4343399" y="1874519"/>
+            <a:ext cx="3493008" cy="3108960"/>
+          </a:xfrm>
+          <a:prstGeom prst="rect">
+            <a:avLst/>
+          </a:prstGeom>
+          <a:solidFill>
+            <a:srgbClr val="F7EFFA"/>
+          </a:solidFill>
+          <a:ln>
+            <a:solidFill>
+              <a:srgbClr val="F7EFFA"/>
+            </a:solidFill>
+          </a:ln>
+        </p:spPr>
+        <p:style>
+          <a:lnRef idx="1">
+            <a:schemeClr val="accent1"/>
+          </a:lnRef>
+          <a:fillRef idx="3">
+            <a:schemeClr val="accent1"/>
+          </a:fillRef>
+          <a:effectRef idx="2">
+            <a:schemeClr val="accent1"/>
+          </a:effectRef>
+          <a:fontRef idx="minor">
+            <a:schemeClr val="lt1"/>
+          </a:fontRef>
+        </p:style>
+        <p:txBody>
+          <a:bodyPr rtlCol="0" anchor="ctr"/>
+          <a:lstStyle/>
+          <a:p>
+            <a:pPr algn="ctr"/>
+          </a:p>
+        </p:txBody>
+      </p:sp>
+      <p:sp>
+        <p:nvSpPr>
+          <p:cNvPr id="14" name="Rectangle 13"/>
+          <p:cNvSpPr/>
+          <p:nvPr/>
+        </p:nvSpPr>
+        <p:spPr>
+          <a:xfrm>
+            <a:off x="4343399" y="1874519"/>
+            <a:ext cx="3493008" cy="73152"/>
+          </a:xfrm>
+          <a:prstGeom prst="rect">
+            <a:avLst/>
+          </a:prstGeom>
+          <a:solidFill>
+            <a:srgbClr val="561265"/>
+          </a:solidFill>
+          <a:ln>
+            <a:solidFill>
+              <a:srgbClr val="561265"/>
+            </a:solidFill>
+          </a:ln>
+        </p:spPr>
+        <p:style>
+          <a:lnRef idx="1">
+            <a:schemeClr val="accent1"/>
+          </a:lnRef>
+          <a:fillRef idx="3">
+            <a:schemeClr val="accent1"/>
+          </a:fillRef>
+          <a:effectRef idx="2">
+            <a:schemeClr val="accent1"/>
+          </a:effectRef>
+          <a:fontRef idx="minor">
+            <a:schemeClr val="lt1"/>
+          </a:fontRef>
+        </p:style>
+        <p:txBody>
+          <a:bodyPr rtlCol="0" anchor="ctr"/>
+          <a:lstStyle/>
+          <a:p>
+            <a:pPr algn="ctr"/>
+          </a:p>
+        </p:txBody>
+      </p:sp>
+      <p:sp>
+        <p:nvSpPr>
+          <p:cNvPr id="15" name="TextBox 14"/>
+          <p:cNvSpPr txBox="1"/>
+          <p:nvPr/>
+        </p:nvSpPr>
+        <p:spPr>
+          <a:xfrm>
+            <a:off x="4599431" y="2148840"/>
+            <a:ext cx="2980944" cy="256032"/>
+          </a:xfrm>
+          <a:prstGeom prst="rect">
+            <a:avLst/>
+          </a:prstGeom>
+          <a:noFill/>
+        </p:spPr>
+        <p:txBody>
+          <a:bodyPr wrap="square" lIns="0" rIns="0" tIns="0" bIns="0" anchor="t">
+            <a:spAutoFit/>
+          </a:bodyPr>
+          <a:lstStyle/>
+          <a:p>
+            <a:pPr algn="l">
+              <a:lnSpc>
+                <a:spcPct val="100000"/>
+              </a:lnSpc>
+              <a:defRPr sz="1000" b="1">
+                <a:solidFill>
+                  <a:srgbClr val="E000D2"/>
+                </a:solidFill>
+                <a:latin typeface="Lato"/>
+              </a:defRPr>
+            </a:pPr>
+            <a:r>
+              <a:t>02 / EQUIPE</a:t>
+            </a:r>
+          </a:p>
+        </p:txBody>
+      </p:sp>
+      <p:sp>
+        <p:nvSpPr>
+          <p:cNvPr id="16" name="TextBox 15"/>
+          <p:cNvSpPr txBox="1"/>
+          <p:nvPr/>
+        </p:nvSpPr>
+        <p:spPr>
+          <a:xfrm>
+            <a:off x="4599431" y="2496312"/>
+            <a:ext cx="2980944" cy="594360"/>
+          </a:xfrm>
+          <a:prstGeom prst="rect">
+            <a:avLst/>
+          </a:prstGeom>
+          <a:noFill/>
+        </p:spPr>
+        <p:txBody>
+          <a:bodyPr wrap="square" lIns="0" rIns="0" tIns="0" bIns="0" anchor="t">
+            <a:spAutoFit/>
+          </a:bodyPr>
+          <a:lstStyle/>
+          <a:p>
+            <a:pPr algn="l">
+              <a:lnSpc>
+                <a:spcPct val="100000"/>
+              </a:lnSpc>
+              <a:defRPr sz="2000" b="1">
+                <a:solidFill>
+                  <a:srgbClr val="37183E"/>
+                </a:solidFill>
+                <a:latin typeface="Lato"/>
+              </a:defRPr>
+            </a:pPr>
+            <a:r>
+              <a:t>Squad dedicada</a:t>
+            </a:r>
+          </a:p>
+        </p:txBody>
+      </p:sp>
+      <p:cxnSp>
+        <p:nvCxnSpPr>
+          <p:cNvPr id="17" name="Connector 16"/>
+          <p:cNvCxnSpPr/>
+          <p:nvPr/>
+        </p:nvCxnSpPr>
+        <p:spPr>
+          <a:xfrm>
+            <a:off x="4599431" y="3172968"/>
+            <a:ext cx="2980944" cy="0"/>
+          </a:xfrm>
+          <a:prstGeom prst="line">
+            <a:avLst/>
+          </a:prstGeom>
+          <a:ln w="10160">
+            <a:solidFill>
+              <a:srgbClr val="DEC6E4"/>
+            </a:solidFill>
+          </a:ln>
+        </p:spPr>
+        <p:style>
+          <a:lnRef idx="2">
+            <a:schemeClr val="accent1"/>
+          </a:lnRef>
+          <a:fillRef idx="0">
+            <a:schemeClr val="accent1"/>
+          </a:fillRef>
+          <a:effectRef idx="1">
+            <a:schemeClr val="accent1"/>
+          </a:effectRef>
+          <a:fontRef idx="minor">
+            <a:schemeClr val="tx1"/>
+          </a:fontRef>
+        </p:style>
+      </p:cxnSp>
+      <p:sp>
+        <p:nvSpPr>
+          <p:cNvPr id="18" name="TextBox 17"/>
+          <p:cNvSpPr txBox="1"/>
+          <p:nvPr/>
+        </p:nvSpPr>
+        <p:spPr>
+          <a:xfrm>
+            <a:off x="4599431" y="3383280"/>
+            <a:ext cx="2980944" cy="1325880"/>
+          </a:xfrm>
+          <a:prstGeom prst="rect">
+            <a:avLst/>
+          </a:prstGeom>
+          <a:noFill/>
+        </p:spPr>
+        <p:txBody>
+          <a:bodyPr wrap="square" lIns="0" rIns="0" tIns="0" bIns="0" anchor="t">
+            <a:spAutoFit/>
+          </a:bodyPr>
+          <a:lstStyle/>
+          <a:p>
+            <a:pPr algn="l">
+              <a:lnSpc>
+                <a:spcPct val="125000"/>
+              </a:lnSpc>
+              <a:defRPr sz="1250" b="0">
+                <a:solidFill>
+                  <a:srgbClr val="5D5860"/>
+                </a:solidFill>
+                <a:latin typeface="Lato"/>
+              </a:defRPr>
+            </a:pPr>
+            <a:r>
+              <a:t>Alocação de engenharia de dados, supply chain, comercial e atendimento em ciclos quinzenais de entrega.</a:t>
+            </a:r>
+          </a:p>
+        </p:txBody>
+      </p:sp>
+      <p:sp>
+        <p:nvSpPr>
+          <p:cNvPr id="19" name="Rectangle 18"/>
+          <p:cNvSpPr/>
+          <p:nvPr/>
+        </p:nvSpPr>
+        <p:spPr>
+          <a:xfrm>
+            <a:off x="8138159" y="1874519"/>
+            <a:ext cx="3493008" cy="3108960"/>
+          </a:xfrm>
+          <a:prstGeom prst="rect">
+            <a:avLst/>
+          </a:prstGeom>
+          <a:solidFill>
+            <a:srgbClr val="F7EFFA"/>
+          </a:solidFill>
+          <a:ln>
+            <a:solidFill>
+              <a:srgbClr val="F7EFFA"/>
+            </a:solidFill>
+          </a:ln>
+        </p:spPr>
+        <p:style>
+          <a:lnRef idx="1">
+            <a:schemeClr val="accent1"/>
+          </a:lnRef>
+          <a:fillRef idx="3">
+            <a:schemeClr val="accent1"/>
+          </a:fillRef>
+          <a:effectRef idx="2">
+            <a:schemeClr val="accent1"/>
+          </a:effectRef>
+          <a:fontRef idx="minor">
+            <a:schemeClr val="lt1"/>
+          </a:fontRef>
+        </p:style>
+        <p:txBody>
+          <a:bodyPr rtlCol="0" anchor="ctr"/>
+          <a:lstStyle/>
+          <a:p>
+            <a:pPr algn="ctr"/>
+          </a:p>
+        </p:txBody>
+      </p:sp>
+      <p:sp>
+        <p:nvSpPr>
+          <p:cNvPr id="20" name="Rectangle 19"/>
+          <p:cNvSpPr/>
+          <p:nvPr/>
+        </p:nvSpPr>
+        <p:spPr>
+          <a:xfrm>
+            <a:off x="8138159" y="1874519"/>
+            <a:ext cx="3493008" cy="73152"/>
+          </a:xfrm>
+          <a:prstGeom prst="rect">
+            <a:avLst/>
+          </a:prstGeom>
+          <a:solidFill>
+            <a:srgbClr val="561265"/>
+          </a:solidFill>
+          <a:ln>
+            <a:solidFill>
+              <a:srgbClr val="561265"/>
+            </a:solidFill>
+          </a:ln>
+        </p:spPr>
+        <p:style>
+          <a:lnRef idx="1">
+            <a:schemeClr val="accent1"/>
+          </a:lnRef>
+          <a:fillRef idx="3">
+            <a:schemeClr val="accent1"/>
+          </a:fillRef>
+          <a:effectRef idx="2">
+            <a:schemeClr val="accent1"/>
+          </a:effectRef>
+          <a:fontRef idx="minor">
+            <a:schemeClr val="lt1"/>
+          </a:fontRef>
+        </p:style>
+        <p:txBody>
+          <a:bodyPr rtlCol="0" anchor="ctr"/>
+          <a:lstStyle/>
+          <a:p>
+            <a:pPr algn="ctr"/>
+          </a:p>
+        </p:txBody>
+      </p:sp>
+      <p:sp>
+        <p:nvSpPr>
+          <p:cNvPr id="21" name="TextBox 20"/>
+          <p:cNvSpPr txBox="1"/>
+          <p:nvPr/>
+        </p:nvSpPr>
+        <p:spPr>
+          <a:xfrm>
+            <a:off x="8394191" y="2148840"/>
+            <a:ext cx="2980944" cy="256032"/>
+          </a:xfrm>
+          <a:prstGeom prst="rect">
+            <a:avLst/>
+          </a:prstGeom>
+          <a:noFill/>
+        </p:spPr>
+        <p:txBody>
+          <a:bodyPr wrap="square" lIns="0" rIns="0" tIns="0" bIns="0" anchor="t">
+            <a:spAutoFit/>
+          </a:bodyPr>
+          <a:lstStyle/>
+          <a:p>
+            <a:pPr algn="l">
+              <a:lnSpc>
+                <a:spcPct val="100000"/>
+              </a:lnSpc>
+              <a:defRPr sz="1000" b="1">
+                <a:solidFill>
+                  <a:srgbClr val="E000D2"/>
+                </a:solidFill>
+                <a:latin typeface="Lato"/>
+              </a:defRPr>
+            </a:pPr>
+            <a:r>
+              <a:t>03 / CONTROLE</a:t>
+            </a:r>
+          </a:p>
+        </p:txBody>
+      </p:sp>
+      <p:sp>
+        <p:nvSpPr>
+          <p:cNvPr id="22" name="TextBox 21"/>
+          <p:cNvSpPr txBox="1"/>
+          <p:nvPr/>
+        </p:nvSpPr>
+        <p:spPr>
+          <a:xfrm>
+            <a:off x="8394191" y="2496312"/>
+            <a:ext cx="2980944" cy="594360"/>
+          </a:xfrm>
+          <a:prstGeom prst="rect">
+            <a:avLst/>
+          </a:prstGeom>
+          <a:noFill/>
+        </p:spPr>
+        <p:txBody>
+          <a:bodyPr wrap="square" lIns="0" rIns="0" tIns="0" bIns="0" anchor="t">
+            <a:spAutoFit/>
+          </a:bodyPr>
+          <a:lstStyle/>
+          <a:p>
+            <a:pPr algn="l">
+              <a:lnSpc>
+                <a:spcPct val="100000"/>
+              </a:lnSpc>
+              <a:defRPr sz="2000" b="1">
+                <a:solidFill>
+                  <a:srgbClr val="37183E"/>
+                </a:solidFill>
+                <a:latin typeface="Lato"/>
+              </a:defRPr>
+            </a:pPr>
+            <a:r>
+              <a:t>Marcos em 30, 60 e 90 dias</a:t>
+            </a:r>
+          </a:p>
+        </p:txBody>
+      </p:sp>
+      <p:cxnSp>
+        <p:nvCxnSpPr>
+          <p:cNvPr id="23" name="Connector 22"/>
+          <p:cNvCxnSpPr/>
+          <p:nvPr/>
+        </p:nvCxnSpPr>
+        <p:spPr>
+          <a:xfrm>
+            <a:off x="8394191" y="3172968"/>
+            <a:ext cx="2980944" cy="0"/>
+          </a:xfrm>
+          <a:prstGeom prst="line">
+            <a:avLst/>
+          </a:prstGeom>
+          <a:ln w="10160">
+            <a:solidFill>
+              <a:srgbClr val="DEC6E4"/>
+            </a:solidFill>
+          </a:ln>
+        </p:spPr>
+        <p:style>
+          <a:lnRef idx="2">
+            <a:schemeClr val="accent1"/>
+          </a:lnRef>
+          <a:fillRef idx="0">
+            <a:schemeClr val="accent1"/>
+          </a:fillRef>
+          <a:effectRef idx="1">
+            <a:schemeClr val="accent1"/>
+          </a:effectRef>
+          <a:fontRef idx="minor">
+            <a:schemeClr val="tx1"/>
+          </a:fontRef>
+        </p:style>
+      </p:cxnSp>
+      <p:sp>
+        <p:nvSpPr>
+          <p:cNvPr id="24" name="TextBox 23"/>
+          <p:cNvSpPr txBox="1"/>
+          <p:nvPr/>
+        </p:nvSpPr>
+        <p:spPr>
+          <a:xfrm>
+            <a:off x="8394191" y="3383280"/>
+            <a:ext cx="2980944" cy="1325880"/>
+          </a:xfrm>
+          <a:prstGeom prst="rect">
+            <a:avLst/>
+          </a:prstGeom>
+          <a:noFill/>
+        </p:spPr>
+        <p:txBody>
+          <a:bodyPr wrap="square" lIns="0" rIns="0" tIns="0" bIns="0" anchor="t">
+            <a:spAutoFit/>
+          </a:bodyPr>
+          <a:lstStyle/>
+          <a:p>
+            <a:pPr algn="l">
+              <a:lnSpc>
+                <a:spcPct val="125000"/>
+              </a:lnSpc>
+              <a:defRPr sz="1250" b="0">
+                <a:solidFill>
+                  <a:srgbClr val="5D5860"/>
+                </a:solidFill>
+                <a:latin typeface="Lato"/>
+              </a:defRPr>
+            </a:pPr>
+            <a:r>
+              <a:t>Continuidade condicionada a critérios técnicos: acurácia de estoque, volume de vendas e redução de chamados.</a:t>
+            </a:r>
+          </a:p>
+        </p:txBody>
+      </p:sp>
+      <p:sp>
+        <p:nvSpPr>
+          <p:cNvPr id="25" name="Rectangle 24"/>
+          <p:cNvSpPr/>
+          <p:nvPr/>
+        </p:nvSpPr>
+        <p:spPr>
+          <a:xfrm>
+            <a:off x="548640" y="5257800"/>
+            <a:ext cx="11091672" cy="822960"/>
+          </a:xfrm>
+          <a:prstGeom prst="rect">
+            <a:avLst/>
+          </a:prstGeom>
+          <a:solidFill>
+            <a:srgbClr val="561265"/>
+          </a:solidFill>
+          <a:ln>
+            <a:solidFill>
+              <a:srgbClr val="561265"/>
+            </a:solidFill>
+          </a:ln>
+        </p:spPr>
+        <p:style>
+          <a:lnRef idx="1">
+            <a:schemeClr val="accent1"/>
+          </a:lnRef>
+          <a:fillRef idx="3">
+            <a:schemeClr val="accent1"/>
+          </a:fillRef>
+          <a:effectRef idx="2">
+            <a:schemeClr val="accent1"/>
+          </a:effectRef>
+          <a:fontRef idx="minor">
+            <a:schemeClr val="lt1"/>
+          </a:fontRef>
+        </p:style>
+        <p:txBody>
+          <a:bodyPr rtlCol="0" anchor="ctr"/>
+          <a:lstStyle/>
+          <a:p>
+            <a:pPr algn="ctr"/>
+          </a:p>
+        </p:txBody>
+      </p:sp>
+      <p:sp>
+        <p:nvSpPr>
+          <p:cNvPr id="26" name="TextBox 25"/>
+          <p:cNvSpPr txBox="1"/>
+          <p:nvPr/>
+        </p:nvSpPr>
+        <p:spPr>
+          <a:xfrm>
+            <a:off x="804672" y="5404104"/>
+            <a:ext cx="10515600" cy="201168"/>
+          </a:xfrm>
+          <a:prstGeom prst="rect">
+            <a:avLst/>
+          </a:prstGeom>
+          <a:noFill/>
+        </p:spPr>
+        <p:txBody>
+          <a:bodyPr wrap="square" lIns="0" rIns="0" tIns="0" bIns="0" anchor="t">
+            <a:spAutoFit/>
+          </a:bodyPr>
+          <a:lstStyle/>
+          <a:p>
+            <a:pPr algn="l">
+              <a:lnSpc>
+                <a:spcPct val="100000"/>
+              </a:lnSpc>
+              <a:defRPr sz="1000" b="1">
+                <a:solidFill>
+                  <a:srgbClr val="E000D2"/>
+                </a:solidFill>
+                <a:latin typeface="Lato"/>
+              </a:defRPr>
+            </a:pPr>
+            <a:r>
+              <a:t>AÇÃO IMEDIATA</a:t>
+            </a:r>
+          </a:p>
+        </p:txBody>
+      </p:sp>
+      <p:sp>
+        <p:nvSpPr>
+          <p:cNvPr id="27" name="TextBox 26"/>
+          <p:cNvSpPr txBox="1"/>
+          <p:nvPr/>
+        </p:nvSpPr>
+        <p:spPr>
+          <a:xfrm>
+            <a:off x="804672" y="5660136"/>
+            <a:ext cx="10515600" cy="320040"/>
+          </a:xfrm>
+          <a:prstGeom prst="rect">
+            <a:avLst/>
+          </a:prstGeom>
+          <a:noFill/>
+        </p:spPr>
+        <p:txBody>
+          <a:bodyPr wrap="square" lIns="0" rIns="0" tIns="0" bIns="0" anchor="t">
+            <a:spAutoFit/>
+          </a:bodyPr>
+          <a:lstStyle/>
+          <a:p>
+            <a:pPr algn="l">
+              <a:lnSpc>
+                <a:spcPct val="100000"/>
+              </a:lnSpc>
+              <a:defRPr sz="1400" b="1">
+                <a:solidFill>
+                  <a:srgbClr val="FFFFFF"/>
+                </a:solidFill>
+                <a:latin typeface="Lato"/>
+              </a:defRPr>
+            </a:pPr>
+            <a:r>
+              <a:t>Aprovar o início da Fase 1 (saneamento de estoque) e agendar a primeira revisão técnica para o Dia 30.</a:t>
+            </a:r>
+          </a:p>
+        </p:txBody>
+      </p:sp>
+      <p:cxnSp>
+        <p:nvCxnSpPr>
+          <p:cNvPr id="28" name="Connector 27"/>
+          <p:cNvCxnSpPr/>
+          <p:nvPr/>
+        </p:nvCxnSpPr>
+        <p:spPr>
+          <a:xfrm>
+            <a:off x="548640" y="6327648"/>
+            <a:ext cx="11091672" cy="0"/>
+          </a:xfrm>
+          <a:prstGeom prst="line">
+            <a:avLst/>
+          </a:prstGeom>
+          <a:ln w="10160">
+            <a:solidFill>
+              <a:srgbClr val="DEC6E4"/>
+            </a:solidFill>
+          </a:ln>
+        </p:spPr>
+        <p:style>
+          <a:lnRef idx="2">
+            <a:schemeClr val="accent1"/>
+          </a:lnRef>
+          <a:fillRef idx="0">
+            <a:schemeClr val="accent1"/>
+          </a:fillRef>
+          <a:effectRef idx="1">
+            <a:schemeClr val="accent1"/>
+          </a:effectRef>
+          <a:fontRef idx="minor">
+            <a:schemeClr val="tx1"/>
+          </a:fontRef>
+        </p:style>
+      </p:cxnSp>
+      <p:sp>
+        <p:nvSpPr>
+          <p:cNvPr id="29" name="TextBox 28"/>
+          <p:cNvSpPr txBox="1"/>
+          <p:nvPr/>
+        </p:nvSpPr>
+        <p:spPr>
+          <a:xfrm>
+            <a:off x="548640" y="6419088"/>
+            <a:ext cx="7315200" cy="201168"/>
+          </a:xfrm>
+          <a:prstGeom prst="rect">
+            <a:avLst/>
+          </a:prstGeom>
+          <a:noFill/>
+        </p:spPr>
+        <p:txBody>
+          <a:bodyPr wrap="square" lIns="0" rIns="0" tIns="0" bIns="0" anchor="t">
+            <a:spAutoFit/>
+          </a:bodyPr>
+          <a:lstStyle/>
+          <a:p>
+            <a:pPr algn="l">
+              <a:lnSpc>
+                <a:spcPct val="100000"/>
+              </a:lnSpc>
+              <a:defRPr sz="950" b="0">
+                <a:solidFill>
+                  <a:srgbClr val="827B85"/>
+                </a:solidFill>
+                <a:latin typeface="Lato"/>
+              </a:defRPr>
+            </a:pPr>
+            <a:r>
+              <a:t>Fonte: case Vértice • Bootcamp EloGroup 2026 • Grupo 14</a:t>
+            </a:r>
+          </a:p>
+        </p:txBody>
+      </p:sp>
+      <p:sp>
+        <p:nvSpPr>
+          <p:cNvPr id="30" name="TextBox 29"/>
           <p:cNvSpPr txBox="1"/>
           <p:nvPr/>
         </p:nvSpPr>
@@ -4340,7 +4255,7 @@
               </a:defRPr>
             </a:pPr>
             <a:r>
-              <a:t>A1</a:t>
+              <a:t>14</a:t>
             </a:r>
           </a:p>
         </p:txBody>
@@ -4450,7 +4365,7 @@
               </a:defRPr>
             </a:pPr>
             <a:r>
-              <a:t>A2 / MEMÓRIA DE CÁLCULO · LIQUIDAÇÃO</a:t>
+              <a:t>APÊNDICE / MATRIZ DE SENSIBILIDADE · LIQUIDAÇÃO</a:t>
             </a:r>
           </a:p>
         </p:txBody>
@@ -4502,47 +4417,8 @@
         </p:nvSpPr>
         <p:spPr>
           <a:xfrm>
-            <a:off x="548640" y="749808"/>
-            <a:ext cx="10972800" cy="713232"/>
-          </a:xfrm>
-          <a:prstGeom prst="rect">
-            <a:avLst/>
-          </a:prstGeom>
-          <a:noFill/>
-        </p:spPr>
-        <p:txBody>
-          <a:bodyPr wrap="square" lIns="0" rIns="0" tIns="0" bIns="0" anchor="t">
-            <a:spAutoFit/>
-          </a:bodyPr>
-          <a:lstStyle/>
-          <a:p>
-            <a:pPr algn="l">
-              <a:lnSpc>
-                <a:spcPct val="95000"/>
-              </a:lnSpc>
-              <a:defRPr sz="2700" b="1">
-                <a:solidFill>
-                  <a:srgbClr val="37183E"/>
-                </a:solidFill>
-                <a:latin typeface="Lato"/>
-              </a:defRPr>
-            </a:pPr>
-            <a:r>
-              <a:t>Liquidação: cenário auditável, não promessa.</a:t>
-            </a:r>
-          </a:p>
-        </p:txBody>
-      </p:sp>
-      <p:sp>
-        <p:nvSpPr>
-          <p:cNvPr id="6" name="TextBox 5"/>
-          <p:cNvSpPr txBox="1"/>
-          <p:nvPr/>
-        </p:nvSpPr>
-        <p:spPr>
-          <a:xfrm>
-            <a:off x="548640" y="1417320"/>
-            <a:ext cx="10789920" cy="329184"/>
+            <a:off x="548640" y="694944"/>
+            <a:ext cx="10972800" cy="594360"/>
           </a:xfrm>
           <a:prstGeom prst="rect">
             <a:avLst/>
@@ -4559,74 +4435,29 @@
               <a:lnSpc>
                 <a:spcPct val="100000"/>
               </a:lnSpc>
-              <a:defRPr sz="1450" b="0">
-                <a:solidFill>
-                  <a:srgbClr val="5D5860"/>
+              <a:defRPr sz="2450" b="1">
+                <a:solidFill>
+                  <a:srgbClr val="37183E"/>
                 </a:solidFill>
                 <a:latin typeface="Lato"/>
               </a:defRPr>
             </a:pPr>
             <a:r>
-              <a:t>Cenário central · 206 de 207 SKUs valorados pelo custo histórico de Vendas</a:t>
-            </a:r>
-          </a:p>
-        </p:txBody>
-      </p:sp>
-      <p:sp>
-        <p:nvSpPr>
-          <p:cNvPr id="7" name="Rectangle 6"/>
-          <p:cNvSpPr/>
-          <p:nvPr/>
-        </p:nvSpPr>
-        <p:spPr>
-          <a:xfrm>
-            <a:off x="548640" y="1938528"/>
-            <a:ext cx="2212848" cy="1234440"/>
-          </a:xfrm>
-          <a:prstGeom prst="rect">
-            <a:avLst/>
-          </a:prstGeom>
-          <a:solidFill>
-            <a:srgbClr val="F7EFFA"/>
-          </a:solidFill>
-          <a:ln>
-            <a:solidFill>
-              <a:srgbClr val="F7EFFA"/>
-            </a:solidFill>
-          </a:ln>
-        </p:spPr>
-        <p:style>
-          <a:lnRef idx="1">
-            <a:schemeClr val="accent1"/>
-          </a:lnRef>
-          <a:fillRef idx="3">
-            <a:schemeClr val="accent1"/>
-          </a:fillRef>
-          <a:effectRef idx="2">
-            <a:schemeClr val="accent1"/>
-          </a:effectRef>
-          <a:fontRef idx="minor">
-            <a:schemeClr val="lt1"/>
-          </a:fontRef>
-        </p:style>
-        <p:txBody>
-          <a:bodyPr rtlCol="0" anchor="ctr"/>
-          <a:lstStyle/>
-          <a:p>
-            <a:pPr algn="ctr"/>
-          </a:p>
-        </p:txBody>
-      </p:sp>
-      <p:sp>
-        <p:nvSpPr>
-          <p:cNvPr id="8" name="TextBox 7"/>
+              <a:t>Sensibilidade da queima de estoque descontinuado em 90 dias</a:t>
+            </a:r>
+          </a:p>
+        </p:txBody>
+      </p:sp>
+      <p:sp>
+        <p:nvSpPr>
+          <p:cNvPr id="6" name="TextBox 5"/>
           <p:cNvSpPr txBox="1"/>
           <p:nvPr/>
         </p:nvSpPr>
         <p:spPr>
           <a:xfrm>
-            <a:off x="713232" y="2121408"/>
-            <a:ext cx="1883664" cy="201168"/>
+            <a:off x="548640" y="1298448"/>
+            <a:ext cx="10972800" cy="320040"/>
           </a:xfrm>
           <a:prstGeom prst="rect">
             <a:avLst/>
@@ -4643,917 +4474,29 @@
               <a:lnSpc>
                 <a:spcPct val="100000"/>
               </a:lnSpc>
-              <a:defRPr sz="900" b="1">
-                <a:solidFill>
-                  <a:srgbClr val="E000D2"/>
+              <a:defRPr sz="1350" b="0">
+                <a:solidFill>
+                  <a:srgbClr val="5D5860"/>
                 </a:solidFill>
                 <a:latin typeface="Lato"/>
               </a:defRPr>
             </a:pPr>
             <a:r>
-              <a:t>SALDO DISPONÍVEL</a:t>
-            </a:r>
-          </a:p>
-        </p:txBody>
-      </p:sp>
-      <p:sp>
-        <p:nvSpPr>
-          <p:cNvPr id="9" name="TextBox 8"/>
+              <a:t>Simulação sobre 206 SKUs elegíveis (65.052 un.) com desconto de 30% e deduções de devolução.</a:t>
+            </a:r>
+          </a:p>
+        </p:txBody>
+      </p:sp>
+      <p:sp>
+        <p:nvSpPr>
+          <p:cNvPr id="7" name="TextBox 6"/>
           <p:cNvSpPr txBox="1"/>
           <p:nvPr/>
         </p:nvSpPr>
         <p:spPr>
           <a:xfrm>
-            <a:off x="713232" y="2395728"/>
-            <a:ext cx="1883664" cy="320040"/>
-          </a:xfrm>
-          <a:prstGeom prst="rect">
-            <a:avLst/>
-          </a:prstGeom>
-          <a:noFill/>
-        </p:spPr>
-        <p:txBody>
-          <a:bodyPr wrap="square" lIns="0" rIns="0" tIns="0" bIns="0" anchor="t">
-            <a:spAutoFit/>
-          </a:bodyPr>
-          <a:lstStyle/>
-          <a:p>
-            <a:pPr algn="l">
-              <a:lnSpc>
-                <a:spcPct val="100000"/>
-              </a:lnSpc>
-              <a:defRPr sz="1900" b="1">
-                <a:solidFill>
-                  <a:srgbClr val="37183E"/>
-                </a:solidFill>
-                <a:latin typeface="Lato"/>
-              </a:defRPr>
-            </a:pPr>
-            <a:r>
-              <a:t>65.266 un.</a:t>
-            </a:r>
-          </a:p>
-        </p:txBody>
-      </p:sp>
-      <p:sp>
-        <p:nvSpPr>
-          <p:cNvPr id="10" name="TextBox 9"/>
-          <p:cNvSpPr txBox="1"/>
-          <p:nvPr/>
-        </p:nvSpPr>
-        <p:spPr>
-          <a:xfrm>
-            <a:off x="713232" y="2816352"/>
-            <a:ext cx="1883664" cy="201168"/>
-          </a:xfrm>
-          <a:prstGeom prst="rect">
-            <a:avLst/>
-          </a:prstGeom>
-          <a:noFill/>
-        </p:spPr>
-        <p:txBody>
-          <a:bodyPr wrap="square" lIns="0" rIns="0" tIns="0" bIns="0" anchor="t">
-            <a:spAutoFit/>
-          </a:bodyPr>
-          <a:lstStyle/>
-          <a:p>
-            <a:pPr algn="l">
-              <a:lnSpc>
-                <a:spcPct val="100000"/>
-              </a:lnSpc>
-              <a:defRPr sz="1050" b="0">
-                <a:solidFill>
-                  <a:srgbClr val="5D5860"/>
-                </a:solidFill>
-                <a:latin typeface="Lato"/>
-              </a:defRPr>
-            </a:pPr>
-            <a:r>
-              <a:t>descontinuados</a:t>
-            </a:r>
-          </a:p>
-        </p:txBody>
-      </p:sp>
-      <p:sp>
-        <p:nvSpPr>
-          <p:cNvPr id="11" name="TextBox 10"/>
-          <p:cNvSpPr txBox="1"/>
-          <p:nvPr/>
-        </p:nvSpPr>
-        <p:spPr>
-          <a:xfrm>
-            <a:off x="2843784" y="2304288"/>
-            <a:ext cx="274320" cy="365760"/>
-          </a:xfrm>
-          <a:prstGeom prst="rect">
-            <a:avLst/>
-          </a:prstGeom>
-          <a:noFill/>
-        </p:spPr>
-        <p:txBody>
-          <a:bodyPr wrap="square" lIns="0" rIns="0" tIns="0" bIns="0" anchor="t">
-            <a:spAutoFit/>
-          </a:bodyPr>
-          <a:lstStyle/>
-          <a:p>
-            <a:pPr algn="ctr">
-              <a:lnSpc>
-                <a:spcPct val="100000"/>
-              </a:lnSpc>
-              <a:defRPr sz="2400" b="1">
-                <a:solidFill>
-                  <a:srgbClr val="E000D2"/>
-                </a:solidFill>
-                <a:latin typeface="Lato"/>
-              </a:defRPr>
-            </a:pPr>
-            <a:r>
-              <a:t>›</a:t>
-            </a:r>
-          </a:p>
-        </p:txBody>
-      </p:sp>
-      <p:sp>
-        <p:nvSpPr>
-          <p:cNvPr id="12" name="Rectangle 11"/>
-          <p:cNvSpPr/>
-          <p:nvPr/>
-        </p:nvSpPr>
-        <p:spPr>
-          <a:xfrm>
-            <a:off x="3163824" y="1938528"/>
-            <a:ext cx="2212848" cy="1234440"/>
-          </a:xfrm>
-          <a:prstGeom prst="rect">
-            <a:avLst/>
-          </a:prstGeom>
-          <a:solidFill>
-            <a:srgbClr val="F7EFFA"/>
-          </a:solidFill>
-          <a:ln>
-            <a:solidFill>
-              <a:srgbClr val="F7EFFA"/>
-            </a:solidFill>
-          </a:ln>
-        </p:spPr>
-        <p:style>
-          <a:lnRef idx="1">
-            <a:schemeClr val="accent1"/>
-          </a:lnRef>
-          <a:fillRef idx="3">
-            <a:schemeClr val="accent1"/>
-          </a:fillRef>
-          <a:effectRef idx="2">
-            <a:schemeClr val="accent1"/>
-          </a:effectRef>
-          <a:fontRef idx="minor">
-            <a:schemeClr val="lt1"/>
-          </a:fontRef>
-        </p:style>
-        <p:txBody>
-          <a:bodyPr rtlCol="0" anchor="ctr"/>
-          <a:lstStyle/>
-          <a:p>
-            <a:pPr algn="ctr"/>
-          </a:p>
-        </p:txBody>
-      </p:sp>
-      <p:sp>
-        <p:nvSpPr>
-          <p:cNvPr id="13" name="TextBox 12"/>
-          <p:cNvSpPr txBox="1"/>
-          <p:nvPr/>
-        </p:nvSpPr>
-        <p:spPr>
-          <a:xfrm>
-            <a:off x="3328416" y="2121408"/>
-            <a:ext cx="1883664" cy="201168"/>
-          </a:xfrm>
-          <a:prstGeom prst="rect">
-            <a:avLst/>
-          </a:prstGeom>
-          <a:noFill/>
-        </p:spPr>
-        <p:txBody>
-          <a:bodyPr wrap="square" lIns="0" rIns="0" tIns="0" bIns="0" anchor="t">
-            <a:spAutoFit/>
-          </a:bodyPr>
-          <a:lstStyle/>
-          <a:p>
-            <a:pPr algn="l">
-              <a:lnSpc>
-                <a:spcPct val="100000"/>
-              </a:lnSpc>
-              <a:defRPr sz="900" b="1">
-                <a:solidFill>
-                  <a:srgbClr val="E000D2"/>
-                </a:solidFill>
-                <a:latin typeface="Lato"/>
-              </a:defRPr>
-            </a:pPr>
-            <a:r>
-              <a:t>SELL-THROUGH</a:t>
-            </a:r>
-          </a:p>
-        </p:txBody>
-      </p:sp>
-      <p:sp>
-        <p:nvSpPr>
-          <p:cNvPr id="14" name="TextBox 13"/>
-          <p:cNvSpPr txBox="1"/>
-          <p:nvPr/>
-        </p:nvSpPr>
-        <p:spPr>
-          <a:xfrm>
-            <a:off x="3328416" y="2395728"/>
-            <a:ext cx="1883664" cy="320040"/>
-          </a:xfrm>
-          <a:prstGeom prst="rect">
-            <a:avLst/>
-          </a:prstGeom>
-          <a:noFill/>
-        </p:spPr>
-        <p:txBody>
-          <a:bodyPr wrap="square" lIns="0" rIns="0" tIns="0" bIns="0" anchor="t">
-            <a:spAutoFit/>
-          </a:bodyPr>
-          <a:lstStyle/>
-          <a:p>
-            <a:pPr algn="l">
-              <a:lnSpc>
-                <a:spcPct val="100000"/>
-              </a:lnSpc>
-              <a:defRPr sz="1900" b="1">
-                <a:solidFill>
-                  <a:srgbClr val="37183E"/>
-                </a:solidFill>
-                <a:latin typeface="Lato"/>
-              </a:defRPr>
-            </a:pPr>
-            <a:r>
-              <a:t>50%</a:t>
-            </a:r>
-          </a:p>
-        </p:txBody>
-      </p:sp>
-      <p:sp>
-        <p:nvSpPr>
-          <p:cNvPr id="15" name="TextBox 14"/>
-          <p:cNvSpPr txBox="1"/>
-          <p:nvPr/>
-        </p:nvSpPr>
-        <p:spPr>
-          <a:xfrm>
-            <a:off x="3328416" y="2816352"/>
-            <a:ext cx="1883664" cy="201168"/>
-          </a:xfrm>
-          <a:prstGeom prst="rect">
-            <a:avLst/>
-          </a:prstGeom>
-          <a:noFill/>
-        </p:spPr>
-        <p:txBody>
-          <a:bodyPr wrap="square" lIns="0" rIns="0" tIns="0" bIns="0" anchor="t">
-            <a:spAutoFit/>
-          </a:bodyPr>
-          <a:lstStyle/>
-          <a:p>
-            <a:pPr algn="l">
-              <a:lnSpc>
-                <a:spcPct val="100000"/>
-              </a:lnSpc>
-              <a:defRPr sz="1050" b="0">
-                <a:solidFill>
-                  <a:srgbClr val="5D5860"/>
-                </a:solidFill>
-                <a:latin typeface="Lato"/>
-              </a:defRPr>
-            </a:pPr>
-            <a:r>
-              <a:t>32.526 un.</a:t>
-            </a:r>
-          </a:p>
-        </p:txBody>
-      </p:sp>
-      <p:sp>
-        <p:nvSpPr>
-          <p:cNvPr id="16" name="TextBox 15"/>
-          <p:cNvSpPr txBox="1"/>
-          <p:nvPr/>
-        </p:nvSpPr>
-        <p:spPr>
-          <a:xfrm>
-            <a:off x="5458968" y="2304288"/>
-            <a:ext cx="274320" cy="365760"/>
-          </a:xfrm>
-          <a:prstGeom prst="rect">
-            <a:avLst/>
-          </a:prstGeom>
-          <a:noFill/>
-        </p:spPr>
-        <p:txBody>
-          <a:bodyPr wrap="square" lIns="0" rIns="0" tIns="0" bIns="0" anchor="t">
-            <a:spAutoFit/>
-          </a:bodyPr>
-          <a:lstStyle/>
-          <a:p>
-            <a:pPr algn="ctr">
-              <a:lnSpc>
-                <a:spcPct val="100000"/>
-              </a:lnSpc>
-              <a:defRPr sz="2400" b="1">
-                <a:solidFill>
-                  <a:srgbClr val="E000D2"/>
-                </a:solidFill>
-                <a:latin typeface="Lato"/>
-              </a:defRPr>
-            </a:pPr>
-            <a:r>
-              <a:t>›</a:t>
-            </a:r>
-          </a:p>
-        </p:txBody>
-      </p:sp>
-      <p:sp>
-        <p:nvSpPr>
-          <p:cNvPr id="17" name="Rectangle 16"/>
-          <p:cNvSpPr/>
-          <p:nvPr/>
-        </p:nvSpPr>
-        <p:spPr>
-          <a:xfrm>
-            <a:off x="5779008" y="1938528"/>
-            <a:ext cx="2212848" cy="1234440"/>
-          </a:xfrm>
-          <a:prstGeom prst="rect">
-            <a:avLst/>
-          </a:prstGeom>
-          <a:solidFill>
-            <a:srgbClr val="F7EFFA"/>
-          </a:solidFill>
-          <a:ln>
-            <a:solidFill>
-              <a:srgbClr val="F7EFFA"/>
-            </a:solidFill>
-          </a:ln>
-        </p:spPr>
-        <p:style>
-          <a:lnRef idx="1">
-            <a:schemeClr val="accent1"/>
-          </a:lnRef>
-          <a:fillRef idx="3">
-            <a:schemeClr val="accent1"/>
-          </a:fillRef>
-          <a:effectRef idx="2">
-            <a:schemeClr val="accent1"/>
-          </a:effectRef>
-          <a:fontRef idx="minor">
-            <a:schemeClr val="lt1"/>
-          </a:fontRef>
-        </p:style>
-        <p:txBody>
-          <a:bodyPr rtlCol="0" anchor="ctr"/>
-          <a:lstStyle/>
-          <a:p>
-            <a:pPr algn="ctr"/>
-          </a:p>
-        </p:txBody>
-      </p:sp>
-      <p:sp>
-        <p:nvSpPr>
-          <p:cNvPr id="18" name="TextBox 17"/>
-          <p:cNvSpPr txBox="1"/>
-          <p:nvPr/>
-        </p:nvSpPr>
-        <p:spPr>
-          <a:xfrm>
-            <a:off x="5943600" y="2121408"/>
-            <a:ext cx="1883664" cy="201168"/>
-          </a:xfrm>
-          <a:prstGeom prst="rect">
-            <a:avLst/>
-          </a:prstGeom>
-          <a:noFill/>
-        </p:spPr>
-        <p:txBody>
-          <a:bodyPr wrap="square" lIns="0" rIns="0" tIns="0" bIns="0" anchor="t">
-            <a:spAutoFit/>
-          </a:bodyPr>
-          <a:lstStyle/>
-          <a:p>
-            <a:pPr algn="l">
-              <a:lnSpc>
-                <a:spcPct val="100000"/>
-              </a:lnSpc>
-              <a:defRPr sz="900" b="1">
-                <a:solidFill>
-                  <a:srgbClr val="E000D2"/>
-                </a:solidFill>
-                <a:latin typeface="Lato"/>
-              </a:defRPr>
-            </a:pPr>
-            <a:r>
-              <a:t>DESCONTO</a:t>
-            </a:r>
-          </a:p>
-        </p:txBody>
-      </p:sp>
-      <p:sp>
-        <p:nvSpPr>
-          <p:cNvPr id="19" name="TextBox 18"/>
-          <p:cNvSpPr txBox="1"/>
-          <p:nvPr/>
-        </p:nvSpPr>
-        <p:spPr>
-          <a:xfrm>
-            <a:off x="5943600" y="2395728"/>
-            <a:ext cx="1883664" cy="320040"/>
-          </a:xfrm>
-          <a:prstGeom prst="rect">
-            <a:avLst/>
-          </a:prstGeom>
-          <a:noFill/>
-        </p:spPr>
-        <p:txBody>
-          <a:bodyPr wrap="square" lIns="0" rIns="0" tIns="0" bIns="0" anchor="t">
-            <a:spAutoFit/>
-          </a:bodyPr>
-          <a:lstStyle/>
-          <a:p>
-            <a:pPr algn="l">
-              <a:lnSpc>
-                <a:spcPct val="100000"/>
-              </a:lnSpc>
-              <a:defRPr sz="1900" b="1">
-                <a:solidFill>
-                  <a:srgbClr val="37183E"/>
-                </a:solidFill>
-                <a:latin typeface="Lato"/>
-              </a:defRPr>
-            </a:pPr>
-            <a:r>
-              <a:t>30%</a:t>
-            </a:r>
-          </a:p>
-        </p:txBody>
-      </p:sp>
-      <p:sp>
-        <p:nvSpPr>
-          <p:cNvPr id="20" name="TextBox 19"/>
-          <p:cNvSpPr txBox="1"/>
-          <p:nvPr/>
-        </p:nvSpPr>
-        <p:spPr>
-          <a:xfrm>
-            <a:off x="5943600" y="2816352"/>
-            <a:ext cx="1883664" cy="201168"/>
-          </a:xfrm>
-          <a:prstGeom prst="rect">
-            <a:avLst/>
-          </a:prstGeom>
-          <a:noFill/>
-        </p:spPr>
-        <p:txBody>
-          <a:bodyPr wrap="square" lIns="0" rIns="0" tIns="0" bIns="0" anchor="t">
-            <a:spAutoFit/>
-          </a:bodyPr>
-          <a:lstStyle/>
-          <a:p>
-            <a:pPr algn="l">
-              <a:lnSpc>
-                <a:spcPct val="100000"/>
-              </a:lnSpc>
-              <a:defRPr sz="1050" b="0">
-                <a:solidFill>
-                  <a:srgbClr val="5D5860"/>
-                </a:solidFill>
-                <a:latin typeface="Lato"/>
-              </a:defRPr>
-            </a:pPr>
-            <a:r>
-              <a:t>sobre preço histórico</a:t>
-            </a:r>
-          </a:p>
-        </p:txBody>
-      </p:sp>
-      <p:sp>
-        <p:nvSpPr>
-          <p:cNvPr id="21" name="TextBox 20"/>
-          <p:cNvSpPr txBox="1"/>
-          <p:nvPr/>
-        </p:nvSpPr>
-        <p:spPr>
-          <a:xfrm>
-            <a:off x="8074152" y="2304288"/>
-            <a:ext cx="274320" cy="365760"/>
-          </a:xfrm>
-          <a:prstGeom prst="rect">
-            <a:avLst/>
-          </a:prstGeom>
-          <a:noFill/>
-        </p:spPr>
-        <p:txBody>
-          <a:bodyPr wrap="square" lIns="0" rIns="0" tIns="0" bIns="0" anchor="t">
-            <a:spAutoFit/>
-          </a:bodyPr>
-          <a:lstStyle/>
-          <a:p>
-            <a:pPr algn="ctr">
-              <a:lnSpc>
-                <a:spcPct val="100000"/>
-              </a:lnSpc>
-              <a:defRPr sz="2400" b="1">
-                <a:solidFill>
-                  <a:srgbClr val="E000D2"/>
-                </a:solidFill>
-                <a:latin typeface="Lato"/>
-              </a:defRPr>
-            </a:pPr>
-            <a:r>
-              <a:t>›</a:t>
-            </a:r>
-          </a:p>
-        </p:txBody>
-      </p:sp>
-      <p:sp>
-        <p:nvSpPr>
-          <p:cNvPr id="22" name="Rectangle 21"/>
-          <p:cNvSpPr/>
-          <p:nvPr/>
-        </p:nvSpPr>
-        <p:spPr>
-          <a:xfrm>
-            <a:off x="8394192" y="1938528"/>
-            <a:ext cx="2212848" cy="1234440"/>
-          </a:xfrm>
-          <a:prstGeom prst="rect">
-            <a:avLst/>
-          </a:prstGeom>
-          <a:solidFill>
-            <a:srgbClr val="F7EFFA"/>
-          </a:solidFill>
-          <a:ln>
-            <a:solidFill>
-              <a:srgbClr val="F7EFFA"/>
-            </a:solidFill>
-          </a:ln>
-        </p:spPr>
-        <p:style>
-          <a:lnRef idx="1">
-            <a:schemeClr val="accent1"/>
-          </a:lnRef>
-          <a:fillRef idx="3">
-            <a:schemeClr val="accent1"/>
-          </a:fillRef>
-          <a:effectRef idx="2">
-            <a:schemeClr val="accent1"/>
-          </a:effectRef>
-          <a:fontRef idx="minor">
-            <a:schemeClr val="lt1"/>
-          </a:fontRef>
-        </p:style>
-        <p:txBody>
-          <a:bodyPr rtlCol="0" anchor="ctr"/>
-          <a:lstStyle/>
-          <a:p>
-            <a:pPr algn="ctr"/>
-          </a:p>
-        </p:txBody>
-      </p:sp>
-      <p:sp>
-        <p:nvSpPr>
-          <p:cNvPr id="23" name="TextBox 22"/>
-          <p:cNvSpPr txBox="1"/>
-          <p:nvPr/>
-        </p:nvSpPr>
-        <p:spPr>
-          <a:xfrm>
-            <a:off x="8558784" y="2121408"/>
-            <a:ext cx="1883664" cy="201168"/>
-          </a:xfrm>
-          <a:prstGeom prst="rect">
-            <a:avLst/>
-          </a:prstGeom>
-          <a:noFill/>
-        </p:spPr>
-        <p:txBody>
-          <a:bodyPr wrap="square" lIns="0" rIns="0" tIns="0" bIns="0" anchor="t">
-            <a:spAutoFit/>
-          </a:bodyPr>
-          <a:lstStyle/>
-          <a:p>
-            <a:pPr algn="l">
-              <a:lnSpc>
-                <a:spcPct val="100000"/>
-              </a:lnSpc>
-              <a:defRPr sz="900" b="1">
-                <a:solidFill>
-                  <a:srgbClr val="E000D2"/>
-                </a:solidFill>
-                <a:latin typeface="Lato"/>
-              </a:defRPr>
-            </a:pPr>
-            <a:r>
-              <a:t>DEVOLUÇÕES</a:t>
-            </a:r>
-          </a:p>
-        </p:txBody>
-      </p:sp>
-      <p:sp>
-        <p:nvSpPr>
-          <p:cNvPr id="24" name="TextBox 23"/>
-          <p:cNvSpPr txBox="1"/>
-          <p:nvPr/>
-        </p:nvSpPr>
-        <p:spPr>
-          <a:xfrm>
-            <a:off x="8558784" y="2395728"/>
-            <a:ext cx="1883664" cy="320040"/>
-          </a:xfrm>
-          <a:prstGeom prst="rect">
-            <a:avLst/>
-          </a:prstGeom>
-          <a:noFill/>
-        </p:spPr>
-        <p:txBody>
-          <a:bodyPr wrap="square" lIns="0" rIns="0" tIns="0" bIns="0" anchor="t">
-            <a:spAutoFit/>
-          </a:bodyPr>
-          <a:lstStyle/>
-          <a:p>
-            <a:pPr algn="l">
-              <a:lnSpc>
-                <a:spcPct val="100000"/>
-              </a:lnSpc>
-              <a:defRPr sz="1900" b="1">
-                <a:solidFill>
-                  <a:srgbClr val="37183E"/>
-                </a:solidFill>
-                <a:latin typeface="Lato"/>
-              </a:defRPr>
-            </a:pPr>
-            <a:r>
-              <a:t>− R$ 720 mil</a:t>
-            </a:r>
-          </a:p>
-        </p:txBody>
-      </p:sp>
-      <p:sp>
-        <p:nvSpPr>
-          <p:cNvPr id="25" name="TextBox 24"/>
-          <p:cNvSpPr txBox="1"/>
-          <p:nvPr/>
-        </p:nvSpPr>
-        <p:spPr>
-          <a:xfrm>
-            <a:off x="8558784" y="2816352"/>
-            <a:ext cx="1883664" cy="201168"/>
-          </a:xfrm>
-          <a:prstGeom prst="rect">
-            <a:avLst/>
-          </a:prstGeom>
-          <a:noFill/>
-        </p:spPr>
-        <p:txBody>
-          <a:bodyPr wrap="square" lIns="0" rIns="0" tIns="0" bIns="0" anchor="t">
-            <a:spAutoFit/>
-          </a:bodyPr>
-          <a:lstStyle/>
-          <a:p>
-            <a:pPr algn="l">
-              <a:lnSpc>
-                <a:spcPct val="100000"/>
-              </a:lnSpc>
-              <a:defRPr sz="1050" b="0">
-                <a:solidFill>
-                  <a:srgbClr val="5D5860"/>
-                </a:solidFill>
-                <a:latin typeface="Lato"/>
-              </a:defRPr>
-            </a:pPr>
-            <a:r>
-              <a:t>ajuste por categoria</a:t>
-            </a:r>
-          </a:p>
-        </p:txBody>
-      </p:sp>
-      <p:sp>
-        <p:nvSpPr>
-          <p:cNvPr id="26" name="Rectangle 25"/>
-          <p:cNvSpPr/>
-          <p:nvPr/>
-        </p:nvSpPr>
-        <p:spPr>
-          <a:xfrm>
-            <a:off x="548640" y="3566160"/>
-            <a:ext cx="5303520" cy="1417320"/>
-          </a:xfrm>
-          <a:prstGeom prst="rect">
-            <a:avLst/>
-          </a:prstGeom>
-          <a:solidFill>
-            <a:srgbClr val="561265"/>
-          </a:solidFill>
-          <a:ln>
-            <a:solidFill>
-              <a:srgbClr val="561265"/>
-            </a:solidFill>
-          </a:ln>
-        </p:spPr>
-        <p:style>
-          <a:lnRef idx="1">
-            <a:schemeClr val="accent1"/>
-          </a:lnRef>
-          <a:fillRef idx="3">
-            <a:schemeClr val="accent1"/>
-          </a:fillRef>
-          <a:effectRef idx="2">
-            <a:schemeClr val="accent1"/>
-          </a:effectRef>
-          <a:fontRef idx="minor">
-            <a:schemeClr val="lt1"/>
-          </a:fontRef>
-        </p:style>
-        <p:txBody>
-          <a:bodyPr rtlCol="0" anchor="ctr"/>
-          <a:lstStyle/>
-          <a:p>
-            <a:pPr algn="ctr"/>
-          </a:p>
-        </p:txBody>
-      </p:sp>
-      <p:sp>
-        <p:nvSpPr>
-          <p:cNvPr id="27" name="TextBox 26"/>
-          <p:cNvSpPr txBox="1"/>
-          <p:nvPr/>
-        </p:nvSpPr>
-        <p:spPr>
-          <a:xfrm>
-            <a:off x="804672" y="3785615"/>
-            <a:ext cx="4526280" cy="219456"/>
-          </a:xfrm>
-          <a:prstGeom prst="rect">
-            <a:avLst/>
-          </a:prstGeom>
-          <a:noFill/>
-        </p:spPr>
-        <p:txBody>
-          <a:bodyPr wrap="square" lIns="0" rIns="0" tIns="0" bIns="0" anchor="t">
-            <a:spAutoFit/>
-          </a:bodyPr>
-          <a:lstStyle/>
-          <a:p>
-            <a:pPr algn="l">
-              <a:lnSpc>
-                <a:spcPct val="100000"/>
-              </a:lnSpc>
-              <a:defRPr sz="1000" b="1">
-                <a:solidFill>
-                  <a:srgbClr val="E000D2"/>
-                </a:solidFill>
-                <a:latin typeface="Lato"/>
-              </a:defRPr>
-            </a:pPr>
-            <a:r>
-              <a:t>RECEITA ESTIMADA PÓS-DEVOLUÇÕES</a:t>
-            </a:r>
-          </a:p>
-        </p:txBody>
-      </p:sp>
-      <p:sp>
-        <p:nvSpPr>
-          <p:cNvPr id="28" name="TextBox 27"/>
-          <p:cNvSpPr txBox="1"/>
-          <p:nvPr/>
-        </p:nvSpPr>
-        <p:spPr>
-          <a:xfrm>
-            <a:off x="804672" y="4105656"/>
-            <a:ext cx="2834640" cy="502920"/>
-          </a:xfrm>
-          <a:prstGeom prst="rect">
-            <a:avLst/>
-          </a:prstGeom>
-          <a:noFill/>
-        </p:spPr>
-        <p:txBody>
-          <a:bodyPr wrap="square" lIns="0" rIns="0" tIns="0" bIns="0" anchor="t">
-            <a:spAutoFit/>
-          </a:bodyPr>
-          <a:lstStyle/>
-          <a:p>
-            <a:pPr algn="l">
-              <a:lnSpc>
-                <a:spcPct val="100000"/>
-              </a:lnSpc>
-              <a:defRPr sz="3100" b="1">
-                <a:solidFill>
-                  <a:srgbClr val="FFFFFF"/>
-                </a:solidFill>
-                <a:latin typeface="Lato"/>
-              </a:defRPr>
-            </a:pPr>
-            <a:r>
-              <a:t>R$ 4,14M</a:t>
-            </a:r>
-          </a:p>
-        </p:txBody>
-      </p:sp>
-      <p:sp>
-        <p:nvSpPr>
-          <p:cNvPr id="29" name="TextBox 28"/>
-          <p:cNvSpPr txBox="1"/>
-          <p:nvPr/>
-        </p:nvSpPr>
-        <p:spPr>
-          <a:xfrm>
-            <a:off x="3154680" y="4160520"/>
-            <a:ext cx="2331720" cy="420624"/>
-          </a:xfrm>
-          <a:prstGeom prst="rect">
-            <a:avLst/>
-          </a:prstGeom>
-          <a:noFill/>
-        </p:spPr>
-        <p:txBody>
-          <a:bodyPr wrap="square" lIns="0" rIns="0" tIns="0" bIns="0" anchor="t">
-            <a:spAutoFit/>
-          </a:bodyPr>
-          <a:lstStyle/>
-          <a:p>
-            <a:pPr algn="l">
-              <a:lnSpc>
-                <a:spcPct val="100000"/>
-              </a:lnSpc>
-              <a:defRPr sz="1150" b="0">
-                <a:solidFill>
-                  <a:srgbClr val="FFFFFF"/>
-                </a:solidFill>
-                <a:latin typeface="Lato"/>
-              </a:defRPr>
-            </a:pPr>
-            <a:r>
-              <a:t>Entrada de receita no cenário — não benefício líquido do projeto.</a:t>
-            </a:r>
-          </a:p>
-        </p:txBody>
-      </p:sp>
-      <p:sp>
-        <p:nvSpPr>
-          <p:cNvPr id="30" name="Rectangle 29"/>
-          <p:cNvSpPr/>
-          <p:nvPr/>
-        </p:nvSpPr>
-        <p:spPr>
-          <a:xfrm>
-            <a:off x="6108192" y="3566160"/>
-            <a:ext cx="2606040" cy="1417320"/>
-          </a:xfrm>
-          <a:prstGeom prst="rect">
-            <a:avLst/>
-          </a:prstGeom>
-          <a:solidFill>
-            <a:srgbClr val="F7EFFA"/>
-          </a:solidFill>
-          <a:ln>
-            <a:solidFill>
-              <a:srgbClr val="F7EFFA"/>
-            </a:solidFill>
-          </a:ln>
-        </p:spPr>
-        <p:style>
-          <a:lnRef idx="1">
-            <a:schemeClr val="accent1"/>
-          </a:lnRef>
-          <a:fillRef idx="3">
-            <a:schemeClr val="accent1"/>
-          </a:fillRef>
-          <a:effectRef idx="2">
-            <a:schemeClr val="accent1"/>
-          </a:effectRef>
-          <a:fontRef idx="minor">
-            <a:schemeClr val="lt1"/>
-          </a:fontRef>
-        </p:style>
-        <p:txBody>
-          <a:bodyPr rtlCol="0" anchor="ctr"/>
-          <a:lstStyle/>
-          <a:p>
-            <a:pPr algn="ctr"/>
-          </a:p>
-        </p:txBody>
-      </p:sp>
-      <p:sp>
-        <p:nvSpPr>
-          <p:cNvPr id="31" name="TextBox 30"/>
-          <p:cNvSpPr txBox="1"/>
-          <p:nvPr/>
-        </p:nvSpPr>
-        <p:spPr>
-          <a:xfrm>
-            <a:off x="6345936" y="3785615"/>
-            <a:ext cx="2011680" cy="219456"/>
+            <a:off x="548640" y="1828800"/>
+            <a:ext cx="2468880" cy="228600"/>
           </a:xfrm>
           <a:prstGeom prst="rect">
             <a:avLst/>
@@ -5578,144 +4521,21 @@
               </a:defRPr>
             </a:pPr>
             <a:r>
-              <a:t>CUSTO HISTÓRICO</a:t>
-            </a:r>
-          </a:p>
-        </p:txBody>
-      </p:sp>
-      <p:sp>
-        <p:nvSpPr>
-          <p:cNvPr id="32" name="TextBox 31"/>
+              <a:t>CENÁRIO SELL-THROUGH</a:t>
+            </a:r>
+          </a:p>
+        </p:txBody>
+      </p:sp>
+      <p:sp>
+        <p:nvSpPr>
+          <p:cNvPr id="8" name="TextBox 7"/>
           <p:cNvSpPr txBox="1"/>
           <p:nvPr/>
         </p:nvSpPr>
         <p:spPr>
           <a:xfrm>
-            <a:off x="6345936" y="4105656"/>
-            <a:ext cx="2011680" cy="384048"/>
-          </a:xfrm>
-          <a:prstGeom prst="rect">
-            <a:avLst/>
-          </a:prstGeom>
-          <a:noFill/>
-        </p:spPr>
-        <p:txBody>
-          <a:bodyPr wrap="square" lIns="0" rIns="0" tIns="0" bIns="0" anchor="t">
-            <a:spAutoFit/>
-          </a:bodyPr>
-          <a:lstStyle/>
-          <a:p>
-            <a:pPr algn="l">
-              <a:lnSpc>
-                <a:spcPct val="100000"/>
-              </a:lnSpc>
-              <a:defRPr sz="2300" b="1">
-                <a:solidFill>
-                  <a:srgbClr val="37183E"/>
-                </a:solidFill>
-                <a:latin typeface="Lato"/>
-              </a:defRPr>
-            </a:pPr>
-            <a:r>
-              <a:t>R$ 3,03M</a:t>
-            </a:r>
-          </a:p>
-        </p:txBody>
-      </p:sp>
-      <p:sp>
-        <p:nvSpPr>
-          <p:cNvPr id="33" name="TextBox 32"/>
-          <p:cNvSpPr txBox="1"/>
-          <p:nvPr/>
-        </p:nvSpPr>
-        <p:spPr>
-          <a:xfrm>
-            <a:off x="6345936" y="4572000"/>
-            <a:ext cx="2011680" cy="219456"/>
-          </a:xfrm>
-          <a:prstGeom prst="rect">
-            <a:avLst/>
-          </a:prstGeom>
-          <a:noFill/>
-        </p:spPr>
-        <p:txBody>
-          <a:bodyPr wrap="square" lIns="0" rIns="0" tIns="0" bIns="0" anchor="t">
-            <a:spAutoFit/>
-          </a:bodyPr>
-          <a:lstStyle/>
-          <a:p>
-            <a:pPr algn="l">
-              <a:lnSpc>
-                <a:spcPct val="100000"/>
-              </a:lnSpc>
-              <a:defRPr sz="1050" b="0">
-                <a:solidFill>
-                  <a:srgbClr val="5D5860"/>
-                </a:solidFill>
-                <a:latin typeface="Lato"/>
-              </a:defRPr>
-            </a:pPr>
-            <a:r>
-              <a:t>+ R$ 143 mil de frete</a:t>
-            </a:r>
-          </a:p>
-        </p:txBody>
-      </p:sp>
-      <p:sp>
-        <p:nvSpPr>
-          <p:cNvPr id="34" name="Rectangle 33"/>
-          <p:cNvSpPr/>
-          <p:nvPr/>
-        </p:nvSpPr>
-        <p:spPr>
-          <a:xfrm>
-            <a:off x="8961120" y="3566160"/>
-            <a:ext cx="2679192" cy="1417320"/>
-          </a:xfrm>
-          <a:prstGeom prst="rect">
-            <a:avLst/>
-          </a:prstGeom>
-          <a:solidFill>
-            <a:srgbClr val="EFE0F4"/>
-          </a:solidFill>
-          <a:ln>
-            <a:solidFill>
-              <a:srgbClr val="EFE0F4"/>
-            </a:solidFill>
-          </a:ln>
-        </p:spPr>
-        <p:style>
-          <a:lnRef idx="1">
-            <a:schemeClr val="accent1"/>
-          </a:lnRef>
-          <a:fillRef idx="3">
-            <a:schemeClr val="accent1"/>
-          </a:fillRef>
-          <a:effectRef idx="2">
-            <a:schemeClr val="accent1"/>
-          </a:effectRef>
-          <a:fontRef idx="minor">
-            <a:schemeClr val="lt1"/>
-          </a:fontRef>
-        </p:style>
-        <p:txBody>
-          <a:bodyPr rtlCol="0" anchor="ctr"/>
-          <a:lstStyle/>
-          <a:p>
-            <a:pPr algn="ctr"/>
-          </a:p>
-        </p:txBody>
-      </p:sp>
-      <p:sp>
-        <p:nvSpPr>
-          <p:cNvPr id="35" name="TextBox 34"/>
-          <p:cNvSpPr txBox="1"/>
-          <p:nvPr/>
-        </p:nvSpPr>
-        <p:spPr>
-          <a:xfrm>
-            <a:off x="9198864" y="3785615"/>
-            <a:ext cx="2194560" cy="219456"/>
+            <a:off x="3108960" y="1828800"/>
+            <a:ext cx="1463040" cy="228600"/>
           </a:xfrm>
           <a:prstGeom prst="rect">
             <a:avLst/>
@@ -5740,99 +4560,21 @@
               </a:defRPr>
             </a:pPr>
             <a:r>
-              <a:t>CONTRIBUIÇÃO ESTIMADA</a:t>
-            </a:r>
-          </a:p>
-        </p:txBody>
-      </p:sp>
-      <p:sp>
-        <p:nvSpPr>
-          <p:cNvPr id="36" name="TextBox 35"/>
+              <a:t>UNIDADES</a:t>
+            </a:r>
+          </a:p>
+        </p:txBody>
+      </p:sp>
+      <p:sp>
+        <p:nvSpPr>
+          <p:cNvPr id="9" name="TextBox 8"/>
           <p:cNvSpPr txBox="1"/>
           <p:nvPr/>
         </p:nvSpPr>
         <p:spPr>
           <a:xfrm>
-            <a:off x="9198864" y="4105656"/>
-            <a:ext cx="2194560" cy="384048"/>
-          </a:xfrm>
-          <a:prstGeom prst="rect">
-            <a:avLst/>
-          </a:prstGeom>
-          <a:noFill/>
-        </p:spPr>
-        <p:txBody>
-          <a:bodyPr wrap="square" lIns="0" rIns="0" tIns="0" bIns="0" anchor="t">
-            <a:spAutoFit/>
-          </a:bodyPr>
-          <a:lstStyle/>
-          <a:p>
-            <a:pPr algn="l">
-              <a:lnSpc>
-                <a:spcPct val="100000"/>
-              </a:lnSpc>
-              <a:defRPr sz="2300" b="1">
-                <a:solidFill>
-                  <a:srgbClr val="37183E"/>
-                </a:solidFill>
-                <a:latin typeface="Lato"/>
-              </a:defRPr>
-            </a:pPr>
-            <a:r>
-              <a:t>R$ 969 mil</a:t>
-            </a:r>
-          </a:p>
-        </p:txBody>
-      </p:sp>
-      <p:sp>
-        <p:nvSpPr>
-          <p:cNvPr id="37" name="TextBox 36"/>
-          <p:cNvSpPr txBox="1"/>
-          <p:nvPr/>
-        </p:nvSpPr>
-        <p:spPr>
-          <a:xfrm>
-            <a:off x="9198864" y="4572000"/>
-            <a:ext cx="2011680" cy="219456"/>
-          </a:xfrm>
-          <a:prstGeom prst="rect">
-            <a:avLst/>
-          </a:prstGeom>
-          <a:noFill/>
-        </p:spPr>
-        <p:txBody>
-          <a:bodyPr wrap="square" lIns="0" rIns="0" tIns="0" bIns="0" anchor="t">
-            <a:spAutoFit/>
-          </a:bodyPr>
-          <a:lstStyle/>
-          <a:p>
-            <a:pPr algn="l">
-              <a:lnSpc>
-                <a:spcPct val="100000"/>
-              </a:lnSpc>
-              <a:defRPr sz="1050" b="0">
-                <a:solidFill>
-                  <a:srgbClr val="5D5860"/>
-                </a:solidFill>
-                <a:latin typeface="Lato"/>
-              </a:defRPr>
-            </a:pPr>
-            <a:r>
-              <a:t>23,4% da receita</a:t>
-            </a:r>
-          </a:p>
-        </p:txBody>
-      </p:sp>
-      <p:sp>
-        <p:nvSpPr>
-          <p:cNvPr id="38" name="TextBox 37"/>
-          <p:cNvSpPr txBox="1"/>
-          <p:nvPr/>
-        </p:nvSpPr>
-        <p:spPr>
-          <a:xfrm>
-            <a:off x="548640" y="5321808"/>
-            <a:ext cx="914400" cy="219456"/>
+            <a:off x="4663440" y="1828800"/>
+            <a:ext cx="1645920" cy="228600"/>
           </a:xfrm>
           <a:prstGeom prst="rect">
             <a:avLst/>
@@ -5857,21 +4599,21 @@
               </a:defRPr>
             </a:pPr>
             <a:r>
-              <a:t>LIMITES</a:t>
-            </a:r>
-          </a:p>
-        </p:txBody>
-      </p:sp>
-      <p:sp>
-        <p:nvSpPr>
-          <p:cNvPr id="39" name="TextBox 38"/>
+              <a:t>RECEITA BRUTA</a:t>
+            </a:r>
+          </a:p>
+        </p:txBody>
+      </p:sp>
+      <p:sp>
+        <p:nvSpPr>
+          <p:cNvPr id="10" name="TextBox 9"/>
           <p:cNvSpPr txBox="1"/>
           <p:nvPr/>
         </p:nvSpPr>
         <p:spPr>
           <a:xfrm>
-            <a:off x="1280160" y="5266944"/>
-            <a:ext cx="10058400" cy="438912"/>
+            <a:off x="6400800" y="1828800"/>
+            <a:ext cx="1737360" cy="228600"/>
           </a:xfrm>
           <a:prstGeom prst="rect">
             <a:avLst/>
@@ -5888,34 +4630,112 @@
               <a:lnSpc>
                 <a:spcPct val="100000"/>
               </a:lnSpc>
-              <a:defRPr sz="1150" b="0">
-                <a:solidFill>
-                  <a:srgbClr val="5D5860"/>
+              <a:defRPr sz="950" b="1">
+                <a:solidFill>
+                  <a:srgbClr val="E000D2"/>
                 </a:solidFill>
                 <a:latin typeface="Lato"/>
               </a:defRPr>
             </a:pPr>
             <a:r>
-              <a:t>Sem impostos, comissões, logística reversa, retorno físico ou elasticidade de preço. Estoque sem data de snapshot.</a:t>
+              <a:t>ESTORNO DEVOLUÇÃO</a:t>
+            </a:r>
+          </a:p>
+        </p:txBody>
+      </p:sp>
+      <p:sp>
+        <p:nvSpPr>
+          <p:cNvPr id="11" name="TextBox 10"/>
+          <p:cNvSpPr txBox="1"/>
+          <p:nvPr/>
+        </p:nvSpPr>
+        <p:spPr>
+          <a:xfrm>
+            <a:off x="8229600" y="1828800"/>
+            <a:ext cx="1828800" cy="228600"/>
+          </a:xfrm>
+          <a:prstGeom prst="rect">
+            <a:avLst/>
+          </a:prstGeom>
+          <a:noFill/>
+        </p:spPr>
+        <p:txBody>
+          <a:bodyPr wrap="square" lIns="0" rIns="0" tIns="0" bIns="0" anchor="t">
+            <a:spAutoFit/>
+          </a:bodyPr>
+          <a:lstStyle/>
+          <a:p>
+            <a:pPr algn="l">
+              <a:lnSpc>
+                <a:spcPct val="100000"/>
+              </a:lnSpc>
+              <a:defRPr sz="950" b="1">
+                <a:solidFill>
+                  <a:srgbClr val="E000D2"/>
+                </a:solidFill>
+                <a:latin typeface="Lato"/>
+              </a:defRPr>
+            </a:pPr>
+            <a:r>
+              <a:t>RECEITA LÍQUIDA (CAIXA)</a:t>
+            </a:r>
+          </a:p>
+        </p:txBody>
+      </p:sp>
+      <p:sp>
+        <p:nvSpPr>
+          <p:cNvPr id="12" name="TextBox 11"/>
+          <p:cNvSpPr txBox="1"/>
+          <p:nvPr/>
+        </p:nvSpPr>
+        <p:spPr>
+          <a:xfrm>
+            <a:off x="10149840" y="1828800"/>
+            <a:ext cx="1490472" cy="228600"/>
+          </a:xfrm>
+          <a:prstGeom prst="rect">
+            <a:avLst/>
+          </a:prstGeom>
+          <a:noFill/>
+        </p:spPr>
+        <p:txBody>
+          <a:bodyPr wrap="square" lIns="0" rIns="0" tIns="0" bIns="0" anchor="t">
+            <a:spAutoFit/>
+          </a:bodyPr>
+          <a:lstStyle/>
+          <a:p>
+            <a:pPr algn="l">
+              <a:lnSpc>
+                <a:spcPct val="100000"/>
+              </a:lnSpc>
+              <a:defRPr sz="950" b="1">
+                <a:solidFill>
+                  <a:srgbClr val="E000D2"/>
+                </a:solidFill>
+                <a:latin typeface="Lato"/>
+              </a:defRPr>
+            </a:pPr>
+            <a:r>
+              <a:t>CONTRIBUIÇÃO</a:t>
             </a:r>
           </a:p>
         </p:txBody>
       </p:sp>
       <p:cxnSp>
         <p:nvCxnSpPr>
-          <p:cNvPr id="40" name="Connector 39"/>
+          <p:cNvPr id="13" name="Connector 12"/>
           <p:cNvCxnSpPr/>
           <p:nvPr/>
         </p:nvCxnSpPr>
         <p:spPr>
           <a:xfrm>
-            <a:off x="548640" y="6327648"/>
+            <a:off x="548640" y="2103120"/>
             <a:ext cx="11091672" cy="0"/>
           </a:xfrm>
           <a:prstGeom prst="line">
             <a:avLst/>
           </a:prstGeom>
-          <a:ln w="10160">
+          <a:ln w="12700">
             <a:solidFill>
               <a:srgbClr val="DEC6E4"/>
             </a:solidFill>
@@ -5938,89 +4758,24 @@
       </p:cxnSp>
       <p:sp>
         <p:nvSpPr>
-          <p:cNvPr id="41" name="TextBox 40"/>
-          <p:cNvSpPr txBox="1"/>
-          <p:nvPr/>
-        </p:nvSpPr>
-        <p:spPr>
-          <a:xfrm>
-            <a:off x="11201400" y="6419088"/>
-            <a:ext cx="438912" cy="201168"/>
-          </a:xfrm>
-          <a:prstGeom prst="rect">
-            <a:avLst/>
-          </a:prstGeom>
-          <a:noFill/>
-        </p:spPr>
-        <p:txBody>
-          <a:bodyPr wrap="square" lIns="0" rIns="0" tIns="0" bIns="0" anchor="t">
-            <a:spAutoFit/>
-          </a:bodyPr>
-          <a:lstStyle/>
-          <a:p>
-            <a:pPr algn="r">
-              <a:lnSpc>
-                <a:spcPct val="100000"/>
-              </a:lnSpc>
-              <a:defRPr sz="950" b="1">
-                <a:solidFill>
-                  <a:srgbClr val="37183E"/>
-                </a:solidFill>
-                <a:latin typeface="Lato"/>
-              </a:defRPr>
-            </a:pPr>
-            <a:r>
-              <a:t>A2</a:t>
-            </a:r>
-          </a:p>
-        </p:txBody>
-      </p:sp>
-    </p:spTree>
-  </p:cSld>
-  <p:clrMapOvr>
-    <a:masterClrMapping/>
-  </p:clrMapOvr>
-</p:sld>
-</file>
-
-<file path=ppt/slides/slide3.xml><?xml version="1.0" encoding="utf-8"?>
-<p:sld xmlns:a="http://schemas.openxmlformats.org/drawingml/2006/main" xmlns:p="http://schemas.openxmlformats.org/presentationml/2006/main" xmlns:r="http://schemas.openxmlformats.org/officeDocument/2006/relationships">
-  <p:cSld>
-    <p:bg>
-      <p:bgPr>
-        <a:solidFill>
-          <a:srgbClr val="FFFFFF"/>
-        </a:solidFill>
-        <a:effectLst/>
-      </p:bgPr>
-    </p:bg>
-    <p:spTree>
-      <p:nvGrpSpPr>
-        <p:cNvPr id="1" name=""/>
-        <p:cNvGrpSpPr/>
-        <p:nvPr/>
-      </p:nvGrpSpPr>
-      <p:grpSpPr/>
-      <p:sp>
-        <p:nvSpPr>
-          <p:cNvPr id="2" name="Rectangle 1"/>
+          <p:cNvPr id="14" name="Rectangle 13"/>
           <p:cNvSpPr/>
           <p:nvPr/>
         </p:nvSpPr>
         <p:spPr>
           <a:xfrm>
-            <a:off x="548640" y="356616"/>
-            <a:ext cx="256032" cy="50292"/>
+            <a:off x="548640" y="2194560"/>
+            <a:ext cx="11091672" cy="713232"/>
           </a:xfrm>
           <a:prstGeom prst="rect">
             <a:avLst/>
           </a:prstGeom>
           <a:solidFill>
-            <a:srgbClr val="E000D2"/>
+            <a:srgbClr val="F7EFFA"/>
           </a:solidFill>
           <a:ln>
             <a:solidFill>
-              <a:srgbClr val="E000D2"/>
+              <a:srgbClr val="F7EFFA"/>
             </a:solidFill>
           </a:ln>
         </p:spPr>
@@ -6048,14 +4803,14 @@
       </p:sp>
       <p:sp>
         <p:nvSpPr>
-          <p:cNvPr id="3" name="TextBox 2"/>
+          <p:cNvPr id="15" name="TextBox 14"/>
           <p:cNvSpPr txBox="1"/>
           <p:nvPr/>
         </p:nvSpPr>
         <p:spPr>
           <a:xfrm>
-            <a:off x="914400" y="246888"/>
-            <a:ext cx="6766560" cy="256032"/>
+            <a:off x="731520" y="2395728"/>
+            <a:ext cx="2286000" cy="320040"/>
           </a:xfrm>
           <a:prstGeom prst="rect">
             <a:avLst/>
@@ -6072,107 +4827,29 @@
               <a:lnSpc>
                 <a:spcPct val="100000"/>
               </a:lnSpc>
-              <a:defRPr sz="1050" b="1">
-                <a:solidFill>
-                  <a:srgbClr val="561265"/>
+              <a:defRPr sz="1300" b="1">
+                <a:solidFill>
+                  <a:srgbClr val="37183E"/>
                 </a:solidFill>
                 <a:latin typeface="Lato"/>
               </a:defRPr>
             </a:pPr>
             <a:r>
-              <a:t>A3 / EVIDÊNCIA · DESCONTOS</a:t>
-            </a:r>
-          </a:p>
-        </p:txBody>
-      </p:sp>
-      <p:sp>
-        <p:nvSpPr>
-          <p:cNvPr id="4" name="TextBox 3"/>
+              <a:t>Conservador (25%)</a:t>
+            </a:r>
+          </a:p>
+        </p:txBody>
+      </p:sp>
+      <p:sp>
+        <p:nvSpPr>
+          <p:cNvPr id="16" name="TextBox 15"/>
           <p:cNvSpPr txBox="1"/>
           <p:nvPr/>
         </p:nvSpPr>
         <p:spPr>
           <a:xfrm>
-            <a:off x="10771632" y="246888"/>
-            <a:ext cx="868680" cy="256032"/>
-          </a:xfrm>
-          <a:prstGeom prst="rect">
-            <a:avLst/>
-          </a:prstGeom>
-          <a:noFill/>
-        </p:spPr>
-        <p:txBody>
-          <a:bodyPr wrap="square" lIns="0" rIns="0" tIns="0" bIns="0" anchor="t">
-            <a:spAutoFit/>
-          </a:bodyPr>
-          <a:lstStyle/>
-          <a:p>
-            <a:pPr algn="r">
-              <a:lnSpc>
-                <a:spcPct val="100000"/>
-              </a:lnSpc>
-              <a:defRPr sz="1050" b="1">
-                <a:solidFill>
-                  <a:srgbClr val="37183E"/>
-                </a:solidFill>
-                <a:latin typeface="Lato"/>
-              </a:defRPr>
-            </a:pPr>
-            <a:r>
-              <a:t>VÉRTICE</a:t>
-            </a:r>
-          </a:p>
-        </p:txBody>
-      </p:sp>
-      <p:sp>
-        <p:nvSpPr>
-          <p:cNvPr id="5" name="TextBox 4"/>
-          <p:cNvSpPr txBox="1"/>
-          <p:nvPr/>
-        </p:nvSpPr>
-        <p:spPr>
-          <a:xfrm>
-            <a:off x="548640" y="749808"/>
-            <a:ext cx="10972800" cy="713232"/>
-          </a:xfrm>
-          <a:prstGeom prst="rect">
-            <a:avLst/>
-          </a:prstGeom>
-          <a:noFill/>
-        </p:spPr>
-        <p:txBody>
-          <a:bodyPr wrap="square" lIns="0" rIns="0" tIns="0" bIns="0" anchor="t">
-            <a:spAutoFit/>
-          </a:bodyPr>
-          <a:lstStyle/>
-          <a:p>
-            <a:pPr algn="l">
-              <a:lnSpc>
-                <a:spcPct val="95000"/>
-              </a:lnSpc>
-              <a:defRPr sz="2550" b="1">
-                <a:solidFill>
-                  <a:srgbClr val="37183E"/>
-                </a:solidFill>
-                <a:latin typeface="Lato"/>
-              </a:defRPr>
-            </a:pPr>
-            <a:r>
-              <a:t>Desconto corrói margem; efeito no volume segue inconclusivo.</a:t>
-            </a:r>
-          </a:p>
-        </p:txBody>
-      </p:sp>
-      <p:sp>
-        <p:nvSpPr>
-          <p:cNvPr id="6" name="TextBox 5"/>
-          <p:cNvSpPr txBox="1"/>
-          <p:nvPr/>
-        </p:nvSpPr>
-        <p:spPr>
-          <a:xfrm>
-            <a:off x="548640" y="1554480"/>
-            <a:ext cx="4206240" cy="219456"/>
+            <a:off x="3108960" y="2395728"/>
+            <a:ext cx="1463040" cy="320040"/>
           </a:xfrm>
           <a:prstGeom prst="rect">
             <a:avLst/>
@@ -6189,29 +4866,29 @@
               <a:lnSpc>
                 <a:spcPct val="100000"/>
               </a:lnSpc>
-              <a:defRPr sz="950" b="1">
-                <a:solidFill>
-                  <a:srgbClr val="E000D2"/>
+              <a:defRPr sz="1250" b="0">
+                <a:solidFill>
+                  <a:srgbClr val="5D5860"/>
                 </a:solidFill>
                 <a:latin typeface="Lato"/>
               </a:defRPr>
             </a:pPr>
             <a:r>
-              <a:t>MARGEM DE CONTRIBUIÇÃO PONDERADA</a:t>
-            </a:r>
-          </a:p>
-        </p:txBody>
-      </p:sp>
-      <p:sp>
-        <p:nvSpPr>
-          <p:cNvPr id="7" name="TextBox 6"/>
+              <a:t>16.263 un.</a:t>
+            </a:r>
+          </a:p>
+        </p:txBody>
+      </p:sp>
+      <p:sp>
+        <p:nvSpPr>
+          <p:cNvPr id="17" name="TextBox 16"/>
           <p:cNvSpPr txBox="1"/>
           <p:nvPr/>
         </p:nvSpPr>
         <p:spPr>
           <a:xfrm>
-            <a:off x="548640" y="2011680"/>
-            <a:ext cx="987552" cy="219456"/>
+            <a:off x="4663440" y="2395728"/>
+            <a:ext cx="1645920" cy="320040"/>
           </a:xfrm>
           <a:prstGeom prst="rect">
             <a:avLst/>
@@ -6228,7 +4905,85 @@
               <a:lnSpc>
                 <a:spcPct val="100000"/>
               </a:lnSpc>
-              <a:defRPr sz="1150" b="1">
+              <a:defRPr sz="1250" b="0">
+                <a:solidFill>
+                  <a:srgbClr val="5D5860"/>
+                </a:solidFill>
+                <a:latin typeface="Lato"/>
+              </a:defRPr>
+            </a:pPr>
+            <a:r>
+              <a:t>R$ 2,43M</a:t>
+            </a:r>
+          </a:p>
+        </p:txBody>
+      </p:sp>
+      <p:sp>
+        <p:nvSpPr>
+          <p:cNvPr id="18" name="TextBox 17"/>
+          <p:cNvSpPr txBox="1"/>
+          <p:nvPr/>
+        </p:nvSpPr>
+        <p:spPr>
+          <a:xfrm>
+            <a:off x="6400800" y="2395728"/>
+            <a:ext cx="1737360" cy="320040"/>
+          </a:xfrm>
+          <a:prstGeom prst="rect">
+            <a:avLst/>
+          </a:prstGeom>
+          <a:noFill/>
+        </p:spPr>
+        <p:txBody>
+          <a:bodyPr wrap="square" lIns="0" rIns="0" tIns="0" bIns="0" anchor="t">
+            <a:spAutoFit/>
+          </a:bodyPr>
+          <a:lstStyle/>
+          <a:p>
+            <a:pPr algn="l">
+              <a:lnSpc>
+                <a:spcPct val="100000"/>
+              </a:lnSpc>
+              <a:defRPr sz="1250" b="0">
+                <a:solidFill>
+                  <a:srgbClr val="5D5860"/>
+                </a:solidFill>
+                <a:latin typeface="Lato"/>
+              </a:defRPr>
+            </a:pPr>
+            <a:r>
+              <a:t>−R$ 360 mil</a:t>
+            </a:r>
+          </a:p>
+        </p:txBody>
+      </p:sp>
+      <p:sp>
+        <p:nvSpPr>
+          <p:cNvPr id="19" name="TextBox 18"/>
+          <p:cNvSpPr txBox="1"/>
+          <p:nvPr/>
+        </p:nvSpPr>
+        <p:spPr>
+          <a:xfrm>
+            <a:off x="8229600" y="2377440"/>
+            <a:ext cx="1828800" cy="320040"/>
+          </a:xfrm>
+          <a:prstGeom prst="rect">
+            <a:avLst/>
+          </a:prstGeom>
+          <a:noFill/>
+        </p:spPr>
+        <p:txBody>
+          <a:bodyPr wrap="square" lIns="0" rIns="0" tIns="0" bIns="0" anchor="t">
+            <a:spAutoFit/>
+          </a:bodyPr>
+          <a:lstStyle/>
+          <a:p>
+            <a:pPr algn="l">
+              <a:lnSpc>
+                <a:spcPct val="100000"/>
+              </a:lnSpc>
+              <a:defRPr sz="1400" b="1">
                 <a:solidFill>
                   <a:srgbClr val="37183E"/>
                 </a:solidFill>
@@ -6236,21 +4991,60 @@
               </a:defRPr>
             </a:pPr>
             <a:r>
-              <a:t>Sem desconto</a:t>
-            </a:r>
-          </a:p>
-        </p:txBody>
-      </p:sp>
-      <p:sp>
-        <p:nvSpPr>
-          <p:cNvPr id="8" name="Rectangle 7"/>
+              <a:t>R$ 2,07M</a:t>
+            </a:r>
+          </a:p>
+        </p:txBody>
+      </p:sp>
+      <p:sp>
+        <p:nvSpPr>
+          <p:cNvPr id="20" name="TextBox 19"/>
+          <p:cNvSpPr txBox="1"/>
+          <p:nvPr/>
+        </p:nvSpPr>
+        <p:spPr>
+          <a:xfrm>
+            <a:off x="10149840" y="2395728"/>
+            <a:ext cx="1490472" cy="320040"/>
+          </a:xfrm>
+          <a:prstGeom prst="rect">
+            <a:avLst/>
+          </a:prstGeom>
+          <a:noFill/>
+        </p:spPr>
+        <p:txBody>
+          <a:bodyPr wrap="square" lIns="0" rIns="0" tIns="0" bIns="0" anchor="t">
+            <a:spAutoFit/>
+          </a:bodyPr>
+          <a:lstStyle/>
+          <a:p>
+            <a:pPr algn="l">
+              <a:lnSpc>
+                <a:spcPct val="100000"/>
+              </a:lnSpc>
+              <a:defRPr sz="1250" b="0">
+                <a:solidFill>
+                  <a:srgbClr val="5D5860"/>
+                </a:solidFill>
+                <a:latin typeface="Lato"/>
+              </a:defRPr>
+            </a:pPr>
+            <a:r>
+              <a:t>R$ 484 mil (23,4%)</a:t>
+            </a:r>
+          </a:p>
+        </p:txBody>
+      </p:sp>
+      <p:sp>
+        <p:nvSpPr>
+          <p:cNvPr id="21" name="Rectangle 20"/>
           <p:cNvSpPr/>
           <p:nvPr/>
         </p:nvSpPr>
         <p:spPr>
           <a:xfrm>
-            <a:off x="1627632" y="1956816"/>
-            <a:ext cx="3886200" cy="310896"/>
+            <a:off x="548640" y="3017520"/>
+            <a:ext cx="11091672" cy="713232"/>
           </a:xfrm>
           <a:prstGeom prst="rect">
             <a:avLst/>
@@ -6288,24 +5082,24 @@
       </p:sp>
       <p:sp>
         <p:nvSpPr>
-          <p:cNvPr id="9" name="Rectangle 8"/>
+          <p:cNvPr id="22" name="Rectangle 21"/>
           <p:cNvSpPr/>
           <p:nvPr/>
         </p:nvSpPr>
         <p:spPr>
           <a:xfrm>
-            <a:off x="1627632" y="1956816"/>
-            <a:ext cx="3763137" cy="310896"/>
+            <a:off x="548640" y="3017520"/>
+            <a:ext cx="73152" cy="713232"/>
           </a:xfrm>
           <a:prstGeom prst="rect">
             <a:avLst/>
           </a:prstGeom>
           <a:solidFill>
-            <a:srgbClr val="561265"/>
+            <a:srgbClr val="E000D2"/>
           </a:solidFill>
           <a:ln>
             <a:solidFill>
-              <a:srgbClr val="561265"/>
+              <a:srgbClr val="E000D2"/>
             </a:solidFill>
           </a:ln>
         </p:spPr>
@@ -6333,53 +5127,14 @@
       </p:sp>
       <p:sp>
         <p:nvSpPr>
-          <p:cNvPr id="10" name="TextBox 9"/>
+          <p:cNvPr id="23" name="TextBox 22"/>
           <p:cNvSpPr txBox="1"/>
           <p:nvPr/>
         </p:nvSpPr>
         <p:spPr>
           <a:xfrm>
-            <a:off x="5596128" y="1993392"/>
-            <a:ext cx="566928" cy="219456"/>
-          </a:xfrm>
-          <a:prstGeom prst="rect">
-            <a:avLst/>
-          </a:prstGeom>
-          <a:noFill/>
-        </p:spPr>
-        <p:txBody>
-          <a:bodyPr wrap="square" lIns="0" rIns="0" tIns="0" bIns="0" anchor="t">
-            <a:spAutoFit/>
-          </a:bodyPr>
-          <a:lstStyle/>
-          <a:p>
-            <a:pPr algn="r">
-              <a:lnSpc>
-                <a:spcPct val="100000"/>
-              </a:lnSpc>
-              <a:defRPr sz="1150" b="1">
-                <a:solidFill>
-                  <a:srgbClr val="37183E"/>
-                </a:solidFill>
-                <a:latin typeface="Lato"/>
-              </a:defRPr>
-            </a:pPr>
-            <a:r>
-              <a:t>58,1%</a:t>
-            </a:r>
-          </a:p>
-        </p:txBody>
-      </p:sp>
-      <p:sp>
-        <p:nvSpPr>
-          <p:cNvPr id="11" name="TextBox 10"/>
-          <p:cNvSpPr txBox="1"/>
-          <p:nvPr/>
-        </p:nvSpPr>
-        <p:spPr>
-          <a:xfrm>
-            <a:off x="548640" y="2633472"/>
-            <a:ext cx="987552" cy="219456"/>
+            <a:off x="731520" y="3218688"/>
+            <a:ext cx="2286000" cy="320040"/>
           </a:xfrm>
           <a:prstGeom prst="rect">
             <a:avLst/>
@@ -6396,39 +5151,234 @@
               <a:lnSpc>
                 <a:spcPct val="100000"/>
               </a:lnSpc>
-              <a:defRPr sz="1150" b="1">
-                <a:solidFill>
-                  <a:srgbClr val="37183E"/>
+              <a:defRPr sz="1300" b="1">
+                <a:solidFill>
+                  <a:srgbClr val="561265"/>
                 </a:solidFill>
                 <a:latin typeface="Lato"/>
               </a:defRPr>
             </a:pPr>
             <a:r>
-              <a:t>5–10%</a:t>
-            </a:r>
-          </a:p>
-        </p:txBody>
-      </p:sp>
-      <p:sp>
-        <p:nvSpPr>
-          <p:cNvPr id="12" name="Rectangle 11"/>
+              <a:t>Cenário-base (50%)</a:t>
+            </a:r>
+          </a:p>
+        </p:txBody>
+      </p:sp>
+      <p:sp>
+        <p:nvSpPr>
+          <p:cNvPr id="24" name="TextBox 23"/>
+          <p:cNvSpPr txBox="1"/>
+          <p:nvPr/>
+        </p:nvSpPr>
+        <p:spPr>
+          <a:xfrm>
+            <a:off x="3108960" y="3218688"/>
+            <a:ext cx="1463040" cy="320040"/>
+          </a:xfrm>
+          <a:prstGeom prst="rect">
+            <a:avLst/>
+          </a:prstGeom>
+          <a:noFill/>
+        </p:spPr>
+        <p:txBody>
+          <a:bodyPr wrap="square" lIns="0" rIns="0" tIns="0" bIns="0" anchor="t">
+            <a:spAutoFit/>
+          </a:bodyPr>
+          <a:lstStyle/>
+          <a:p>
+            <a:pPr algn="l">
+              <a:lnSpc>
+                <a:spcPct val="100000"/>
+              </a:lnSpc>
+              <a:defRPr sz="1250" b="1">
+                <a:solidFill>
+                  <a:srgbClr val="5D5860"/>
+                </a:solidFill>
+                <a:latin typeface="Lato"/>
+              </a:defRPr>
+            </a:pPr>
+            <a:r>
+              <a:t>32.526 un.</a:t>
+            </a:r>
+          </a:p>
+        </p:txBody>
+      </p:sp>
+      <p:sp>
+        <p:nvSpPr>
+          <p:cNvPr id="25" name="TextBox 24"/>
+          <p:cNvSpPr txBox="1"/>
+          <p:nvPr/>
+        </p:nvSpPr>
+        <p:spPr>
+          <a:xfrm>
+            <a:off x="4663440" y="3218688"/>
+            <a:ext cx="1645920" cy="320040"/>
+          </a:xfrm>
+          <a:prstGeom prst="rect">
+            <a:avLst/>
+          </a:prstGeom>
+          <a:noFill/>
+        </p:spPr>
+        <p:txBody>
+          <a:bodyPr wrap="square" lIns="0" rIns="0" tIns="0" bIns="0" anchor="t">
+            <a:spAutoFit/>
+          </a:bodyPr>
+          <a:lstStyle/>
+          <a:p>
+            <a:pPr algn="l">
+              <a:lnSpc>
+                <a:spcPct val="100000"/>
+              </a:lnSpc>
+              <a:defRPr sz="1250" b="1">
+                <a:solidFill>
+                  <a:srgbClr val="5D5860"/>
+                </a:solidFill>
+                <a:latin typeface="Lato"/>
+              </a:defRPr>
+            </a:pPr>
+            <a:r>
+              <a:t>R$ 4,86M</a:t>
+            </a:r>
+          </a:p>
+        </p:txBody>
+      </p:sp>
+      <p:sp>
+        <p:nvSpPr>
+          <p:cNvPr id="26" name="TextBox 25"/>
+          <p:cNvSpPr txBox="1"/>
+          <p:nvPr/>
+        </p:nvSpPr>
+        <p:spPr>
+          <a:xfrm>
+            <a:off x="6400800" y="3218688"/>
+            <a:ext cx="1737360" cy="320040"/>
+          </a:xfrm>
+          <a:prstGeom prst="rect">
+            <a:avLst/>
+          </a:prstGeom>
+          <a:noFill/>
+        </p:spPr>
+        <p:txBody>
+          <a:bodyPr wrap="square" lIns="0" rIns="0" tIns="0" bIns="0" anchor="t">
+            <a:spAutoFit/>
+          </a:bodyPr>
+          <a:lstStyle/>
+          <a:p>
+            <a:pPr algn="l">
+              <a:lnSpc>
+                <a:spcPct val="100000"/>
+              </a:lnSpc>
+              <a:defRPr sz="1250" b="1">
+                <a:solidFill>
+                  <a:srgbClr val="5D5860"/>
+                </a:solidFill>
+                <a:latin typeface="Lato"/>
+              </a:defRPr>
+            </a:pPr>
+            <a:r>
+              <a:t>−R$ 720 mil</a:t>
+            </a:r>
+          </a:p>
+        </p:txBody>
+      </p:sp>
+      <p:sp>
+        <p:nvSpPr>
+          <p:cNvPr id="27" name="TextBox 26"/>
+          <p:cNvSpPr txBox="1"/>
+          <p:nvPr/>
+        </p:nvSpPr>
+        <p:spPr>
+          <a:xfrm>
+            <a:off x="8229600" y="3200400"/>
+            <a:ext cx="1828800" cy="320040"/>
+          </a:xfrm>
+          <a:prstGeom prst="rect">
+            <a:avLst/>
+          </a:prstGeom>
+          <a:noFill/>
+        </p:spPr>
+        <p:txBody>
+          <a:bodyPr wrap="square" lIns="0" rIns="0" tIns="0" bIns="0" anchor="t">
+            <a:spAutoFit/>
+          </a:bodyPr>
+          <a:lstStyle/>
+          <a:p>
+            <a:pPr algn="l">
+              <a:lnSpc>
+                <a:spcPct val="100000"/>
+              </a:lnSpc>
+              <a:defRPr sz="1400" b="1">
+                <a:solidFill>
+                  <a:srgbClr val="561265"/>
+                </a:solidFill>
+                <a:latin typeface="Lato"/>
+              </a:defRPr>
+            </a:pPr>
+            <a:r>
+              <a:t>R$ 4,14M</a:t>
+            </a:r>
+          </a:p>
+        </p:txBody>
+      </p:sp>
+      <p:sp>
+        <p:nvSpPr>
+          <p:cNvPr id="28" name="TextBox 27"/>
+          <p:cNvSpPr txBox="1"/>
+          <p:nvPr/>
+        </p:nvSpPr>
+        <p:spPr>
+          <a:xfrm>
+            <a:off x="10149840" y="3218688"/>
+            <a:ext cx="1490472" cy="320040"/>
+          </a:xfrm>
+          <a:prstGeom prst="rect">
+            <a:avLst/>
+          </a:prstGeom>
+          <a:noFill/>
+        </p:spPr>
+        <p:txBody>
+          <a:bodyPr wrap="square" lIns="0" rIns="0" tIns="0" bIns="0" anchor="t">
+            <a:spAutoFit/>
+          </a:bodyPr>
+          <a:lstStyle/>
+          <a:p>
+            <a:pPr algn="l">
+              <a:lnSpc>
+                <a:spcPct val="100000"/>
+              </a:lnSpc>
+              <a:defRPr sz="1250" b="1">
+                <a:solidFill>
+                  <a:srgbClr val="5D5860"/>
+                </a:solidFill>
+                <a:latin typeface="Lato"/>
+              </a:defRPr>
+            </a:pPr>
+            <a:r>
+              <a:t>R$ 969 mil (23,4%)</a:t>
+            </a:r>
+          </a:p>
+        </p:txBody>
+      </p:sp>
+      <p:sp>
+        <p:nvSpPr>
+          <p:cNvPr id="29" name="Rectangle 28"/>
           <p:cNvSpPr/>
           <p:nvPr/>
         </p:nvSpPr>
         <p:spPr>
           <a:xfrm>
-            <a:off x="1627632" y="2578608"/>
-            <a:ext cx="3886200" cy="310896"/>
+            <a:off x="548640" y="3840480"/>
+            <a:ext cx="11091672" cy="713232"/>
           </a:xfrm>
           <a:prstGeom prst="rect">
             <a:avLst/>
           </a:prstGeom>
           <a:solidFill>
-            <a:srgbClr val="EFE0F4"/>
+            <a:srgbClr val="F7EFFA"/>
           </a:solidFill>
           <a:ln>
             <a:solidFill>
-              <a:srgbClr val="EFE0F4"/>
+              <a:srgbClr val="F7EFFA"/>
             </a:solidFill>
           </a:ln>
         </p:spPr>
@@ -6456,24 +5406,258 @@
       </p:sp>
       <p:sp>
         <p:nvSpPr>
-          <p:cNvPr id="13" name="Rectangle 12"/>
+          <p:cNvPr id="30" name="TextBox 29"/>
+          <p:cNvSpPr txBox="1"/>
+          <p:nvPr/>
+        </p:nvSpPr>
+        <p:spPr>
+          <a:xfrm>
+            <a:off x="731520" y="4041648"/>
+            <a:ext cx="2286000" cy="320040"/>
+          </a:xfrm>
+          <a:prstGeom prst="rect">
+            <a:avLst/>
+          </a:prstGeom>
+          <a:noFill/>
+        </p:spPr>
+        <p:txBody>
+          <a:bodyPr wrap="square" lIns="0" rIns="0" tIns="0" bIns="0" anchor="t">
+            <a:spAutoFit/>
+          </a:bodyPr>
+          <a:lstStyle/>
+          <a:p>
+            <a:pPr algn="l">
+              <a:lnSpc>
+                <a:spcPct val="100000"/>
+              </a:lnSpc>
+              <a:defRPr sz="1300" b="1">
+                <a:solidFill>
+                  <a:srgbClr val="37183E"/>
+                </a:solidFill>
+                <a:latin typeface="Lato"/>
+              </a:defRPr>
+            </a:pPr>
+            <a:r>
+              <a:t>Otimista (75%)</a:t>
+            </a:r>
+          </a:p>
+        </p:txBody>
+      </p:sp>
+      <p:sp>
+        <p:nvSpPr>
+          <p:cNvPr id="31" name="TextBox 30"/>
+          <p:cNvSpPr txBox="1"/>
+          <p:nvPr/>
+        </p:nvSpPr>
+        <p:spPr>
+          <a:xfrm>
+            <a:off x="3108960" y="4041648"/>
+            <a:ext cx="1463040" cy="320040"/>
+          </a:xfrm>
+          <a:prstGeom prst="rect">
+            <a:avLst/>
+          </a:prstGeom>
+          <a:noFill/>
+        </p:spPr>
+        <p:txBody>
+          <a:bodyPr wrap="square" lIns="0" rIns="0" tIns="0" bIns="0" anchor="t">
+            <a:spAutoFit/>
+          </a:bodyPr>
+          <a:lstStyle/>
+          <a:p>
+            <a:pPr algn="l">
+              <a:lnSpc>
+                <a:spcPct val="100000"/>
+              </a:lnSpc>
+              <a:defRPr sz="1250" b="0">
+                <a:solidFill>
+                  <a:srgbClr val="5D5860"/>
+                </a:solidFill>
+                <a:latin typeface="Lato"/>
+              </a:defRPr>
+            </a:pPr>
+            <a:r>
+              <a:t>48.789 un.</a:t>
+            </a:r>
+          </a:p>
+        </p:txBody>
+      </p:sp>
+      <p:sp>
+        <p:nvSpPr>
+          <p:cNvPr id="32" name="TextBox 31"/>
+          <p:cNvSpPr txBox="1"/>
+          <p:nvPr/>
+        </p:nvSpPr>
+        <p:spPr>
+          <a:xfrm>
+            <a:off x="4663440" y="4041648"/>
+            <a:ext cx="1645920" cy="320040"/>
+          </a:xfrm>
+          <a:prstGeom prst="rect">
+            <a:avLst/>
+          </a:prstGeom>
+          <a:noFill/>
+        </p:spPr>
+        <p:txBody>
+          <a:bodyPr wrap="square" lIns="0" rIns="0" tIns="0" bIns="0" anchor="t">
+            <a:spAutoFit/>
+          </a:bodyPr>
+          <a:lstStyle/>
+          <a:p>
+            <a:pPr algn="l">
+              <a:lnSpc>
+                <a:spcPct val="100000"/>
+              </a:lnSpc>
+              <a:defRPr sz="1250" b="0">
+                <a:solidFill>
+                  <a:srgbClr val="5D5860"/>
+                </a:solidFill>
+                <a:latin typeface="Lato"/>
+              </a:defRPr>
+            </a:pPr>
+            <a:r>
+              <a:t>R$ 7,29M</a:t>
+            </a:r>
+          </a:p>
+        </p:txBody>
+      </p:sp>
+      <p:sp>
+        <p:nvSpPr>
+          <p:cNvPr id="33" name="TextBox 32"/>
+          <p:cNvSpPr txBox="1"/>
+          <p:nvPr/>
+        </p:nvSpPr>
+        <p:spPr>
+          <a:xfrm>
+            <a:off x="6400800" y="4041648"/>
+            <a:ext cx="1737360" cy="320040"/>
+          </a:xfrm>
+          <a:prstGeom prst="rect">
+            <a:avLst/>
+          </a:prstGeom>
+          <a:noFill/>
+        </p:spPr>
+        <p:txBody>
+          <a:bodyPr wrap="square" lIns="0" rIns="0" tIns="0" bIns="0" anchor="t">
+            <a:spAutoFit/>
+          </a:bodyPr>
+          <a:lstStyle/>
+          <a:p>
+            <a:pPr algn="l">
+              <a:lnSpc>
+                <a:spcPct val="100000"/>
+              </a:lnSpc>
+              <a:defRPr sz="1250" b="0">
+                <a:solidFill>
+                  <a:srgbClr val="5D5860"/>
+                </a:solidFill>
+                <a:latin typeface="Lato"/>
+              </a:defRPr>
+            </a:pPr>
+            <a:r>
+              <a:t>−R$ 1,08M</a:t>
+            </a:r>
+          </a:p>
+        </p:txBody>
+      </p:sp>
+      <p:sp>
+        <p:nvSpPr>
+          <p:cNvPr id="34" name="TextBox 33"/>
+          <p:cNvSpPr txBox="1"/>
+          <p:nvPr/>
+        </p:nvSpPr>
+        <p:spPr>
+          <a:xfrm>
+            <a:off x="8229600" y="4023360"/>
+            <a:ext cx="1828800" cy="320040"/>
+          </a:xfrm>
+          <a:prstGeom prst="rect">
+            <a:avLst/>
+          </a:prstGeom>
+          <a:noFill/>
+        </p:spPr>
+        <p:txBody>
+          <a:bodyPr wrap="square" lIns="0" rIns="0" tIns="0" bIns="0" anchor="t">
+            <a:spAutoFit/>
+          </a:bodyPr>
+          <a:lstStyle/>
+          <a:p>
+            <a:pPr algn="l">
+              <a:lnSpc>
+                <a:spcPct val="100000"/>
+              </a:lnSpc>
+              <a:defRPr sz="1400" b="1">
+                <a:solidFill>
+                  <a:srgbClr val="37183E"/>
+                </a:solidFill>
+                <a:latin typeface="Lato"/>
+              </a:defRPr>
+            </a:pPr>
+            <a:r>
+              <a:t>R$ 6,21M</a:t>
+            </a:r>
+          </a:p>
+        </p:txBody>
+      </p:sp>
+      <p:sp>
+        <p:nvSpPr>
+          <p:cNvPr id="35" name="TextBox 34"/>
+          <p:cNvSpPr txBox="1"/>
+          <p:nvPr/>
+        </p:nvSpPr>
+        <p:spPr>
+          <a:xfrm>
+            <a:off x="10149840" y="4041648"/>
+            <a:ext cx="1490472" cy="320040"/>
+          </a:xfrm>
+          <a:prstGeom prst="rect">
+            <a:avLst/>
+          </a:prstGeom>
+          <a:noFill/>
+        </p:spPr>
+        <p:txBody>
+          <a:bodyPr wrap="square" lIns="0" rIns="0" tIns="0" bIns="0" anchor="t">
+            <a:spAutoFit/>
+          </a:bodyPr>
+          <a:lstStyle/>
+          <a:p>
+            <a:pPr algn="l">
+              <a:lnSpc>
+                <a:spcPct val="100000"/>
+              </a:lnSpc>
+              <a:defRPr sz="1250" b="0">
+                <a:solidFill>
+                  <a:srgbClr val="5D5860"/>
+                </a:solidFill>
+                <a:latin typeface="Lato"/>
+              </a:defRPr>
+            </a:pPr>
+            <a:r>
+              <a:t>R$ 1,45M (23,4%)</a:t>
+            </a:r>
+          </a:p>
+        </p:txBody>
+      </p:sp>
+      <p:sp>
+        <p:nvSpPr>
+          <p:cNvPr id="36" name="Rectangle 35"/>
           <p:cNvSpPr/>
           <p:nvPr/>
         </p:nvSpPr>
         <p:spPr>
           <a:xfrm>
-            <a:off x="1627632" y="2578608"/>
-            <a:ext cx="3549395" cy="310896"/>
+            <a:off x="548640" y="4663440"/>
+            <a:ext cx="11091672" cy="713232"/>
           </a:xfrm>
           <a:prstGeom prst="rect">
             <a:avLst/>
           </a:prstGeom>
           <a:solidFill>
-            <a:srgbClr val="561265"/>
+            <a:srgbClr val="F7EFFA"/>
           </a:solidFill>
           <a:ln>
             <a:solidFill>
-              <a:srgbClr val="561265"/>
+              <a:srgbClr val="F7EFFA"/>
             </a:solidFill>
           </a:ln>
         </p:spPr>
@@ -6501,53 +5685,14 @@
       </p:sp>
       <p:sp>
         <p:nvSpPr>
-          <p:cNvPr id="14" name="TextBox 13"/>
+          <p:cNvPr id="37" name="TextBox 36"/>
           <p:cNvSpPr txBox="1"/>
           <p:nvPr/>
         </p:nvSpPr>
         <p:spPr>
           <a:xfrm>
-            <a:off x="5596128" y="2615184"/>
-            <a:ext cx="566928" cy="219456"/>
-          </a:xfrm>
-          <a:prstGeom prst="rect">
-            <a:avLst/>
-          </a:prstGeom>
-          <a:noFill/>
-        </p:spPr>
-        <p:txBody>
-          <a:bodyPr wrap="square" lIns="0" rIns="0" tIns="0" bIns="0" anchor="t">
-            <a:spAutoFit/>
-          </a:bodyPr>
-          <a:lstStyle/>
-          <a:p>
-            <a:pPr algn="r">
-              <a:lnSpc>
-                <a:spcPct val="100000"/>
-              </a:lnSpc>
-              <a:defRPr sz="1150" b="1">
-                <a:solidFill>
-                  <a:srgbClr val="37183E"/>
-                </a:solidFill>
-                <a:latin typeface="Lato"/>
-              </a:defRPr>
-            </a:pPr>
-            <a:r>
-              <a:t>54,8%</a:t>
-            </a:r>
-          </a:p>
-        </p:txBody>
-      </p:sp>
-      <p:sp>
-        <p:nvSpPr>
-          <p:cNvPr id="15" name="TextBox 14"/>
-          <p:cNvSpPr txBox="1"/>
-          <p:nvPr/>
-        </p:nvSpPr>
-        <p:spPr>
-          <a:xfrm>
-            <a:off x="548640" y="3255264"/>
-            <a:ext cx="987552" cy="219456"/>
+            <a:off x="731520" y="4864608"/>
+            <a:ext cx="2286000" cy="320040"/>
           </a:xfrm>
           <a:prstGeom prst="rect">
             <a:avLst/>
@@ -6564,7 +5709,7 @@
               <a:lnSpc>
                 <a:spcPct val="100000"/>
               </a:lnSpc>
-              <a:defRPr sz="1150" b="1">
+              <a:defRPr sz="1300" b="1">
                 <a:solidFill>
                   <a:srgbClr val="37183E"/>
                 </a:solidFill>
@@ -6572,31 +5717,226 @@
               </a:defRPr>
             </a:pPr>
             <a:r>
-              <a:t>20–25%</a:t>
-            </a:r>
-          </a:p>
-        </p:txBody>
-      </p:sp>
-      <p:sp>
-        <p:nvSpPr>
-          <p:cNvPr id="16" name="Rectangle 15"/>
+              <a:t>Liquidação total (100%)</a:t>
+            </a:r>
+          </a:p>
+        </p:txBody>
+      </p:sp>
+      <p:sp>
+        <p:nvSpPr>
+          <p:cNvPr id="38" name="TextBox 37"/>
+          <p:cNvSpPr txBox="1"/>
+          <p:nvPr/>
+        </p:nvSpPr>
+        <p:spPr>
+          <a:xfrm>
+            <a:off x="3108960" y="4864608"/>
+            <a:ext cx="1463040" cy="320040"/>
+          </a:xfrm>
+          <a:prstGeom prst="rect">
+            <a:avLst/>
+          </a:prstGeom>
+          <a:noFill/>
+        </p:spPr>
+        <p:txBody>
+          <a:bodyPr wrap="square" lIns="0" rIns="0" tIns="0" bIns="0" anchor="t">
+            <a:spAutoFit/>
+          </a:bodyPr>
+          <a:lstStyle/>
+          <a:p>
+            <a:pPr algn="l">
+              <a:lnSpc>
+                <a:spcPct val="100000"/>
+              </a:lnSpc>
+              <a:defRPr sz="1250" b="0">
+                <a:solidFill>
+                  <a:srgbClr val="5D5860"/>
+                </a:solidFill>
+                <a:latin typeface="Lato"/>
+              </a:defRPr>
+            </a:pPr>
+            <a:r>
+              <a:t>65.052 un.</a:t>
+            </a:r>
+          </a:p>
+        </p:txBody>
+      </p:sp>
+      <p:sp>
+        <p:nvSpPr>
+          <p:cNvPr id="39" name="TextBox 38"/>
+          <p:cNvSpPr txBox="1"/>
+          <p:nvPr/>
+        </p:nvSpPr>
+        <p:spPr>
+          <a:xfrm>
+            <a:off x="4663440" y="4864608"/>
+            <a:ext cx="1645920" cy="320040"/>
+          </a:xfrm>
+          <a:prstGeom prst="rect">
+            <a:avLst/>
+          </a:prstGeom>
+          <a:noFill/>
+        </p:spPr>
+        <p:txBody>
+          <a:bodyPr wrap="square" lIns="0" rIns="0" tIns="0" bIns="0" anchor="t">
+            <a:spAutoFit/>
+          </a:bodyPr>
+          <a:lstStyle/>
+          <a:p>
+            <a:pPr algn="l">
+              <a:lnSpc>
+                <a:spcPct val="100000"/>
+              </a:lnSpc>
+              <a:defRPr sz="1250" b="0">
+                <a:solidFill>
+                  <a:srgbClr val="5D5860"/>
+                </a:solidFill>
+                <a:latin typeface="Lato"/>
+              </a:defRPr>
+            </a:pPr>
+            <a:r>
+              <a:t>R$ 9,72M</a:t>
+            </a:r>
+          </a:p>
+        </p:txBody>
+      </p:sp>
+      <p:sp>
+        <p:nvSpPr>
+          <p:cNvPr id="40" name="TextBox 39"/>
+          <p:cNvSpPr txBox="1"/>
+          <p:nvPr/>
+        </p:nvSpPr>
+        <p:spPr>
+          <a:xfrm>
+            <a:off x="6400800" y="4864608"/>
+            <a:ext cx="1737360" cy="320040"/>
+          </a:xfrm>
+          <a:prstGeom prst="rect">
+            <a:avLst/>
+          </a:prstGeom>
+          <a:noFill/>
+        </p:spPr>
+        <p:txBody>
+          <a:bodyPr wrap="square" lIns="0" rIns="0" tIns="0" bIns="0" anchor="t">
+            <a:spAutoFit/>
+          </a:bodyPr>
+          <a:lstStyle/>
+          <a:p>
+            <a:pPr algn="l">
+              <a:lnSpc>
+                <a:spcPct val="100000"/>
+              </a:lnSpc>
+              <a:defRPr sz="1250" b="0">
+                <a:solidFill>
+                  <a:srgbClr val="5D5860"/>
+                </a:solidFill>
+                <a:latin typeface="Lato"/>
+              </a:defRPr>
+            </a:pPr>
+            <a:r>
+              <a:t>−R$ 1,44M</a:t>
+            </a:r>
+          </a:p>
+        </p:txBody>
+      </p:sp>
+      <p:sp>
+        <p:nvSpPr>
+          <p:cNvPr id="41" name="TextBox 40"/>
+          <p:cNvSpPr txBox="1"/>
+          <p:nvPr/>
+        </p:nvSpPr>
+        <p:spPr>
+          <a:xfrm>
+            <a:off x="8229600" y="4846320"/>
+            <a:ext cx="1828800" cy="320040"/>
+          </a:xfrm>
+          <a:prstGeom prst="rect">
+            <a:avLst/>
+          </a:prstGeom>
+          <a:noFill/>
+        </p:spPr>
+        <p:txBody>
+          <a:bodyPr wrap="square" lIns="0" rIns="0" tIns="0" bIns="0" anchor="t">
+            <a:spAutoFit/>
+          </a:bodyPr>
+          <a:lstStyle/>
+          <a:p>
+            <a:pPr algn="l">
+              <a:lnSpc>
+                <a:spcPct val="100000"/>
+              </a:lnSpc>
+              <a:defRPr sz="1400" b="1">
+                <a:solidFill>
+                  <a:srgbClr val="37183E"/>
+                </a:solidFill>
+                <a:latin typeface="Lato"/>
+              </a:defRPr>
+            </a:pPr>
+            <a:r>
+              <a:t>R$ 8,28M</a:t>
+            </a:r>
+          </a:p>
+        </p:txBody>
+      </p:sp>
+      <p:sp>
+        <p:nvSpPr>
+          <p:cNvPr id="42" name="TextBox 41"/>
+          <p:cNvSpPr txBox="1"/>
+          <p:nvPr/>
+        </p:nvSpPr>
+        <p:spPr>
+          <a:xfrm>
+            <a:off x="10149840" y="4864608"/>
+            <a:ext cx="1490472" cy="320040"/>
+          </a:xfrm>
+          <a:prstGeom prst="rect">
+            <a:avLst/>
+          </a:prstGeom>
+          <a:noFill/>
+        </p:spPr>
+        <p:txBody>
+          <a:bodyPr wrap="square" lIns="0" rIns="0" tIns="0" bIns="0" anchor="t">
+            <a:spAutoFit/>
+          </a:bodyPr>
+          <a:lstStyle/>
+          <a:p>
+            <a:pPr algn="l">
+              <a:lnSpc>
+                <a:spcPct val="100000"/>
+              </a:lnSpc>
+              <a:defRPr sz="1250" b="0">
+                <a:solidFill>
+                  <a:srgbClr val="5D5860"/>
+                </a:solidFill>
+                <a:latin typeface="Lato"/>
+              </a:defRPr>
+            </a:pPr>
+            <a:r>
+              <a:t>R$ 1,94M (23,4%)</a:t>
+            </a:r>
+          </a:p>
+        </p:txBody>
+      </p:sp>
+      <p:sp>
+        <p:nvSpPr>
+          <p:cNvPr id="43" name="Rectangle 42"/>
           <p:cNvSpPr/>
           <p:nvPr/>
         </p:nvSpPr>
         <p:spPr>
           <a:xfrm>
-            <a:off x="1627632" y="3200400"/>
-            <a:ext cx="3886200" cy="310896"/>
+            <a:off x="548640" y="5303520"/>
+            <a:ext cx="11091672" cy="777240"/>
           </a:xfrm>
           <a:prstGeom prst="rect">
             <a:avLst/>
           </a:prstGeom>
           <a:solidFill>
-            <a:srgbClr val="EFE0F4"/>
+            <a:srgbClr val="FFFFFF"/>
           </a:solidFill>
           <a:ln>
             <a:solidFill>
-              <a:srgbClr val="EFE0F4"/>
+              <a:srgbClr val="DEC6E4"/>
             </a:solidFill>
           </a:ln>
         </p:spPr>
@@ -6624,98 +5964,14 @@
       </p:sp>
       <p:sp>
         <p:nvSpPr>
-          <p:cNvPr id="17" name="Rectangle 16"/>
-          <p:cNvSpPr/>
-          <p:nvPr/>
-        </p:nvSpPr>
-        <p:spPr>
-          <a:xfrm>
-            <a:off x="1627632" y="3200400"/>
-            <a:ext cx="2940558" cy="310896"/>
-          </a:xfrm>
-          <a:prstGeom prst="rect">
-            <a:avLst/>
-          </a:prstGeom>
-          <a:solidFill>
-            <a:srgbClr val="561265"/>
-          </a:solidFill>
-          <a:ln>
-            <a:solidFill>
-              <a:srgbClr val="561265"/>
-            </a:solidFill>
-          </a:ln>
-        </p:spPr>
-        <p:style>
-          <a:lnRef idx="1">
-            <a:schemeClr val="accent1"/>
-          </a:lnRef>
-          <a:fillRef idx="3">
-            <a:schemeClr val="accent1"/>
-          </a:fillRef>
-          <a:effectRef idx="2">
-            <a:schemeClr val="accent1"/>
-          </a:effectRef>
-          <a:fontRef idx="minor">
-            <a:schemeClr val="lt1"/>
-          </a:fontRef>
-        </p:style>
-        <p:txBody>
-          <a:bodyPr rtlCol="0" anchor="ctr"/>
-          <a:lstStyle/>
-          <a:p>
-            <a:pPr algn="ctr"/>
-          </a:p>
-        </p:txBody>
-      </p:sp>
-      <p:sp>
-        <p:nvSpPr>
-          <p:cNvPr id="18" name="TextBox 17"/>
+          <p:cNvPr id="44" name="TextBox 43"/>
           <p:cNvSpPr txBox="1"/>
           <p:nvPr/>
         </p:nvSpPr>
         <p:spPr>
           <a:xfrm>
-            <a:off x="5596128" y="3236976"/>
-            <a:ext cx="566928" cy="219456"/>
-          </a:xfrm>
-          <a:prstGeom prst="rect">
-            <a:avLst/>
-          </a:prstGeom>
-          <a:noFill/>
-        </p:spPr>
-        <p:txBody>
-          <a:bodyPr wrap="square" lIns="0" rIns="0" tIns="0" bIns="0" anchor="t">
-            <a:spAutoFit/>
-          </a:bodyPr>
-          <a:lstStyle/>
-          <a:p>
-            <a:pPr algn="r">
-              <a:lnSpc>
-                <a:spcPct val="100000"/>
-              </a:lnSpc>
-              <a:defRPr sz="1150" b="1">
-                <a:solidFill>
-                  <a:srgbClr val="37183E"/>
-                </a:solidFill>
-                <a:latin typeface="Lato"/>
-              </a:defRPr>
-            </a:pPr>
-            <a:r>
-              <a:t>45,4%</a:t>
-            </a:r>
-          </a:p>
-        </p:txBody>
-      </p:sp>
-      <p:sp>
-        <p:nvSpPr>
-          <p:cNvPr id="19" name="TextBox 18"/>
-          <p:cNvSpPr txBox="1"/>
-          <p:nvPr/>
-        </p:nvSpPr>
-        <p:spPr>
-          <a:xfrm>
-            <a:off x="548640" y="3877056"/>
-            <a:ext cx="987552" cy="219456"/>
+            <a:off x="731520" y="5413248"/>
+            <a:ext cx="10515600" cy="182880"/>
           </a:xfrm>
           <a:prstGeom prst="rect">
             <a:avLst/>
@@ -6732,119 +5988,29 @@
               <a:lnSpc>
                 <a:spcPct val="100000"/>
               </a:lnSpc>
-              <a:defRPr sz="1150" b="1">
-                <a:solidFill>
-                  <a:srgbClr val="37183E"/>
+              <a:defRPr sz="900" b="1">
+                <a:solidFill>
+                  <a:srgbClr val="E000D2"/>
                 </a:solidFill>
                 <a:latin typeface="Lato"/>
               </a:defRPr>
             </a:pPr>
             <a:r>
-              <a:t>35–40%</a:t>
-            </a:r>
-          </a:p>
-        </p:txBody>
-      </p:sp>
-      <p:sp>
-        <p:nvSpPr>
-          <p:cNvPr id="20" name="Rectangle 19"/>
-          <p:cNvSpPr/>
-          <p:nvPr/>
-        </p:nvSpPr>
-        <p:spPr>
-          <a:xfrm>
-            <a:off x="1627632" y="3822192"/>
-            <a:ext cx="3886200" cy="310896"/>
-          </a:xfrm>
-          <a:prstGeom prst="rect">
-            <a:avLst/>
-          </a:prstGeom>
-          <a:solidFill>
-            <a:srgbClr val="EFE0F4"/>
-          </a:solidFill>
-          <a:ln>
-            <a:solidFill>
-              <a:srgbClr val="EFE0F4"/>
-            </a:solidFill>
-          </a:ln>
-        </p:spPr>
-        <p:style>
-          <a:lnRef idx="1">
-            <a:schemeClr val="accent1"/>
-          </a:lnRef>
-          <a:fillRef idx="3">
-            <a:schemeClr val="accent1"/>
-          </a:fillRef>
-          <a:effectRef idx="2">
-            <a:schemeClr val="accent1"/>
-          </a:effectRef>
-          <a:fontRef idx="minor">
-            <a:schemeClr val="lt1"/>
-          </a:fontRef>
-        </p:style>
-        <p:txBody>
-          <a:bodyPr rtlCol="0" anchor="ctr"/>
-          <a:lstStyle/>
-          <a:p>
-            <a:pPr algn="ctr"/>
-          </a:p>
-        </p:txBody>
-      </p:sp>
-      <p:sp>
-        <p:nvSpPr>
-          <p:cNvPr id="21" name="Rectangle 20"/>
-          <p:cNvSpPr/>
-          <p:nvPr/>
-        </p:nvSpPr>
-        <p:spPr>
-          <a:xfrm>
-            <a:off x="1627632" y="3822192"/>
-            <a:ext cx="2085594" cy="310896"/>
-          </a:xfrm>
-          <a:prstGeom prst="rect">
-            <a:avLst/>
-          </a:prstGeom>
-          <a:solidFill>
-            <a:srgbClr val="561265"/>
-          </a:solidFill>
-          <a:ln>
-            <a:solidFill>
-              <a:srgbClr val="561265"/>
-            </a:solidFill>
-          </a:ln>
-        </p:spPr>
-        <p:style>
-          <a:lnRef idx="1">
-            <a:schemeClr val="accent1"/>
-          </a:lnRef>
-          <a:fillRef idx="3">
-            <a:schemeClr val="accent1"/>
-          </a:fillRef>
-          <a:effectRef idx="2">
-            <a:schemeClr val="accent1"/>
-          </a:effectRef>
-          <a:fontRef idx="minor">
-            <a:schemeClr val="lt1"/>
-          </a:fontRef>
-        </p:style>
-        <p:txBody>
-          <a:bodyPr rtlCol="0" anchor="ctr"/>
-          <a:lstStyle/>
-          <a:p>
-            <a:pPr algn="ctr"/>
-          </a:p>
-        </p:txBody>
-      </p:sp>
-      <p:sp>
-        <p:nvSpPr>
-          <p:cNvPr id="22" name="TextBox 21"/>
+              <a:t>CRITÉRIOS DE AUDITORIA &amp; METODOLOGIA</a:t>
+            </a:r>
+          </a:p>
+        </p:txBody>
+      </p:sp>
+      <p:sp>
+        <p:nvSpPr>
+          <p:cNvPr id="45" name="TextBox 44"/>
           <p:cNvSpPr txBox="1"/>
           <p:nvPr/>
         </p:nvSpPr>
         <p:spPr>
           <a:xfrm>
-            <a:off x="5596128" y="3858768"/>
-            <a:ext cx="566928" cy="219456"/>
+            <a:off x="731520" y="5596128"/>
+            <a:ext cx="10515600" cy="411480"/>
           </a:xfrm>
           <a:prstGeom prst="rect">
             <a:avLst/>
@@ -6857,506 +6023,30 @@
           </a:bodyPr>
           <a:lstStyle/>
           <a:p>
-            <a:pPr algn="r">
-              <a:lnSpc>
-                <a:spcPct val="100000"/>
-              </a:lnSpc>
-              <a:defRPr sz="1150" b="1">
-                <a:solidFill>
-                  <a:srgbClr val="37183E"/>
-                </a:solidFill>
-                <a:latin typeface="Lato"/>
-              </a:defRPr>
-            </a:pPr>
-            <a:r>
-              <a:t>32,2%</a:t>
-            </a:r>
-          </a:p>
-        </p:txBody>
-      </p:sp>
-      <p:sp>
-        <p:nvSpPr>
-          <p:cNvPr id="23" name="Rectangle 22"/>
-          <p:cNvSpPr/>
-          <p:nvPr/>
-        </p:nvSpPr>
-        <p:spPr>
-          <a:xfrm>
-            <a:off x="6446520" y="1554480"/>
-            <a:ext cx="5193792" cy="3182112"/>
-          </a:xfrm>
-          <a:prstGeom prst="rect">
-            <a:avLst/>
-          </a:prstGeom>
-          <a:solidFill>
-            <a:srgbClr val="F7EFFA"/>
-          </a:solidFill>
-          <a:ln>
-            <a:solidFill>
-              <a:srgbClr val="F7EFFA"/>
-            </a:solidFill>
-          </a:ln>
-        </p:spPr>
-        <p:style>
-          <a:lnRef idx="1">
-            <a:schemeClr val="accent1"/>
-          </a:lnRef>
-          <a:fillRef idx="3">
-            <a:schemeClr val="accent1"/>
-          </a:fillRef>
-          <a:effectRef idx="2">
-            <a:schemeClr val="accent1"/>
-          </a:effectRef>
-          <a:fontRef idx="minor">
-            <a:schemeClr val="lt1"/>
-          </a:fontRef>
-        </p:style>
-        <p:txBody>
-          <a:bodyPr rtlCol="0" anchor="ctr"/>
-          <a:lstStyle/>
-          <a:p>
-            <a:pPr algn="ctr"/>
-          </a:p>
-        </p:txBody>
-      </p:sp>
-      <p:sp>
-        <p:nvSpPr>
-          <p:cNvPr id="24" name="TextBox 23"/>
-          <p:cNvSpPr txBox="1"/>
-          <p:nvPr/>
-        </p:nvSpPr>
-        <p:spPr>
-          <a:xfrm>
-            <a:off x="6766560" y="1847088"/>
-            <a:ext cx="4389120" cy="219456"/>
-          </a:xfrm>
-          <a:prstGeom prst="rect">
-            <a:avLst/>
-          </a:prstGeom>
-          <a:noFill/>
-        </p:spPr>
-        <p:txBody>
-          <a:bodyPr wrap="square" lIns="0" rIns="0" tIns="0" bIns="0" anchor="t">
-            <a:spAutoFit/>
-          </a:bodyPr>
-          <a:lstStyle/>
-          <a:p>
             <a:pPr algn="l">
               <a:lnSpc>
-                <a:spcPct val="100000"/>
-              </a:lnSpc>
-              <a:defRPr sz="950" b="1">
-                <a:solidFill>
-                  <a:srgbClr val="E000D2"/>
-                </a:solidFill>
-                <a:latin typeface="Lato"/>
-              </a:defRPr>
-            </a:pPr>
-            <a:r>
-              <a:t>O QUE A BASE SUSTENTA</a:t>
-            </a:r>
-          </a:p>
-        </p:txBody>
-      </p:sp>
-      <p:sp>
-        <p:nvSpPr>
-          <p:cNvPr id="25" name="TextBox 24"/>
-          <p:cNvSpPr txBox="1"/>
-          <p:nvPr/>
-        </p:nvSpPr>
-        <p:spPr>
-          <a:xfrm>
-            <a:off x="6766560" y="2221992"/>
-            <a:ext cx="1572768" cy="292608"/>
-          </a:xfrm>
-          <a:prstGeom prst="rect">
-            <a:avLst/>
-          </a:prstGeom>
-          <a:noFill/>
-        </p:spPr>
-        <p:txBody>
-          <a:bodyPr wrap="square" lIns="0" rIns="0" tIns="0" bIns="0" anchor="t">
-            <a:spAutoFit/>
-          </a:bodyPr>
-          <a:lstStyle/>
-          <a:p>
-            <a:pPr algn="l">
-              <a:lnSpc>
-                <a:spcPct val="100000"/>
-              </a:lnSpc>
-              <a:defRPr sz="1800" b="1">
-                <a:solidFill>
-                  <a:srgbClr val="37183E"/>
-                </a:solidFill>
-                <a:latin typeface="Lato"/>
-              </a:defRPr>
-            </a:pPr>
-            <a:r>
-              <a:t>3,51 un.</a:t>
-            </a:r>
-          </a:p>
-        </p:txBody>
-      </p:sp>
-      <p:sp>
-        <p:nvSpPr>
-          <p:cNvPr id="26" name="TextBox 25"/>
-          <p:cNvSpPr txBox="1"/>
-          <p:nvPr/>
-        </p:nvSpPr>
-        <p:spPr>
-          <a:xfrm>
-            <a:off x="8385048" y="2249424"/>
-            <a:ext cx="2852928" cy="274320"/>
-          </a:xfrm>
-          <a:prstGeom prst="rect">
-            <a:avLst/>
-          </a:prstGeom>
-          <a:noFill/>
-        </p:spPr>
-        <p:txBody>
-          <a:bodyPr wrap="square" lIns="0" rIns="0" tIns="0" bIns="0" anchor="t">
-            <a:spAutoFit/>
-          </a:bodyPr>
-          <a:lstStyle/>
-          <a:p>
-            <a:pPr algn="l">
-              <a:lnSpc>
-                <a:spcPct val="100000"/>
-              </a:lnSpc>
-              <a:defRPr sz="1150" b="0">
-                <a:solidFill>
-                  <a:srgbClr val="5D5860"/>
-                </a:solidFill>
-                <a:latin typeface="Lato"/>
-              </a:defRPr>
-            </a:pPr>
-            <a:r>
-              <a:t>por pedido, com ou sem desconto</a:t>
-            </a:r>
-          </a:p>
-        </p:txBody>
-      </p:sp>
-      <p:sp>
-        <p:nvSpPr>
-          <p:cNvPr id="27" name="TextBox 26"/>
-          <p:cNvSpPr txBox="1"/>
-          <p:nvPr/>
-        </p:nvSpPr>
-        <p:spPr>
-          <a:xfrm>
-            <a:off x="6766560" y="2880360"/>
-            <a:ext cx="1572768" cy="292608"/>
-          </a:xfrm>
-          <a:prstGeom prst="rect">
-            <a:avLst/>
-          </a:prstGeom>
-          <a:noFill/>
-        </p:spPr>
-        <p:txBody>
-          <a:bodyPr wrap="square" lIns="0" rIns="0" tIns="0" bIns="0" anchor="t">
-            <a:spAutoFit/>
-          </a:bodyPr>
-          <a:lstStyle/>
-          <a:p>
-            <a:pPr algn="l">
-              <a:lnSpc>
-                <a:spcPct val="100000"/>
-              </a:lnSpc>
-              <a:defRPr sz="1800" b="1">
-                <a:solidFill>
-                  <a:srgbClr val="37183E"/>
-                </a:solidFill>
-                <a:latin typeface="Lato"/>
-              </a:defRPr>
-            </a:pPr>
-            <a:r>
-              <a:t>−0,026 un.</a:t>
-            </a:r>
-          </a:p>
-        </p:txBody>
-      </p:sp>
-      <p:sp>
-        <p:nvSpPr>
-          <p:cNvPr id="28" name="TextBox 27"/>
-          <p:cNvSpPr txBox="1"/>
-          <p:nvPr/>
-        </p:nvSpPr>
-        <p:spPr>
-          <a:xfrm>
-            <a:off x="8385048" y="2907792"/>
-            <a:ext cx="2852928" cy="274320"/>
-          </a:xfrm>
-          <a:prstGeom prst="rect">
-            <a:avLst/>
-          </a:prstGeom>
-          <a:noFill/>
-        </p:spPr>
-        <p:txBody>
-          <a:bodyPr wrap="square" lIns="0" rIns="0" tIns="0" bIns="0" anchor="t">
-            <a:spAutoFit/>
-          </a:bodyPr>
-          <a:lstStyle/>
-          <a:p>
-            <a:pPr algn="l">
-              <a:lnSpc>
-                <a:spcPct val="100000"/>
-              </a:lnSpc>
-              <a:defRPr sz="1150" b="0">
-                <a:solidFill>
-                  <a:srgbClr val="5D5860"/>
-                </a:solidFill>
-                <a:latin typeface="Lato"/>
-              </a:defRPr>
-            </a:pPr>
-            <a:r>
-              <a:t>diferença within-SKU ponderada</a:t>
-            </a:r>
-          </a:p>
-        </p:txBody>
-      </p:sp>
-      <p:sp>
-        <p:nvSpPr>
-          <p:cNvPr id="29" name="TextBox 28"/>
-          <p:cNvSpPr txBox="1"/>
-          <p:nvPr/>
-        </p:nvSpPr>
-        <p:spPr>
-          <a:xfrm>
-            <a:off x="6766560" y="3538728"/>
-            <a:ext cx="1572768" cy="292608"/>
-          </a:xfrm>
-          <a:prstGeom prst="rect">
-            <a:avLst/>
-          </a:prstGeom>
-          <a:noFill/>
-        </p:spPr>
-        <p:txBody>
-          <a:bodyPr wrap="square" lIns="0" rIns="0" tIns="0" bIns="0" anchor="t">
-            <a:spAutoFit/>
-          </a:bodyPr>
-          <a:lstStyle/>
-          <a:p>
-            <a:pPr algn="l">
-              <a:lnSpc>
-                <a:spcPct val="100000"/>
-              </a:lnSpc>
-              <a:defRPr sz="1800" b="1">
-                <a:solidFill>
-                  <a:srgbClr val="37183E"/>
-                </a:solidFill>
-                <a:latin typeface="Lato"/>
-              </a:defRPr>
-            </a:pPr>
-            <a:r>
-              <a:t>R$ 579 mil</a:t>
-            </a:r>
-          </a:p>
-        </p:txBody>
-      </p:sp>
-      <p:sp>
-        <p:nvSpPr>
-          <p:cNvPr id="30" name="TextBox 29"/>
-          <p:cNvSpPr txBox="1"/>
-          <p:nvPr/>
-        </p:nvSpPr>
-        <p:spPr>
-          <a:xfrm>
-            <a:off x="8385048" y="3566160"/>
-            <a:ext cx="2852928" cy="274320"/>
-          </a:xfrm>
-          <a:prstGeom prst="rect">
-            <a:avLst/>
-          </a:prstGeom>
-          <a:noFill/>
-        </p:spPr>
-        <p:txBody>
-          <a:bodyPr wrap="square" lIns="0" rIns="0" tIns="0" bIns="0" anchor="t">
-            <a:spAutoFit/>
-          </a:bodyPr>
-          <a:lstStyle/>
-          <a:p>
-            <a:pPr algn="l">
-              <a:lnSpc>
-                <a:spcPct val="100000"/>
-              </a:lnSpc>
-              <a:defRPr sz="1150" b="0">
-                <a:solidFill>
-                  <a:srgbClr val="5D5860"/>
-                </a:solidFill>
-                <a:latin typeface="Lato"/>
-              </a:defRPr>
-            </a:pPr>
-            <a:r>
-              <a:t>teto mecânico de 15% nas aprovadas</a:t>
-            </a:r>
-          </a:p>
-        </p:txBody>
-      </p:sp>
-      <p:sp>
-        <p:nvSpPr>
-          <p:cNvPr id="31" name="TextBox 30"/>
-          <p:cNvSpPr txBox="1"/>
-          <p:nvPr/>
-        </p:nvSpPr>
-        <p:spPr>
-          <a:xfrm>
-            <a:off x="6766560" y="4224528"/>
-            <a:ext cx="4370832" cy="384048"/>
-          </a:xfrm>
-          <a:prstGeom prst="rect">
-            <a:avLst/>
-          </a:prstGeom>
-          <a:noFill/>
-        </p:spPr>
-        <p:txBody>
-          <a:bodyPr wrap="square" lIns="0" rIns="0" tIns="0" bIns="0" anchor="t">
-            <a:spAutoFit/>
-          </a:bodyPr>
-          <a:lstStyle/>
-          <a:p>
-            <a:pPr algn="l">
-              <a:lnSpc>
-                <a:spcPct val="100000"/>
+                <a:spcPct val="115000"/>
               </a:lnSpc>
               <a:defRPr sz="1050" b="0">
                 <a:solidFill>
-                  <a:srgbClr val="827B85"/>
+                  <a:srgbClr val="5D5860"/>
                 </a:solidFill>
                 <a:latin typeface="Lato"/>
               </a:defRPr>
             </a:pPr>
             <a:r>
-              <a:t>O valor de R$ 579 mil é limite aritmético no período observado; não inclui reação de demanda.</a:t>
-            </a:r>
-          </a:p>
-        </p:txBody>
-      </p:sp>
-      <p:sp>
-        <p:nvSpPr>
-          <p:cNvPr id="32" name="Rectangle 31"/>
-          <p:cNvSpPr/>
-          <p:nvPr/>
-        </p:nvSpPr>
-        <p:spPr>
-          <a:xfrm>
-            <a:off x="548640" y="5074920"/>
-            <a:ext cx="11091672" cy="832104"/>
-          </a:xfrm>
-          <a:prstGeom prst="rect">
-            <a:avLst/>
-          </a:prstGeom>
-          <a:solidFill>
-            <a:srgbClr val="561265"/>
-          </a:solidFill>
-          <a:ln>
-            <a:solidFill>
-              <a:srgbClr val="561265"/>
-            </a:solidFill>
-          </a:ln>
-        </p:spPr>
-        <p:style>
-          <a:lnRef idx="1">
-            <a:schemeClr val="accent1"/>
-          </a:lnRef>
-          <a:fillRef idx="3">
-            <a:schemeClr val="accent1"/>
-          </a:fillRef>
-          <a:effectRef idx="2">
-            <a:schemeClr val="accent1"/>
-          </a:effectRef>
-          <a:fontRef idx="minor">
-            <a:schemeClr val="lt1"/>
-          </a:fontRef>
-        </p:style>
-        <p:txBody>
-          <a:bodyPr rtlCol="0" anchor="ctr"/>
-          <a:lstStyle/>
-          <a:p>
-            <a:pPr algn="ctr"/>
-          </a:p>
-        </p:txBody>
-      </p:sp>
-      <p:sp>
-        <p:nvSpPr>
-          <p:cNvPr id="33" name="TextBox 32"/>
-          <p:cNvSpPr txBox="1"/>
-          <p:nvPr/>
-        </p:nvSpPr>
-        <p:spPr>
-          <a:xfrm>
-            <a:off x="804672" y="5321808"/>
-            <a:ext cx="932688" cy="219456"/>
-          </a:xfrm>
-          <a:prstGeom prst="rect">
-            <a:avLst/>
-          </a:prstGeom>
-          <a:noFill/>
-        </p:spPr>
-        <p:txBody>
-          <a:bodyPr wrap="square" lIns="0" rIns="0" tIns="0" bIns="0" anchor="t">
-            <a:spAutoFit/>
-          </a:bodyPr>
-          <a:lstStyle/>
-          <a:p>
-            <a:pPr algn="l">
-              <a:lnSpc>
-                <a:spcPct val="100000"/>
-              </a:lnSpc>
-              <a:defRPr sz="1000" b="1">
-                <a:solidFill>
-                  <a:srgbClr val="E000D2"/>
-                </a:solidFill>
-                <a:latin typeface="Lato"/>
-              </a:defRPr>
-            </a:pPr>
-            <a:r>
-              <a:t>DECISÃO</a:t>
-            </a:r>
-          </a:p>
-        </p:txBody>
-      </p:sp>
-      <p:sp>
-        <p:nvSpPr>
-          <p:cNvPr id="34" name="TextBox 33"/>
-          <p:cNvSpPr txBox="1"/>
-          <p:nvPr/>
-        </p:nvSpPr>
-        <p:spPr>
-          <a:xfrm>
-            <a:off x="1691640" y="5257800"/>
-            <a:ext cx="9491472" cy="365760"/>
-          </a:xfrm>
-          <a:prstGeom prst="rect">
-            <a:avLst/>
-          </a:prstGeom>
-          <a:noFill/>
-        </p:spPr>
-        <p:txBody>
-          <a:bodyPr wrap="square" lIns="0" rIns="0" tIns="0" bIns="0" anchor="t">
-            <a:spAutoFit/>
-          </a:bodyPr>
-          <a:lstStyle/>
-          <a:p>
-            <a:pPr algn="l">
-              <a:lnSpc>
-                <a:spcPct val="100000"/>
-              </a:lnSpc>
-              <a:defRPr sz="1350" b="1">
-                <a:solidFill>
-                  <a:srgbClr val="FFFFFF"/>
-                </a:solidFill>
-                <a:latin typeface="Lato"/>
-              </a:defRPr>
-            </a:pPr>
-            <a:r>
-              <a:t>Pilotar teto por SKU com grupo de controle; reconhecer benefício financeiro somente após medir elasticidade.</a:t>
+              <a:t>1. Preço de venda simulado com 30% de desconto sobre o valor médio praticado no histórico de Vendas.</a:t>
+            </a:r>
+            <a:br/>
+            <a:r>
+              <a:t>2. Devoluções calculadas pela taxa histórica por categoria (14,88% média ponderada). A receita é destravamento pontual de caixa (giro de ativo), não recorrente.</a:t>
             </a:r>
           </a:p>
         </p:txBody>
       </p:sp>
       <p:cxnSp>
         <p:nvCxnSpPr>
-          <p:cNvPr id="35" name="Connector 34"/>
+          <p:cNvPr id="46" name="Connector 45"/>
           <p:cNvCxnSpPr/>
           <p:nvPr/>
         </p:nvCxnSpPr>
@@ -7391,7 +6081,46 @@
       </p:cxnSp>
       <p:sp>
         <p:nvSpPr>
-          <p:cNvPr id="36" name="TextBox 35"/>
+          <p:cNvPr id="47" name="TextBox 46"/>
+          <p:cNvSpPr txBox="1"/>
+          <p:nvPr/>
+        </p:nvSpPr>
+        <p:spPr>
+          <a:xfrm>
+            <a:off x="548640" y="6419088"/>
+            <a:ext cx="7315200" cy="201168"/>
+          </a:xfrm>
+          <a:prstGeom prst="rect">
+            <a:avLst/>
+          </a:prstGeom>
+          <a:noFill/>
+        </p:spPr>
+        <p:txBody>
+          <a:bodyPr wrap="square" lIns="0" rIns="0" tIns="0" bIns="0" anchor="t">
+            <a:spAutoFit/>
+          </a:bodyPr>
+          <a:lstStyle/>
+          <a:p>
+            <a:pPr algn="l">
+              <a:lnSpc>
+                <a:spcPct val="100000"/>
+              </a:lnSpc>
+              <a:defRPr sz="950" b="0">
+                <a:solidFill>
+                  <a:srgbClr val="827B85"/>
+                </a:solidFill>
+                <a:latin typeface="Lato"/>
+              </a:defRPr>
+            </a:pPr>
+            <a:r>
+              <a:t>Fonte: case Vértice • Bootcamp EloGroup 2026 • Grupo 14</a:t>
+            </a:r>
+          </a:p>
+        </p:txBody>
+      </p:sp>
+      <p:sp>
+        <p:nvSpPr>
+          <p:cNvPr id="48" name="TextBox 47"/>
           <p:cNvSpPr txBox="1"/>
           <p:nvPr/>
         </p:nvSpPr>
@@ -7423,1137 +6152,7 @@
               </a:defRPr>
             </a:pPr>
             <a:r>
-              <a:t>A3</a:t>
-            </a:r>
-          </a:p>
-        </p:txBody>
-      </p:sp>
-    </p:spTree>
-  </p:cSld>
-  <p:clrMapOvr>
-    <a:masterClrMapping/>
-  </p:clrMapOvr>
-</p:sld>
-</file>
-
-<file path=ppt/slides/slide4.xml><?xml version="1.0" encoding="utf-8"?>
-<p:sld xmlns:a="http://schemas.openxmlformats.org/drawingml/2006/main" xmlns:p="http://schemas.openxmlformats.org/presentationml/2006/main" xmlns:r="http://schemas.openxmlformats.org/officeDocument/2006/relationships">
-  <p:cSld>
-    <p:bg>
-      <p:bgPr>
-        <a:solidFill>
-          <a:srgbClr val="FFFFFF"/>
-        </a:solidFill>
-        <a:effectLst/>
-      </p:bgPr>
-    </p:bg>
-    <p:spTree>
-      <p:nvGrpSpPr>
-        <p:cNvPr id="1" name=""/>
-        <p:cNvGrpSpPr/>
-        <p:nvPr/>
-      </p:nvGrpSpPr>
-      <p:grpSpPr/>
-      <p:sp>
-        <p:nvSpPr>
-          <p:cNvPr id="2" name="Rectangle 1"/>
-          <p:cNvSpPr/>
-          <p:nvPr/>
-        </p:nvSpPr>
-        <p:spPr>
-          <a:xfrm>
-            <a:off x="548640" y="356616"/>
-            <a:ext cx="256032" cy="50292"/>
-          </a:xfrm>
-          <a:prstGeom prst="rect">
-            <a:avLst/>
-          </a:prstGeom>
-          <a:solidFill>
-            <a:srgbClr val="E000D2"/>
-          </a:solidFill>
-          <a:ln>
-            <a:solidFill>
-              <a:srgbClr val="E000D2"/>
-            </a:solidFill>
-          </a:ln>
-        </p:spPr>
-        <p:style>
-          <a:lnRef idx="1">
-            <a:schemeClr val="accent1"/>
-          </a:lnRef>
-          <a:fillRef idx="3">
-            <a:schemeClr val="accent1"/>
-          </a:fillRef>
-          <a:effectRef idx="2">
-            <a:schemeClr val="accent1"/>
-          </a:effectRef>
-          <a:fontRef idx="minor">
-            <a:schemeClr val="lt1"/>
-          </a:fontRef>
-        </p:style>
-        <p:txBody>
-          <a:bodyPr rtlCol="0" anchor="ctr"/>
-          <a:lstStyle/>
-          <a:p>
-            <a:pPr algn="ctr"/>
-          </a:p>
-        </p:txBody>
-      </p:sp>
-      <p:sp>
-        <p:nvSpPr>
-          <p:cNvPr id="3" name="TextBox 2"/>
-          <p:cNvSpPr txBox="1"/>
-          <p:nvPr/>
-        </p:nvSpPr>
-        <p:spPr>
-          <a:xfrm>
-            <a:off x="914400" y="246888"/>
-            <a:ext cx="6766560" cy="256032"/>
-          </a:xfrm>
-          <a:prstGeom prst="rect">
-            <a:avLst/>
-          </a:prstGeom>
-          <a:noFill/>
-        </p:spPr>
-        <p:txBody>
-          <a:bodyPr wrap="square" lIns="0" rIns="0" tIns="0" bIns="0" anchor="t">
-            <a:spAutoFit/>
-          </a:bodyPr>
-          <a:lstStyle/>
-          <a:p>
-            <a:pPr algn="l">
-              <a:lnSpc>
-                <a:spcPct val="100000"/>
-              </a:lnSpc>
-              <a:defRPr sz="1050" b="1">
-                <a:solidFill>
-                  <a:srgbClr val="561265"/>
-                </a:solidFill>
-                <a:latin typeface="Lato"/>
-              </a:defRPr>
-            </a:pPr>
-            <a:r>
-              <a:t>A4 / POR QUE SEQUENCIAR</a:t>
-            </a:r>
-          </a:p>
-        </p:txBody>
-      </p:sp>
-      <p:sp>
-        <p:nvSpPr>
-          <p:cNvPr id="4" name="TextBox 3"/>
-          <p:cNvSpPr txBox="1"/>
-          <p:nvPr/>
-        </p:nvSpPr>
-        <p:spPr>
-          <a:xfrm>
-            <a:off x="10771632" y="246888"/>
-            <a:ext cx="868680" cy="256032"/>
-          </a:xfrm>
-          <a:prstGeom prst="rect">
-            <a:avLst/>
-          </a:prstGeom>
-          <a:noFill/>
-        </p:spPr>
-        <p:txBody>
-          <a:bodyPr wrap="square" lIns="0" rIns="0" tIns="0" bIns="0" anchor="t">
-            <a:spAutoFit/>
-          </a:bodyPr>
-          <a:lstStyle/>
-          <a:p>
-            <a:pPr algn="r">
-              <a:lnSpc>
-                <a:spcPct val="100000"/>
-              </a:lnSpc>
-              <a:defRPr sz="1050" b="1">
-                <a:solidFill>
-                  <a:srgbClr val="37183E"/>
-                </a:solidFill>
-                <a:latin typeface="Lato"/>
-              </a:defRPr>
-            </a:pPr>
-            <a:r>
-              <a:t>VÉRTICE</a:t>
-            </a:r>
-          </a:p>
-        </p:txBody>
-      </p:sp>
-      <p:sp>
-        <p:nvSpPr>
-          <p:cNvPr id="5" name="TextBox 4"/>
-          <p:cNvSpPr txBox="1"/>
-          <p:nvPr/>
-        </p:nvSpPr>
-        <p:spPr>
-          <a:xfrm>
-            <a:off x="548640" y="749808"/>
-            <a:ext cx="10972800" cy="713232"/>
-          </a:xfrm>
-          <a:prstGeom prst="rect">
-            <a:avLst/>
-          </a:prstGeom>
-          <a:noFill/>
-        </p:spPr>
-        <p:txBody>
-          <a:bodyPr wrap="square" lIns="0" rIns="0" tIns="0" bIns="0" anchor="t">
-            <a:spAutoFit/>
-          </a:bodyPr>
-          <a:lstStyle/>
-          <a:p>
-            <a:pPr algn="l">
-              <a:lnSpc>
-                <a:spcPct val="95000"/>
-              </a:lnSpc>
-              <a:defRPr sz="2700" b="1">
-                <a:solidFill>
-                  <a:srgbClr val="37183E"/>
-                </a:solidFill>
-                <a:latin typeface="Lato"/>
-              </a:defRPr>
-            </a:pPr>
-            <a:r>
-              <a:t>Marketing e CRM entram depois da conciliação.</a:t>
-            </a:r>
-          </a:p>
-        </p:txBody>
-      </p:sp>
-      <p:sp>
-        <p:nvSpPr>
-          <p:cNvPr id="6" name="TextBox 5"/>
-          <p:cNvSpPr txBox="1"/>
-          <p:nvPr/>
-        </p:nvSpPr>
-        <p:spPr>
-          <a:xfrm>
-            <a:off x="548640" y="1417320"/>
-            <a:ext cx="10789920" cy="310896"/>
-          </a:xfrm>
-          <a:prstGeom prst="rect">
-            <a:avLst/>
-          </a:prstGeom>
-          <a:noFill/>
-        </p:spPr>
-        <p:txBody>
-          <a:bodyPr wrap="square" lIns="0" rIns="0" tIns="0" bIns="0" anchor="t">
-            <a:spAutoFit/>
-          </a:bodyPr>
-          <a:lstStyle/>
-          <a:p>
-            <a:pPr algn="l">
-              <a:lnSpc>
-                <a:spcPct val="100000"/>
-              </a:lnSpc>
-              <a:defRPr sz="1500" b="0">
-                <a:solidFill>
-                  <a:srgbClr val="5D5860"/>
-                </a:solidFill>
-                <a:latin typeface="Lato"/>
-              </a:defRPr>
-            </a:pPr>
-            <a:r>
-              <a:t>O diagnóstico existe; a otimização ainda não seria auditável.</a:t>
-            </a:r>
-          </a:p>
-        </p:txBody>
-      </p:sp>
-      <p:sp>
-        <p:nvSpPr>
-          <p:cNvPr id="7" name="Rectangle 6"/>
-          <p:cNvSpPr/>
-          <p:nvPr/>
-        </p:nvSpPr>
-        <p:spPr>
-          <a:xfrm>
-            <a:off x="548640" y="1865376"/>
-            <a:ext cx="5376672" cy="3236976"/>
-          </a:xfrm>
-          <a:prstGeom prst="rect">
-            <a:avLst/>
-          </a:prstGeom>
-          <a:solidFill>
-            <a:srgbClr val="F7EFFA"/>
-          </a:solidFill>
-          <a:ln>
-            <a:solidFill>
-              <a:srgbClr val="F7EFFA"/>
-            </a:solidFill>
-          </a:ln>
-        </p:spPr>
-        <p:style>
-          <a:lnRef idx="1">
-            <a:schemeClr val="accent1"/>
-          </a:lnRef>
-          <a:fillRef idx="3">
-            <a:schemeClr val="accent1"/>
-          </a:fillRef>
-          <a:effectRef idx="2">
-            <a:schemeClr val="accent1"/>
-          </a:effectRef>
-          <a:fontRef idx="minor">
-            <a:schemeClr val="lt1"/>
-          </a:fontRef>
-        </p:style>
-        <p:txBody>
-          <a:bodyPr rtlCol="0" anchor="ctr"/>
-          <a:lstStyle/>
-          <a:p>
-            <a:pPr algn="ctr"/>
-          </a:p>
-        </p:txBody>
-      </p:sp>
-      <p:sp>
-        <p:nvSpPr>
-          <p:cNvPr id="8" name="TextBox 7"/>
-          <p:cNvSpPr txBox="1"/>
-          <p:nvPr/>
-        </p:nvSpPr>
-        <p:spPr>
-          <a:xfrm>
-            <a:off x="822960" y="2139696"/>
-            <a:ext cx="1828800" cy="219456"/>
-          </a:xfrm>
-          <a:prstGeom prst="rect">
-            <a:avLst/>
-          </a:prstGeom>
-          <a:noFill/>
-        </p:spPr>
-        <p:txBody>
-          <a:bodyPr wrap="square" lIns="0" rIns="0" tIns="0" bIns="0" anchor="t">
-            <a:spAutoFit/>
-          </a:bodyPr>
-          <a:lstStyle/>
-          <a:p>
-            <a:pPr algn="l">
-              <a:lnSpc>
-                <a:spcPct val="100000"/>
-              </a:lnSpc>
-              <a:defRPr sz="950" b="1">
-                <a:solidFill>
-                  <a:srgbClr val="E000D2"/>
-                </a:solidFill>
-                <a:latin typeface="Lato"/>
-              </a:defRPr>
-            </a:pPr>
-            <a:r>
-              <a:t>MARKETING</a:t>
-            </a:r>
-          </a:p>
-        </p:txBody>
-      </p:sp>
-      <p:sp>
-        <p:nvSpPr>
-          <p:cNvPr id="9" name="TextBox 8"/>
-          <p:cNvSpPr txBox="1"/>
-          <p:nvPr/>
-        </p:nvSpPr>
-        <p:spPr>
-          <a:xfrm>
-            <a:off x="822960" y="2496312"/>
-            <a:ext cx="1600200" cy="475488"/>
-          </a:xfrm>
-          <a:prstGeom prst="rect">
-            <a:avLst/>
-          </a:prstGeom>
-          <a:noFill/>
-        </p:spPr>
-        <p:txBody>
-          <a:bodyPr wrap="square" lIns="0" rIns="0" tIns="0" bIns="0" anchor="t">
-            <a:spAutoFit/>
-          </a:bodyPr>
-          <a:lstStyle/>
-          <a:p>
-            <a:pPr algn="l">
-              <a:lnSpc>
-                <a:spcPct val="100000"/>
-              </a:lnSpc>
-              <a:defRPr sz="2700" b="1">
-                <a:solidFill>
-                  <a:srgbClr val="37183E"/>
-                </a:solidFill>
-                <a:latin typeface="Lato"/>
-              </a:defRPr>
-            </a:pPr>
-            <a:r>
-              <a:t>38,2M</a:t>
-            </a:r>
-          </a:p>
-        </p:txBody>
-      </p:sp>
-      <p:sp>
-        <p:nvSpPr>
-          <p:cNvPr id="10" name="TextBox 9"/>
-          <p:cNvSpPr txBox="1"/>
-          <p:nvPr/>
-        </p:nvSpPr>
-        <p:spPr>
-          <a:xfrm>
-            <a:off x="2395728" y="2551176"/>
-            <a:ext cx="2971800" cy="457200"/>
-          </a:xfrm>
-          <a:prstGeom prst="rect">
-            <a:avLst/>
-          </a:prstGeom>
-          <a:noFill/>
-        </p:spPr>
-        <p:txBody>
-          <a:bodyPr wrap="square" lIns="0" rIns="0" tIns="0" bIns="0" anchor="t">
-            <a:spAutoFit/>
-          </a:bodyPr>
-          <a:lstStyle/>
-          <a:p>
-            <a:pPr algn="l">
-              <a:lnSpc>
-                <a:spcPct val="100000"/>
-              </a:lnSpc>
-              <a:defRPr sz="1150" b="0">
-                <a:solidFill>
-                  <a:srgbClr val="5D5860"/>
-                </a:solidFill>
-                <a:latin typeface="Lato"/>
-              </a:defRPr>
-            </a:pPr>
-            <a:r>
-              <a:t>conversões declaradas em campanhas iniciadas em 2023</a:t>
-            </a:r>
-          </a:p>
-        </p:txBody>
-      </p:sp>
-      <p:sp>
-        <p:nvSpPr>
-          <p:cNvPr id="11" name="TextBox 10"/>
-          <p:cNvSpPr txBox="1"/>
-          <p:nvPr/>
-        </p:nvSpPr>
-        <p:spPr>
-          <a:xfrm>
-            <a:off x="822960" y="3246120"/>
-            <a:ext cx="1600200" cy="384048"/>
-          </a:xfrm>
-          <a:prstGeom prst="rect">
-            <a:avLst/>
-          </a:prstGeom>
-          <a:noFill/>
-        </p:spPr>
-        <p:txBody>
-          <a:bodyPr wrap="square" lIns="0" rIns="0" tIns="0" bIns="0" anchor="t">
-            <a:spAutoFit/>
-          </a:bodyPr>
-          <a:lstStyle/>
-          <a:p>
-            <a:pPr algn="l">
-              <a:lnSpc>
-                <a:spcPct val="100000"/>
-              </a:lnSpc>
-              <a:defRPr sz="2100" b="1">
-                <a:solidFill>
-                  <a:srgbClr val="37183E"/>
-                </a:solidFill>
-                <a:latin typeface="Lato"/>
-              </a:defRPr>
-            </a:pPr>
-            <a:r>
-              <a:t>26,5 mil</a:t>
-            </a:r>
-          </a:p>
-        </p:txBody>
-      </p:sp>
-      <p:sp>
-        <p:nvSpPr>
-          <p:cNvPr id="12" name="TextBox 11"/>
-          <p:cNvSpPr txBox="1"/>
-          <p:nvPr/>
-        </p:nvSpPr>
-        <p:spPr>
-          <a:xfrm>
-            <a:off x="2395728" y="3246120"/>
-            <a:ext cx="2971800" cy="512064"/>
-          </a:xfrm>
-          <a:prstGeom prst="rect">
-            <a:avLst/>
-          </a:prstGeom>
-          <a:noFill/>
-        </p:spPr>
-        <p:txBody>
-          <a:bodyPr wrap="square" lIns="0" rIns="0" tIns="0" bIns="0" anchor="t">
-            <a:spAutoFit/>
-          </a:bodyPr>
-          <a:lstStyle/>
-          <a:p>
-            <a:pPr algn="l">
-              <a:lnSpc>
-                <a:spcPct val="100000"/>
-              </a:lnSpc>
-              <a:defRPr sz="1150" b="0">
-                <a:solidFill>
-                  <a:srgbClr val="5D5860"/>
-                </a:solidFill>
-                <a:latin typeface="Lato"/>
-              </a:defRPr>
-            </a:pPr>
-            <a:r>
-              <a:t>registros de venda em 2023 — sem campaign_id, UTM ou janela de atribuição</a:t>
-            </a:r>
-          </a:p>
-        </p:txBody>
-      </p:sp>
-      <p:cxnSp>
-        <p:nvCxnSpPr>
-          <p:cNvPr id="13" name="Connector 12"/>
-          <p:cNvCxnSpPr/>
-          <p:nvPr/>
-        </p:nvCxnSpPr>
-        <p:spPr>
-          <a:xfrm>
-            <a:off x="822960" y="4005072"/>
-            <a:ext cx="4773168" cy="0"/>
-          </a:xfrm>
-          <a:prstGeom prst="line">
-            <a:avLst/>
-          </a:prstGeom>
-          <a:ln w="10160">
-            <a:solidFill>
-              <a:srgbClr val="DEC6E4"/>
-            </a:solidFill>
-          </a:ln>
-        </p:spPr>
-        <p:style>
-          <a:lnRef idx="2">
-            <a:schemeClr val="accent1"/>
-          </a:lnRef>
-          <a:fillRef idx="0">
-            <a:schemeClr val="accent1"/>
-          </a:fillRef>
-          <a:effectRef idx="1">
-            <a:schemeClr val="accent1"/>
-          </a:effectRef>
-          <a:fontRef idx="minor">
-            <a:schemeClr val="tx1"/>
-          </a:fontRef>
-        </p:style>
-      </p:cxnSp>
-      <p:sp>
-        <p:nvSpPr>
-          <p:cNvPr id="14" name="TextBox 13"/>
-          <p:cNvSpPr txBox="1"/>
-          <p:nvPr/>
-        </p:nvSpPr>
-        <p:spPr>
-          <a:xfrm>
-            <a:off x="822960" y="4242816"/>
-            <a:ext cx="1207008" cy="201168"/>
-          </a:xfrm>
-          <a:prstGeom prst="rect">
-            <a:avLst/>
-          </a:prstGeom>
-          <a:noFill/>
-        </p:spPr>
-        <p:txBody>
-          <a:bodyPr wrap="square" lIns="0" rIns="0" tIns="0" bIns="0" anchor="t">
-            <a:spAutoFit/>
-          </a:bodyPr>
-          <a:lstStyle/>
-          <a:p>
-            <a:pPr algn="l">
-              <a:lnSpc>
-                <a:spcPct val="100000"/>
-              </a:lnSpc>
-              <a:defRPr sz="950" b="1">
-                <a:solidFill>
-                  <a:srgbClr val="E000D2"/>
-                </a:solidFill>
-                <a:latin typeface="Lato"/>
-              </a:defRPr>
-            </a:pPr>
-            <a:r>
-              <a:t>PRÓXIMO PASSO</a:t>
-            </a:r>
-          </a:p>
-        </p:txBody>
-      </p:sp>
-      <p:sp>
-        <p:nvSpPr>
-          <p:cNvPr id="15" name="TextBox 14"/>
-          <p:cNvSpPr txBox="1"/>
-          <p:nvPr/>
-        </p:nvSpPr>
-        <p:spPr>
-          <a:xfrm>
-            <a:off x="2103120" y="4187952"/>
-            <a:ext cx="3291840" cy="493776"/>
-          </a:xfrm>
-          <a:prstGeom prst="rect">
-            <a:avLst/>
-          </a:prstGeom>
-          <a:noFill/>
-        </p:spPr>
-        <p:txBody>
-          <a:bodyPr wrap="square" lIns="0" rIns="0" tIns="0" bIns="0" anchor="t">
-            <a:spAutoFit/>
-          </a:bodyPr>
-          <a:lstStyle/>
-          <a:p>
-            <a:pPr algn="l">
-              <a:lnSpc>
-                <a:spcPct val="100000"/>
-              </a:lnSpc>
-              <a:defRPr sz="1250" b="1">
-                <a:solidFill>
-                  <a:srgbClr val="37183E"/>
-                </a:solidFill>
-                <a:latin typeface="Lato"/>
-              </a:defRPr>
-            </a:pPr>
-            <a:r>
-              <a:t>Instrumentar checkout e conciliar mídia → pedido → margem antes de realocar verba.</a:t>
-            </a:r>
-          </a:p>
-        </p:txBody>
-      </p:sp>
-      <p:sp>
-        <p:nvSpPr>
-          <p:cNvPr id="16" name="Rectangle 15"/>
-          <p:cNvSpPr/>
-          <p:nvPr/>
-        </p:nvSpPr>
-        <p:spPr>
-          <a:xfrm>
-            <a:off x="6254496" y="1865376"/>
-            <a:ext cx="5385816" cy="3236976"/>
-          </a:xfrm>
-          <a:prstGeom prst="rect">
-            <a:avLst/>
-          </a:prstGeom>
-          <a:solidFill>
-            <a:srgbClr val="F7EFFA"/>
-          </a:solidFill>
-          <a:ln>
-            <a:solidFill>
-              <a:srgbClr val="F7EFFA"/>
-            </a:solidFill>
-          </a:ln>
-        </p:spPr>
-        <p:style>
-          <a:lnRef idx="1">
-            <a:schemeClr val="accent1"/>
-          </a:lnRef>
-          <a:fillRef idx="3">
-            <a:schemeClr val="accent1"/>
-          </a:fillRef>
-          <a:effectRef idx="2">
-            <a:schemeClr val="accent1"/>
-          </a:effectRef>
-          <a:fontRef idx="minor">
-            <a:schemeClr val="lt1"/>
-          </a:fontRef>
-        </p:style>
-        <p:txBody>
-          <a:bodyPr rtlCol="0" anchor="ctr"/>
-          <a:lstStyle/>
-          <a:p>
-            <a:pPr algn="ctr"/>
-          </a:p>
-        </p:txBody>
-      </p:sp>
-      <p:sp>
-        <p:nvSpPr>
-          <p:cNvPr id="17" name="TextBox 16"/>
-          <p:cNvSpPr txBox="1"/>
-          <p:nvPr/>
-        </p:nvSpPr>
-        <p:spPr>
-          <a:xfrm>
-            <a:off x="6528816" y="2139696"/>
-            <a:ext cx="1828800" cy="219456"/>
-          </a:xfrm>
-          <a:prstGeom prst="rect">
-            <a:avLst/>
-          </a:prstGeom>
-          <a:noFill/>
-        </p:spPr>
-        <p:txBody>
-          <a:bodyPr wrap="square" lIns="0" rIns="0" tIns="0" bIns="0" anchor="t">
-            <a:spAutoFit/>
-          </a:bodyPr>
-          <a:lstStyle/>
-          <a:p>
-            <a:pPr algn="l">
-              <a:lnSpc>
-                <a:spcPct val="100000"/>
-              </a:lnSpc>
-              <a:defRPr sz="950" b="1">
-                <a:solidFill>
-                  <a:srgbClr val="E000D2"/>
-                </a:solidFill>
-                <a:latin typeface="Lato"/>
-              </a:defRPr>
-            </a:pPr>
-            <a:r>
-              <a:t>CRM</a:t>
-            </a:r>
-          </a:p>
-        </p:txBody>
-      </p:sp>
-      <p:sp>
-        <p:nvSpPr>
-          <p:cNvPr id="18" name="TextBox 17"/>
-          <p:cNvSpPr txBox="1"/>
-          <p:nvPr/>
-        </p:nvSpPr>
-        <p:spPr>
-          <a:xfrm>
-            <a:off x="6528816" y="2496312"/>
-            <a:ext cx="2103120" cy="475488"/>
-          </a:xfrm>
-          <a:prstGeom prst="rect">
-            <a:avLst/>
-          </a:prstGeom>
-          <a:noFill/>
-        </p:spPr>
-        <p:txBody>
-          <a:bodyPr wrap="square" lIns="0" rIns="0" tIns="0" bIns="0" anchor="t">
-            <a:spAutoFit/>
-          </a:bodyPr>
-          <a:lstStyle/>
-          <a:p>
-            <a:pPr algn="l">
-              <a:lnSpc>
-                <a:spcPct val="100000"/>
-              </a:lnSpc>
-              <a:defRPr sz="2700" b="1">
-                <a:solidFill>
-                  <a:srgbClr val="37183E"/>
-                </a:solidFill>
-                <a:latin typeface="Lato"/>
-              </a:defRPr>
-            </a:pPr>
-            <a:r>
-              <a:t>346 / 15 mil</a:t>
-            </a:r>
-          </a:p>
-        </p:txBody>
-      </p:sp>
-      <p:sp>
-        <p:nvSpPr>
-          <p:cNvPr id="19" name="TextBox 18"/>
-          <p:cNvSpPr txBox="1"/>
-          <p:nvPr/>
-        </p:nvSpPr>
-        <p:spPr>
-          <a:xfrm>
-            <a:off x="8613648" y="2551176"/>
-            <a:ext cx="2468880" cy="384048"/>
-          </a:xfrm>
-          <a:prstGeom prst="rect">
-            <a:avLst/>
-          </a:prstGeom>
-          <a:noFill/>
-        </p:spPr>
-        <p:txBody>
-          <a:bodyPr wrap="square" lIns="0" rIns="0" tIns="0" bIns="0" anchor="t">
-            <a:spAutoFit/>
-          </a:bodyPr>
-          <a:lstStyle/>
-          <a:p>
-            <a:pPr algn="l">
-              <a:lnSpc>
-                <a:spcPct val="100000"/>
-              </a:lnSpc>
-              <a:defRPr sz="1150" b="0">
-                <a:solidFill>
-                  <a:srgbClr val="5D5860"/>
-                </a:solidFill>
-                <a:latin typeface="Lato"/>
-              </a:defRPr>
-            </a:pPr>
-            <a:r>
-              <a:t>clientes aparecem no extrato de Vendas</a:t>
-            </a:r>
-          </a:p>
-        </p:txBody>
-      </p:sp>
-      <p:sp>
-        <p:nvSpPr>
-          <p:cNvPr id="20" name="TextBox 19"/>
-          <p:cNvSpPr txBox="1"/>
-          <p:nvPr/>
-        </p:nvSpPr>
-        <p:spPr>
-          <a:xfrm>
-            <a:off x="6528816" y="3246120"/>
-            <a:ext cx="1417320" cy="384048"/>
-          </a:xfrm>
-          <a:prstGeom prst="rect">
-            <a:avLst/>
-          </a:prstGeom>
-          <a:noFill/>
-        </p:spPr>
-        <p:txBody>
-          <a:bodyPr wrap="square" lIns="0" rIns="0" tIns="0" bIns="0" anchor="t">
-            <a:spAutoFit/>
-          </a:bodyPr>
-          <a:lstStyle/>
-          <a:p>
-            <a:pPr algn="l">
-              <a:lnSpc>
-                <a:spcPct val="100000"/>
-              </a:lnSpc>
-              <a:defRPr sz="2100" b="1">
-                <a:solidFill>
-                  <a:srgbClr val="37183E"/>
-                </a:solidFill>
-                <a:latin typeface="Lato"/>
-              </a:defRPr>
-            </a:pPr>
-            <a:r>
-              <a:t>40,6%</a:t>
-            </a:r>
-          </a:p>
-        </p:txBody>
-      </p:sp>
-      <p:sp>
-        <p:nvSpPr>
-          <p:cNvPr id="21" name="TextBox 20"/>
-          <p:cNvSpPr txBox="1"/>
-          <p:nvPr/>
-        </p:nvSpPr>
-        <p:spPr>
-          <a:xfrm>
-            <a:off x="8010144" y="3246120"/>
-            <a:ext cx="3063240" cy="512064"/>
-          </a:xfrm>
-          <a:prstGeom prst="rect">
-            <a:avLst/>
-          </a:prstGeom>
-          <a:noFill/>
-        </p:spPr>
-        <p:txBody>
-          <a:bodyPr wrap="square" lIns="0" rIns="0" tIns="0" bIns="0" anchor="t">
-            <a:spAutoFit/>
-          </a:bodyPr>
-          <a:lstStyle/>
-          <a:p>
-            <a:pPr algn="l">
-              <a:lnSpc>
-                <a:spcPct val="100000"/>
-              </a:lnSpc>
-              <a:defRPr sz="1150" b="0">
-                <a:solidFill>
-                  <a:srgbClr val="5D5860"/>
-                </a:solidFill>
-                <a:latin typeface="Lato"/>
-              </a:defRPr>
-            </a:pPr>
-            <a:r>
-              <a:t>dos registros estão concentrados em um único cliente; LTV não reconcilia com o ERP</a:t>
-            </a:r>
-          </a:p>
-        </p:txBody>
-      </p:sp>
-      <p:cxnSp>
-        <p:nvCxnSpPr>
-          <p:cNvPr id="22" name="Connector 21"/>
-          <p:cNvCxnSpPr/>
-          <p:nvPr/>
-        </p:nvCxnSpPr>
-        <p:spPr>
-          <a:xfrm>
-            <a:off x="6528816" y="4005072"/>
-            <a:ext cx="4782312" cy="0"/>
-          </a:xfrm>
-          <a:prstGeom prst="line">
-            <a:avLst/>
-          </a:prstGeom>
-          <a:ln w="10160">
-            <a:solidFill>
-              <a:srgbClr val="DEC6E4"/>
-            </a:solidFill>
-          </a:ln>
-        </p:spPr>
-        <p:style>
-          <a:lnRef idx="2">
-            <a:schemeClr val="accent1"/>
-          </a:lnRef>
-          <a:fillRef idx="0">
-            <a:schemeClr val="accent1"/>
-          </a:fillRef>
-          <a:effectRef idx="1">
-            <a:schemeClr val="accent1"/>
-          </a:effectRef>
-          <a:fontRef idx="minor">
-            <a:schemeClr val="tx1"/>
-          </a:fontRef>
-        </p:style>
-      </p:cxnSp>
-      <p:sp>
-        <p:nvSpPr>
-          <p:cNvPr id="23" name="TextBox 22"/>
-          <p:cNvSpPr txBox="1"/>
-          <p:nvPr/>
-        </p:nvSpPr>
-        <p:spPr>
-          <a:xfrm>
-            <a:off x="6528816" y="4242816"/>
-            <a:ext cx="1207008" cy="201168"/>
-          </a:xfrm>
-          <a:prstGeom prst="rect">
-            <a:avLst/>
-          </a:prstGeom>
-          <a:noFill/>
-        </p:spPr>
-        <p:txBody>
-          <a:bodyPr wrap="square" lIns="0" rIns="0" tIns="0" bIns="0" anchor="t">
-            <a:spAutoFit/>
-          </a:bodyPr>
-          <a:lstStyle/>
-          <a:p>
-            <a:pPr algn="l">
-              <a:lnSpc>
-                <a:spcPct val="100000"/>
-              </a:lnSpc>
-              <a:defRPr sz="950" b="1">
-                <a:solidFill>
-                  <a:srgbClr val="E000D2"/>
-                </a:solidFill>
-                <a:latin typeface="Lato"/>
-              </a:defRPr>
-            </a:pPr>
-            <a:r>
-              <a:t>PRÓXIMO PASSO</a:t>
-            </a:r>
-          </a:p>
-        </p:txBody>
-      </p:sp>
-      <p:sp>
-        <p:nvSpPr>
-          <p:cNvPr id="24" name="TextBox 23"/>
-          <p:cNvSpPr txBox="1"/>
-          <p:nvPr/>
-        </p:nvSpPr>
-        <p:spPr>
-          <a:xfrm>
-            <a:off x="7808975" y="4187952"/>
-            <a:ext cx="3246120" cy="493776"/>
-          </a:xfrm>
-          <a:prstGeom prst="rect">
-            <a:avLst/>
-          </a:prstGeom>
-          <a:noFill/>
-        </p:spPr>
-        <p:txBody>
-          <a:bodyPr wrap="square" lIns="0" rIns="0" tIns="0" bIns="0" anchor="t">
-            <a:spAutoFit/>
-          </a:bodyPr>
-          <a:lstStyle/>
-          <a:p>
-            <a:pPr algn="l">
-              <a:lnSpc>
-                <a:spcPct val="100000"/>
-              </a:lnSpc>
-              <a:defRPr sz="1250" b="1">
-                <a:solidFill>
-                  <a:srgbClr val="37183E"/>
-                </a:solidFill>
-                <a:latin typeface="Lato"/>
-              </a:defRPr>
-            </a:pPr>
-            <a:r>
-              <a:t>Resolver identidade do cliente e recomputar valor observado antes de segmentar incentivos.</a:t>
-            </a:r>
-          </a:p>
-        </p:txBody>
-      </p:sp>
-      <p:sp>
-        <p:nvSpPr>
-          <p:cNvPr id="25" name="Rectangle 24"/>
-          <p:cNvSpPr/>
-          <p:nvPr/>
-        </p:nvSpPr>
-        <p:spPr>
-          <a:xfrm>
-            <a:off x="548640" y="5376672"/>
-            <a:ext cx="11091672" cy="548640"/>
-          </a:xfrm>
-          <a:prstGeom prst="rect">
-            <a:avLst/>
-          </a:prstGeom>
-          <a:solidFill>
-            <a:srgbClr val="561265"/>
-          </a:solidFill>
-          <a:ln>
-            <a:solidFill>
-              <a:srgbClr val="561265"/>
-            </a:solidFill>
-          </a:ln>
-        </p:spPr>
-        <p:style>
-          <a:lnRef idx="1">
-            <a:schemeClr val="accent1"/>
-          </a:lnRef>
-          <a:fillRef idx="3">
-            <a:schemeClr val="accent1"/>
-          </a:fillRef>
-          <a:effectRef idx="2">
-            <a:schemeClr val="accent1"/>
-          </a:effectRef>
-          <a:fontRef idx="minor">
-            <a:schemeClr val="lt1"/>
-          </a:fontRef>
-        </p:style>
-        <p:txBody>
-          <a:bodyPr rtlCol="0" anchor="ctr"/>
-          <a:lstStyle/>
-          <a:p>
-            <a:pPr algn="ctr"/>
-          </a:p>
-        </p:txBody>
-      </p:sp>
-      <p:sp>
-        <p:nvSpPr>
-          <p:cNvPr id="26" name="TextBox 25"/>
-          <p:cNvSpPr txBox="1"/>
-          <p:nvPr/>
-        </p:nvSpPr>
-        <p:spPr>
-          <a:xfrm>
-            <a:off x="804672" y="5550408"/>
-            <a:ext cx="1417320" cy="201168"/>
-          </a:xfrm>
-          <a:prstGeom prst="rect">
-            <a:avLst/>
-          </a:prstGeom>
-          <a:noFill/>
-        </p:spPr>
-        <p:txBody>
-          <a:bodyPr wrap="square" lIns="0" rIns="0" tIns="0" bIns="0" anchor="t">
-            <a:spAutoFit/>
-          </a:bodyPr>
-          <a:lstStyle/>
-          <a:p>
-            <a:pPr algn="l">
-              <a:lnSpc>
-                <a:spcPct val="100000"/>
-              </a:lnSpc>
-              <a:defRPr sz="950" b="1">
-                <a:solidFill>
-                  <a:srgbClr val="E000D2"/>
-                </a:solidFill>
-                <a:latin typeface="Lato"/>
-              </a:defRPr>
-            </a:pPr>
-            <a:r>
-              <a:t>RESPOSTA À BANCA</a:t>
-            </a:r>
-          </a:p>
-        </p:txBody>
-      </p:sp>
-      <p:sp>
-        <p:nvSpPr>
-          <p:cNvPr id="27" name="TextBox 26"/>
-          <p:cNvSpPr txBox="1"/>
-          <p:nvPr/>
-        </p:nvSpPr>
-        <p:spPr>
-          <a:xfrm>
-            <a:off x="2231136" y="5495544"/>
-            <a:ext cx="9015984" cy="292608"/>
-          </a:xfrm>
-          <a:prstGeom prst="rect">
-            <a:avLst/>
-          </a:prstGeom>
-          <a:noFill/>
-        </p:spPr>
-        <p:txBody>
-          <a:bodyPr wrap="square" lIns="0" rIns="0" tIns="0" bIns="0" anchor="t">
-            <a:spAutoFit/>
-          </a:bodyPr>
-          <a:lstStyle/>
-          <a:p>
-            <a:pPr algn="l">
-              <a:lnSpc>
-                <a:spcPct val="100000"/>
-              </a:lnSpc>
-              <a:defRPr sz="1250" b="1">
-                <a:solidFill>
-                  <a:srgbClr val="FFFFFF"/>
-                </a:solidFill>
-                <a:latin typeface="Lato"/>
-              </a:defRPr>
-            </a:pPr>
-            <a:r>
-              <a:t>Não otimizamos canal ou segmento porque isso criaria falsa precisão; priorizamos primeiro o dado conciliável.</a:t>
-            </a:r>
-          </a:p>
-        </p:txBody>
-      </p:sp>
-      <p:cxnSp>
-        <p:nvCxnSpPr>
-          <p:cNvPr id="28" name="Connector 27"/>
-          <p:cNvCxnSpPr/>
-          <p:nvPr/>
-        </p:nvCxnSpPr>
-        <p:spPr>
-          <a:xfrm>
-            <a:off x="548640" y="6327648"/>
-            <a:ext cx="11091672" cy="0"/>
-          </a:xfrm>
-          <a:prstGeom prst="line">
-            <a:avLst/>
-          </a:prstGeom>
-          <a:ln w="10160">
-            <a:solidFill>
-              <a:srgbClr val="DEC6E4"/>
-            </a:solidFill>
-          </a:ln>
-        </p:spPr>
-        <p:style>
-          <a:lnRef idx="2">
-            <a:schemeClr val="accent1"/>
-          </a:lnRef>
-          <a:fillRef idx="0">
-            <a:schemeClr val="accent1"/>
-          </a:fillRef>
-          <a:effectRef idx="1">
-            <a:schemeClr val="accent1"/>
-          </a:effectRef>
-          <a:fontRef idx="minor">
-            <a:schemeClr val="tx1"/>
-          </a:fontRef>
-        </p:style>
-      </p:cxnSp>
-      <p:sp>
-        <p:nvSpPr>
-          <p:cNvPr id="29" name="TextBox 28"/>
-          <p:cNvSpPr txBox="1"/>
-          <p:nvPr/>
-        </p:nvSpPr>
-        <p:spPr>
-          <a:xfrm>
-            <a:off x="11201400" y="6419088"/>
-            <a:ext cx="438912" cy="201168"/>
-          </a:xfrm>
-          <a:prstGeom prst="rect">
-            <a:avLst/>
-          </a:prstGeom>
-          <a:noFill/>
-        </p:spPr>
-        <p:txBody>
-          <a:bodyPr wrap="square" lIns="0" rIns="0" tIns="0" bIns="0" anchor="t">
-            <a:spAutoFit/>
-          </a:bodyPr>
-          <a:lstStyle/>
-          <a:p>
-            <a:pPr algn="r">
-              <a:lnSpc>
-                <a:spcPct val="100000"/>
-              </a:lnSpc>
-              <a:defRPr sz="950" b="1">
-                <a:solidFill>
-                  <a:srgbClr val="37183E"/>
-                </a:solidFill>
-                <a:latin typeface="Lato"/>
-              </a:defRPr>
-            </a:pPr>
-            <a:r>
-              <a:t>A4</a:t>
+              <a:t>APÊNDICE</a:t>
             </a:r>
           </a:p>
         </p:txBody>
